--- a/shadow_mapping_new.pptx
+++ b/shadow_mapping_new.pptx
@@ -5,25 +5,27 @@
     <p:sldMasterId id="2147483648" r:id="rId1"/>
   </p:sldMasterIdLst>
   <p:notesMasterIdLst>
-    <p:notesMasterId r:id="rId18"/>
+    <p:notesMasterId r:id="rId20"/>
   </p:notesMasterIdLst>
   <p:sldIdLst>
     <p:sldId id="256" r:id="rId2"/>
     <p:sldId id="257" r:id="rId3"/>
     <p:sldId id="258" r:id="rId4"/>
     <p:sldId id="259" r:id="rId5"/>
-    <p:sldId id="260" r:id="rId6"/>
-    <p:sldId id="261" r:id="rId7"/>
-    <p:sldId id="262" r:id="rId8"/>
-    <p:sldId id="263" r:id="rId9"/>
-    <p:sldId id="264" r:id="rId10"/>
-    <p:sldId id="265" r:id="rId11"/>
-    <p:sldId id="266" r:id="rId12"/>
-    <p:sldId id="267" r:id="rId13"/>
-    <p:sldId id="268" r:id="rId14"/>
-    <p:sldId id="269" r:id="rId15"/>
-    <p:sldId id="270" r:id="rId16"/>
-    <p:sldId id="271" r:id="rId17"/>
+    <p:sldId id="272" r:id="rId6"/>
+    <p:sldId id="273" r:id="rId7"/>
+    <p:sldId id="274" r:id="rId8"/>
+    <p:sldId id="261" r:id="rId9"/>
+    <p:sldId id="262" r:id="rId10"/>
+    <p:sldId id="263" r:id="rId11"/>
+    <p:sldId id="264" r:id="rId12"/>
+    <p:sldId id="265" r:id="rId13"/>
+    <p:sldId id="266" r:id="rId14"/>
+    <p:sldId id="267" r:id="rId15"/>
+    <p:sldId id="268" r:id="rId16"/>
+    <p:sldId id="269" r:id="rId17"/>
+    <p:sldId id="270" r:id="rId18"/>
+    <p:sldId id="271" r:id="rId19"/>
   </p:sldIdLst>
   <p:sldSz cx="9144000" cy="5143500" type="screen16x9"/>
   <p:notesSz cx="5143500" cy="9144000"/>
@@ -924,6 +926,174 @@
 </p:notes>
 </file>
 
+<file path=ppt/notesSlides/notesSlide17.xml><?xml version="1.0" encoding="utf-8"?>
+<p:notes xmlns:a="http://schemas.openxmlformats.org/drawingml/2006/main" xmlns:r="http://schemas.openxmlformats.org/officeDocument/2006/relationships" xmlns:p="http://schemas.openxmlformats.org/presentationml/2006/main">
+  <p:cSld>
+    <p:spTree>
+      <p:nvGrpSpPr>
+        <p:cNvPr id="1" name=""/>
+        <p:cNvGrpSpPr/>
+        <p:nvPr/>
+      </p:nvGrpSpPr>
+      <p:grpSpPr>
+        <a:xfrm>
+          <a:off x="0" y="0"/>
+          <a:ext cx="0" cy="0"/>
+          <a:chOff x="0" y="0"/>
+          <a:chExt cx="0" cy="0"/>
+        </a:xfrm>
+      </p:grpSpPr>
+      <p:sp>
+        <p:nvSpPr>
+          <p:cNvPr id="2" name="Slide Image Placeholder 1"/>
+          <p:cNvSpPr>
+            <a:spLocks noGrp="1" noRot="1" noChangeAspect="1"/>
+          </p:cNvSpPr>
+          <p:nvPr>
+            <p:ph type="sldImg"/>
+          </p:nvPr>
+        </p:nvSpPr>
+        <p:spPr/>
+      </p:sp>
+      <p:sp>
+        <p:nvSpPr>
+          <p:cNvPr id="3" name="Notes Placeholder 2"/>
+          <p:cNvSpPr>
+            <a:spLocks noGrp="1"/>
+          </p:cNvSpPr>
+          <p:nvPr>
+            <p:ph type="body" idx="1"/>
+          </p:nvPr>
+        </p:nvSpPr>
+        <p:spPr/>
+        <p:txBody>
+          <a:bodyPr/>
+          <a:lstStyle/>
+          <a:p>
+            <a:endParaRPr lang="en-US" dirty="0"/>
+          </a:p>
+        </p:txBody>
+      </p:sp>
+      <p:sp>
+        <p:nvSpPr>
+          <p:cNvPr id="4" name="Slide Number Placeholder 3"/>
+          <p:cNvSpPr>
+            <a:spLocks noGrp="1"/>
+          </p:cNvSpPr>
+          <p:nvPr>
+            <p:ph type="sldNum" sz="quarter" idx="10"/>
+          </p:nvPr>
+        </p:nvSpPr>
+        <p:spPr/>
+        <p:txBody>
+          <a:bodyPr/>
+          <a:lstStyle/>
+          <a:p>
+            <a:fld id="{F7021451-1387-4CA6-816F-3879F97B5CBC}" type="slidenum">
+              <a:rPr lang="en-US"/>
+              <a:t>17</a:t>
+            </a:fld>
+            <a:endParaRPr lang="en-US"/>
+          </a:p>
+        </p:txBody>
+      </p:sp>
+    </p:spTree>
+    <p:extLst>
+      <p:ext uri="{BB962C8B-B14F-4D97-AF65-F5344CB8AC3E}">
+        <p14:creationId xmlns:p14="http://schemas.microsoft.com/office/powerpoint/2010/main" val="1024086991"/>
+      </p:ext>
+    </p:extLst>
+  </p:cSld>
+  <p:clrMapOvr>
+    <a:masterClrMapping/>
+  </p:clrMapOvr>
+</p:notes>
+</file>
+
+<file path=ppt/notesSlides/notesSlide18.xml><?xml version="1.0" encoding="utf-8"?>
+<p:notes xmlns:a="http://schemas.openxmlformats.org/drawingml/2006/main" xmlns:r="http://schemas.openxmlformats.org/officeDocument/2006/relationships" xmlns:p="http://schemas.openxmlformats.org/presentationml/2006/main">
+  <p:cSld>
+    <p:spTree>
+      <p:nvGrpSpPr>
+        <p:cNvPr id="1" name=""/>
+        <p:cNvGrpSpPr/>
+        <p:nvPr/>
+      </p:nvGrpSpPr>
+      <p:grpSpPr>
+        <a:xfrm>
+          <a:off x="0" y="0"/>
+          <a:ext cx="0" cy="0"/>
+          <a:chOff x="0" y="0"/>
+          <a:chExt cx="0" cy="0"/>
+        </a:xfrm>
+      </p:grpSpPr>
+      <p:sp>
+        <p:nvSpPr>
+          <p:cNvPr id="2" name="Slide Image Placeholder 1"/>
+          <p:cNvSpPr>
+            <a:spLocks noGrp="1" noRot="1" noChangeAspect="1"/>
+          </p:cNvSpPr>
+          <p:nvPr>
+            <p:ph type="sldImg"/>
+          </p:nvPr>
+        </p:nvSpPr>
+        <p:spPr/>
+      </p:sp>
+      <p:sp>
+        <p:nvSpPr>
+          <p:cNvPr id="3" name="Notes Placeholder 2"/>
+          <p:cNvSpPr>
+            <a:spLocks noGrp="1"/>
+          </p:cNvSpPr>
+          <p:nvPr>
+            <p:ph type="body" idx="1"/>
+          </p:nvPr>
+        </p:nvSpPr>
+        <p:spPr/>
+        <p:txBody>
+          <a:bodyPr/>
+          <a:lstStyle/>
+          <a:p>
+            <a:endParaRPr lang="en-US" dirty="0"/>
+          </a:p>
+        </p:txBody>
+      </p:sp>
+      <p:sp>
+        <p:nvSpPr>
+          <p:cNvPr id="4" name="Slide Number Placeholder 3"/>
+          <p:cNvSpPr>
+            <a:spLocks noGrp="1"/>
+          </p:cNvSpPr>
+          <p:nvPr>
+            <p:ph type="sldNum" sz="quarter" idx="10"/>
+          </p:nvPr>
+        </p:nvSpPr>
+        <p:spPr/>
+        <p:txBody>
+          <a:bodyPr/>
+          <a:lstStyle/>
+          <a:p>
+            <a:fld id="{F7021451-1387-4CA6-816F-3879F97B5CBC}" type="slidenum">
+              <a:rPr lang="en-US"/>
+              <a:t>18</a:t>
+            </a:fld>
+            <a:endParaRPr lang="en-US"/>
+          </a:p>
+        </p:txBody>
+      </p:sp>
+    </p:spTree>
+    <p:extLst>
+      <p:ext uri="{BB962C8B-B14F-4D97-AF65-F5344CB8AC3E}">
+        <p14:creationId xmlns:p14="http://schemas.microsoft.com/office/powerpoint/2010/main" val="1024086991"/>
+      </p:ext>
+    </p:extLst>
+  </p:cSld>
+  <p:clrMapOvr>
+    <a:masterClrMapping/>
+  </p:clrMapOvr>
+</p:notes>
+</file>
+
 <file path=ppt/notesSlides/notesSlide2.xml><?xml version="1.0" encoding="utf-8"?>
 <p:notes xmlns:a="http://schemas.openxmlformats.org/drawingml/2006/main" xmlns:r="http://schemas.openxmlformats.org/officeDocument/2006/relationships" xmlns:p="http://schemas.openxmlformats.org/presentationml/2006/main">
   <p:cSld>
@@ -1181,7 +1351,13 @@
   <p:cSld>
     <p:spTree>
       <p:nvGrpSpPr>
-        <p:cNvPr id="1" name=""/>
+        <p:cNvPr id="1" name="">
+          <a:extLst>
+            <a:ext uri="{FF2B5EF4-FFF2-40B4-BE49-F238E27FC236}">
+              <a16:creationId xmlns:a16="http://schemas.microsoft.com/office/drawing/2014/main" id="{A0886C5A-ADAA-FB3E-80B5-F5D0E01E129F}"/>
+            </a:ext>
+          </a:extLst>
+        </p:cNvPr>
         <p:cNvGrpSpPr/>
         <p:nvPr/>
       </p:nvGrpSpPr>
@@ -1195,7 +1371,13 @@
       </p:grpSpPr>
       <p:sp>
         <p:nvSpPr>
-          <p:cNvPr id="2" name="Slide Image Placeholder 1"/>
+          <p:cNvPr id="2" name="Slide Image Placeholder 1">
+            <a:extLst>
+              <a:ext uri="{FF2B5EF4-FFF2-40B4-BE49-F238E27FC236}">
+                <a16:creationId xmlns:a16="http://schemas.microsoft.com/office/drawing/2014/main" id="{C7F1F379-145C-8ACB-0905-86F6785D2D8C}"/>
+              </a:ext>
+            </a:extLst>
+          </p:cNvPr>
           <p:cNvSpPr>
             <a:spLocks noGrp="1" noRot="1" noChangeAspect="1"/>
           </p:cNvSpPr>
@@ -1207,7 +1389,13 @@
       </p:sp>
       <p:sp>
         <p:nvSpPr>
-          <p:cNvPr id="3" name="Notes Placeholder 2"/>
+          <p:cNvPr id="3" name="Notes Placeholder 2">
+            <a:extLst>
+              <a:ext uri="{FF2B5EF4-FFF2-40B4-BE49-F238E27FC236}">
+                <a16:creationId xmlns:a16="http://schemas.microsoft.com/office/drawing/2014/main" id="{A22B6606-BF84-5908-5D28-415D87F8DF3C}"/>
+              </a:ext>
+            </a:extLst>
+          </p:cNvPr>
           <p:cNvSpPr>
             <a:spLocks noGrp="1"/>
           </p:cNvSpPr>
@@ -1226,7 +1414,13 @@
       </p:sp>
       <p:sp>
         <p:nvSpPr>
-          <p:cNvPr id="4" name="Slide Number Placeholder 3"/>
+          <p:cNvPr id="4" name="Slide Number Placeholder 3">
+            <a:extLst>
+              <a:ext uri="{FF2B5EF4-FFF2-40B4-BE49-F238E27FC236}">
+                <a16:creationId xmlns:a16="http://schemas.microsoft.com/office/drawing/2014/main" id="{F7E0DB86-D3BF-B5F4-EE3E-3661763C3351}"/>
+              </a:ext>
+            </a:extLst>
+          </p:cNvPr>
           <p:cNvSpPr>
             <a:spLocks noGrp="1"/>
           </p:cNvSpPr>
@@ -1250,7 +1444,7 @@
     </p:spTree>
     <p:extLst>
       <p:ext uri="{BB962C8B-B14F-4D97-AF65-F5344CB8AC3E}">
-        <p14:creationId xmlns:p14="http://schemas.microsoft.com/office/powerpoint/2010/main" val="1024086991"/>
+        <p14:creationId xmlns:p14="http://schemas.microsoft.com/office/powerpoint/2010/main" val="888477350"/>
       </p:ext>
     </p:extLst>
   </p:cSld>
@@ -1265,7 +1459,13 @@
   <p:cSld>
     <p:spTree>
       <p:nvGrpSpPr>
-        <p:cNvPr id="1" name=""/>
+        <p:cNvPr id="1" name="">
+          <a:extLst>
+            <a:ext uri="{FF2B5EF4-FFF2-40B4-BE49-F238E27FC236}">
+              <a16:creationId xmlns:a16="http://schemas.microsoft.com/office/drawing/2014/main" id="{D58F0AAA-8031-0A48-BC8F-B93E1A983F72}"/>
+            </a:ext>
+          </a:extLst>
+        </p:cNvPr>
         <p:cNvGrpSpPr/>
         <p:nvPr/>
       </p:nvGrpSpPr>
@@ -1279,7 +1479,13 @@
       </p:grpSpPr>
       <p:sp>
         <p:nvSpPr>
-          <p:cNvPr id="2" name="Slide Image Placeholder 1"/>
+          <p:cNvPr id="2" name="Slide Image Placeholder 1">
+            <a:extLst>
+              <a:ext uri="{FF2B5EF4-FFF2-40B4-BE49-F238E27FC236}">
+                <a16:creationId xmlns:a16="http://schemas.microsoft.com/office/drawing/2014/main" id="{C9A9C036-C976-CA18-42B9-130EF6C1C80A}"/>
+              </a:ext>
+            </a:extLst>
+          </p:cNvPr>
           <p:cNvSpPr>
             <a:spLocks noGrp="1" noRot="1" noChangeAspect="1"/>
           </p:cNvSpPr>
@@ -1291,7 +1497,13 @@
       </p:sp>
       <p:sp>
         <p:nvSpPr>
-          <p:cNvPr id="3" name="Notes Placeholder 2"/>
+          <p:cNvPr id="3" name="Notes Placeholder 2">
+            <a:extLst>
+              <a:ext uri="{FF2B5EF4-FFF2-40B4-BE49-F238E27FC236}">
+                <a16:creationId xmlns:a16="http://schemas.microsoft.com/office/drawing/2014/main" id="{71038E98-E88D-15F2-F117-A2EE51BB1463}"/>
+              </a:ext>
+            </a:extLst>
+          </p:cNvPr>
           <p:cNvSpPr>
             <a:spLocks noGrp="1"/>
           </p:cNvSpPr>
@@ -1310,7 +1522,13 @@
       </p:sp>
       <p:sp>
         <p:nvSpPr>
-          <p:cNvPr id="4" name="Slide Number Placeholder 3"/>
+          <p:cNvPr id="4" name="Slide Number Placeholder 3">
+            <a:extLst>
+              <a:ext uri="{FF2B5EF4-FFF2-40B4-BE49-F238E27FC236}">
+                <a16:creationId xmlns:a16="http://schemas.microsoft.com/office/drawing/2014/main" id="{417586D9-C80F-4C87-07CB-F9FBCDC260EE}"/>
+              </a:ext>
+            </a:extLst>
+          </p:cNvPr>
           <p:cNvSpPr>
             <a:spLocks noGrp="1"/>
           </p:cNvSpPr>
@@ -1334,7 +1552,7 @@
     </p:spTree>
     <p:extLst>
       <p:ext uri="{BB962C8B-B14F-4D97-AF65-F5344CB8AC3E}">
-        <p14:creationId xmlns:p14="http://schemas.microsoft.com/office/powerpoint/2010/main" val="1024086991"/>
+        <p14:creationId xmlns:p14="http://schemas.microsoft.com/office/powerpoint/2010/main" val="3873594357"/>
       </p:ext>
     </p:extLst>
   </p:cSld>
@@ -1349,7 +1567,13 @@
   <p:cSld>
     <p:spTree>
       <p:nvGrpSpPr>
-        <p:cNvPr id="1" name=""/>
+        <p:cNvPr id="1" name="">
+          <a:extLst>
+            <a:ext uri="{FF2B5EF4-FFF2-40B4-BE49-F238E27FC236}">
+              <a16:creationId xmlns:a16="http://schemas.microsoft.com/office/drawing/2014/main" id="{FCFAAA7C-7815-2BCC-7625-FDB4F002EBA4}"/>
+            </a:ext>
+          </a:extLst>
+        </p:cNvPr>
         <p:cNvGrpSpPr/>
         <p:nvPr/>
       </p:nvGrpSpPr>
@@ -1363,7 +1587,13 @@
       </p:grpSpPr>
       <p:sp>
         <p:nvSpPr>
-          <p:cNvPr id="2" name="Slide Image Placeholder 1"/>
+          <p:cNvPr id="2" name="Slide Image Placeholder 1">
+            <a:extLst>
+              <a:ext uri="{FF2B5EF4-FFF2-40B4-BE49-F238E27FC236}">
+                <a16:creationId xmlns:a16="http://schemas.microsoft.com/office/drawing/2014/main" id="{3D2DB283-1AF9-8413-1E94-62982A023F3E}"/>
+              </a:ext>
+            </a:extLst>
+          </p:cNvPr>
           <p:cNvSpPr>
             <a:spLocks noGrp="1" noRot="1" noChangeAspect="1"/>
           </p:cNvSpPr>
@@ -1375,7 +1605,13 @@
       </p:sp>
       <p:sp>
         <p:nvSpPr>
-          <p:cNvPr id="3" name="Notes Placeholder 2"/>
+          <p:cNvPr id="3" name="Notes Placeholder 2">
+            <a:extLst>
+              <a:ext uri="{FF2B5EF4-FFF2-40B4-BE49-F238E27FC236}">
+                <a16:creationId xmlns:a16="http://schemas.microsoft.com/office/drawing/2014/main" id="{1F06EDEA-4EAA-1D2B-D5E5-4FCEB9FE8BE8}"/>
+              </a:ext>
+            </a:extLst>
+          </p:cNvPr>
           <p:cNvSpPr>
             <a:spLocks noGrp="1"/>
           </p:cNvSpPr>
@@ -1394,7 +1630,13 @@
       </p:sp>
       <p:sp>
         <p:nvSpPr>
-          <p:cNvPr id="4" name="Slide Number Placeholder 3"/>
+          <p:cNvPr id="4" name="Slide Number Placeholder 3">
+            <a:extLst>
+              <a:ext uri="{FF2B5EF4-FFF2-40B4-BE49-F238E27FC236}">
+                <a16:creationId xmlns:a16="http://schemas.microsoft.com/office/drawing/2014/main" id="{F49D695B-0E1A-76EC-26FD-7782818EFC1E}"/>
+              </a:ext>
+            </a:extLst>
+          </p:cNvPr>
           <p:cNvSpPr>
             <a:spLocks noGrp="1"/>
           </p:cNvSpPr>
@@ -1418,7 +1660,7 @@
     </p:spTree>
     <p:extLst>
       <p:ext uri="{BB962C8B-B14F-4D97-AF65-F5344CB8AC3E}">
-        <p14:creationId xmlns:p14="http://schemas.microsoft.com/office/powerpoint/2010/main" val="1024086991"/>
+        <p14:creationId xmlns:p14="http://schemas.microsoft.com/office/powerpoint/2010/main" val="2514967366"/>
       </p:ext>
     </p:extLst>
   </p:cSld>
@@ -2899,6 +3141,1610 @@
 
 <file path=ppt/slides/slide10.xml><?xml version="1.0" encoding="utf-8"?>
 <p:sld xmlns:a="http://schemas.openxmlformats.org/drawingml/2006/main" xmlns:r="http://schemas.openxmlformats.org/officeDocument/2006/relationships" xmlns:p="http://schemas.openxmlformats.org/presentationml/2006/main">
+  <p:cSld name="Slide 8">
+    <p:bg>
+      <p:bgPr>
+        <a:solidFill>
+          <a:srgbClr val="12151A"/>
+        </a:solidFill>
+        <a:effectLst/>
+      </p:bgPr>
+    </p:bg>
+    <p:spTree>
+      <p:nvGrpSpPr>
+        <p:cNvPr id="1" name=""/>
+        <p:cNvGrpSpPr/>
+        <p:nvPr/>
+      </p:nvGrpSpPr>
+      <p:grpSpPr>
+        <a:xfrm>
+          <a:off x="0" y="0"/>
+          <a:ext cx="0" cy="0"/>
+          <a:chOff x="0" y="0"/>
+          <a:chExt cx="0" cy="0"/>
+        </a:xfrm>
+      </p:grpSpPr>
+      <p:sp>
+        <p:nvSpPr>
+          <p:cNvPr id="2" name="Shape 0"/>
+          <p:cNvSpPr/>
+          <p:nvPr/>
+        </p:nvSpPr>
+        <p:spPr>
+          <a:xfrm>
+            <a:off x="0" y="0"/>
+            <a:ext cx="9144000" cy="292608"/>
+          </a:xfrm>
+          <a:prstGeom prst="rect">
+            <a:avLst/>
+          </a:prstGeom>
+          <a:solidFill>
+            <a:srgbClr val="1A1E26"/>
+          </a:solidFill>
+          <a:ln w="12700">
+            <a:solidFill>
+              <a:srgbClr val="1A1E26"/>
+            </a:solidFill>
+            <a:prstDash val="solid"/>
+          </a:ln>
+        </p:spPr>
+        <p:txBody>
+          <a:bodyPr/>
+          <a:lstStyle/>
+          <a:p>
+            <a:endParaRPr lang="ru-RU"/>
+          </a:p>
+        </p:txBody>
+      </p:sp>
+      <p:sp>
+        <p:nvSpPr>
+          <p:cNvPr id="3" name="Text 1"/>
+          <p:cNvSpPr/>
+          <p:nvPr/>
+        </p:nvSpPr>
+        <p:spPr>
+          <a:xfrm>
+            <a:off x="164592" y="0"/>
+            <a:ext cx="6400800" cy="292608"/>
+          </a:xfrm>
+          <a:prstGeom prst="rect">
+            <a:avLst/>
+          </a:prstGeom>
+          <a:noFill/>
+          <a:ln/>
+        </p:spPr>
+        <p:txBody>
+          <a:bodyPr wrap="square" lIns="0" tIns="0" rIns="0" bIns="0" rtlCol="0" anchor="ctr"/>
+          <a:lstStyle/>
+          <a:p>
+            <a:pPr marL="0" indent="0">
+              <a:buNone/>
+            </a:pPr>
+            <a:r>
+              <a:rPr lang="en-US" sz="1100" dirty="0">
+                <a:solidFill>
+                  <a:srgbClr val="888888"/>
+                </a:solidFill>
+                <a:latin typeface="Consolas" pitchFamily="34" charset="0"/>
+                <a:ea typeface="Consolas" pitchFamily="34" charset="-122"/>
+                <a:cs typeface="Consolas" pitchFamily="34" charset="-120"/>
+              </a:rPr>
+              <a:t>// light space matrix — projekcia</a:t>
+            </a:r>
+            <a:endParaRPr lang="en-US" sz="1100" dirty="0"/>
+          </a:p>
+        </p:txBody>
+      </p:sp>
+      <p:sp>
+        <p:nvSpPr>
+          <p:cNvPr id="4" name="Text 2"/>
+          <p:cNvSpPr/>
+          <p:nvPr/>
+        </p:nvSpPr>
+        <p:spPr>
+          <a:xfrm>
+            <a:off x="7772400" y="0"/>
+            <a:ext cx="1280160" cy="292608"/>
+          </a:xfrm>
+          <a:prstGeom prst="rect">
+            <a:avLst/>
+          </a:prstGeom>
+          <a:noFill/>
+          <a:ln/>
+        </p:spPr>
+        <p:txBody>
+          <a:bodyPr wrap="square" lIns="0" tIns="0" rIns="0" bIns="0" rtlCol="0" anchor="ctr"/>
+          <a:lstStyle/>
+          <a:p>
+            <a:pPr marL="0" indent="0" algn="r">
+              <a:buNone/>
+            </a:pPr>
+            <a:r>
+              <a:rPr lang="en-US" sz="1100" dirty="0">
+                <a:solidFill>
+                  <a:srgbClr val="888888"/>
+                </a:solidFill>
+                <a:latin typeface="Consolas" pitchFamily="34" charset="0"/>
+                <a:ea typeface="Consolas" pitchFamily="34" charset="-122"/>
+                <a:cs typeface="Consolas" pitchFamily="34" charset="-120"/>
+              </a:rPr>
+              <a:t>~2 min</a:t>
+            </a:r>
+            <a:endParaRPr lang="en-US" sz="1100" dirty="0"/>
+          </a:p>
+        </p:txBody>
+      </p:sp>
+      <p:sp>
+        <p:nvSpPr>
+          <p:cNvPr id="5" name="Shape 3"/>
+          <p:cNvSpPr/>
+          <p:nvPr/>
+        </p:nvSpPr>
+        <p:spPr>
+          <a:xfrm>
+            <a:off x="164592" y="402336"/>
+            <a:ext cx="1005840" cy="256032"/>
+          </a:xfrm>
+          <a:prstGeom prst="rect">
+            <a:avLst/>
+          </a:prstGeom>
+          <a:solidFill>
+            <a:srgbClr val="1A1E26"/>
+          </a:solidFill>
+          <a:ln w="12700">
+            <a:solidFill>
+              <a:srgbClr val="E8724A"/>
+            </a:solidFill>
+            <a:prstDash val="solid"/>
+          </a:ln>
+        </p:spPr>
+        <p:txBody>
+          <a:bodyPr/>
+          <a:lstStyle/>
+          <a:p>
+            <a:endParaRPr lang="ru-RU"/>
+          </a:p>
+        </p:txBody>
+      </p:sp>
+      <p:sp>
+        <p:nvSpPr>
+          <p:cNvPr id="6" name="Text 4"/>
+          <p:cNvSpPr/>
+          <p:nvPr/>
+        </p:nvSpPr>
+        <p:spPr>
+          <a:xfrm>
+            <a:off x="164592" y="402336"/>
+            <a:ext cx="1005840" cy="256032"/>
+          </a:xfrm>
+          <a:prstGeom prst="rect">
+            <a:avLst/>
+          </a:prstGeom>
+          <a:noFill/>
+          <a:ln/>
+        </p:spPr>
+        <p:txBody>
+          <a:bodyPr wrap="square" lIns="0" tIns="0" rIns="0" bIns="0" rtlCol="0" anchor="ctr"/>
+          <a:lstStyle/>
+          <a:p>
+            <a:pPr marL="0" indent="0" algn="ctr">
+              <a:buNone/>
+            </a:pPr>
+            <a:r>
+              <a:rPr lang="en-US" sz="1000" dirty="0">
+                <a:solidFill>
+                  <a:srgbClr val="E8724A"/>
+                </a:solidFill>
+                <a:latin typeface="Consolas" pitchFamily="34" charset="0"/>
+                <a:ea typeface="Consolas" pitchFamily="34" charset="-122"/>
+                <a:cs typeface="Consolas" pitchFamily="34" charset="-120"/>
+              </a:rPr>
+              <a:t>TEÓRIA</a:t>
+            </a:r>
+            <a:endParaRPr lang="en-US" sz="1000" dirty="0"/>
+          </a:p>
+        </p:txBody>
+      </p:sp>
+      <p:sp>
+        <p:nvSpPr>
+          <p:cNvPr id="7" name="Text 5"/>
+          <p:cNvSpPr/>
+          <p:nvPr/>
+        </p:nvSpPr>
+        <p:spPr>
+          <a:xfrm>
+            <a:off x="320040" y="777240"/>
+            <a:ext cx="8503920" cy="594360"/>
+          </a:xfrm>
+          <a:prstGeom prst="rect">
+            <a:avLst/>
+          </a:prstGeom>
+          <a:noFill/>
+          <a:ln/>
+        </p:spPr>
+        <p:txBody>
+          <a:bodyPr wrap="square" lIns="0" tIns="0" rIns="0" bIns="0" rtlCol="0" anchor="ctr"/>
+          <a:lstStyle/>
+          <a:p>
+            <a:pPr marL="0" indent="0">
+              <a:buNone/>
+            </a:pPr>
+            <a:r>
+              <a:rPr lang="en-US" sz="3200" b="1" dirty="0">
+                <a:solidFill>
+                  <a:srgbClr val="FFFFFF"/>
+                </a:solidFill>
+                <a:latin typeface="Calibri" pitchFamily="34" charset="0"/>
+                <a:ea typeface="Calibri" pitchFamily="34" charset="-122"/>
+                <a:cs typeface="Calibri" pitchFamily="34" charset="-120"/>
+              </a:rPr>
+              <a:t>Light Projection — ortho vs perspective</a:t>
+            </a:r>
+            <a:endParaRPr lang="en-US" sz="3200" dirty="0"/>
+          </a:p>
+        </p:txBody>
+      </p:sp>
+      <p:sp>
+        <p:nvSpPr>
+          <p:cNvPr id="9" name="Shape 6"/>
+          <p:cNvSpPr/>
+          <p:nvPr/>
+        </p:nvSpPr>
+        <p:spPr>
+          <a:xfrm>
+            <a:off x="164592" y="4572000"/>
+            <a:ext cx="4297680" cy="411480"/>
+          </a:xfrm>
+          <a:prstGeom prst="rect">
+            <a:avLst/>
+          </a:prstGeom>
+          <a:solidFill>
+            <a:srgbClr val="1E2330"/>
+          </a:solidFill>
+          <a:ln w="12700">
+            <a:solidFill>
+              <a:srgbClr val="E8C44A"/>
+            </a:solidFill>
+            <a:prstDash val="solid"/>
+          </a:ln>
+        </p:spPr>
+        <p:txBody>
+          <a:bodyPr/>
+          <a:lstStyle/>
+          <a:p>
+            <a:endParaRPr lang="ru-RU"/>
+          </a:p>
+        </p:txBody>
+      </p:sp>
+      <p:sp>
+        <p:nvSpPr>
+          <p:cNvPr id="10" name="Text 7"/>
+          <p:cNvSpPr/>
+          <p:nvPr/>
+        </p:nvSpPr>
+        <p:spPr>
+          <a:xfrm>
+            <a:off x="292608" y="4663440"/>
+            <a:ext cx="4041648" cy="292608"/>
+          </a:xfrm>
+          <a:prstGeom prst="rect">
+            <a:avLst/>
+          </a:prstGeom>
+          <a:noFill/>
+          <a:ln/>
+        </p:spPr>
+        <p:txBody>
+          <a:bodyPr wrap="square" lIns="0" tIns="0" rIns="0" bIns="0" rtlCol="0" anchor="ctr"/>
+          <a:lstStyle/>
+          <a:p>
+            <a:pPr marL="0" indent="0">
+              <a:buNone/>
+            </a:pPr>
+            <a:r>
+              <a:rPr lang="en-US" sz="1300" b="1" dirty="0">
+                <a:solidFill>
+                  <a:srgbClr val="E8C44A"/>
+                </a:solidFill>
+                <a:latin typeface="Consolas" pitchFamily="34" charset="0"/>
+                <a:ea typeface="Consolas" pitchFamily="34" charset="-122"/>
+                <a:cs typeface="Consolas" pitchFamily="34" charset="-120"/>
+              </a:rPr>
+              <a:t>Smerové svetlo (slnko) → ortho</a:t>
+            </a:r>
+            <a:endParaRPr lang="en-US" sz="1300" dirty="0"/>
+          </a:p>
+        </p:txBody>
+      </p:sp>
+      <p:sp>
+        <p:nvSpPr>
+          <p:cNvPr id="11" name="Shape 8"/>
+          <p:cNvSpPr/>
+          <p:nvPr/>
+        </p:nvSpPr>
+        <p:spPr>
+          <a:xfrm>
+            <a:off x="4663440" y="4572000"/>
+            <a:ext cx="4315968" cy="411480"/>
+          </a:xfrm>
+          <a:prstGeom prst="rect">
+            <a:avLst/>
+          </a:prstGeom>
+          <a:solidFill>
+            <a:srgbClr val="1E2330"/>
+          </a:solidFill>
+          <a:ln w="12700">
+            <a:solidFill>
+              <a:srgbClr val="4AC8E8"/>
+            </a:solidFill>
+            <a:prstDash val="solid"/>
+          </a:ln>
+        </p:spPr>
+        <p:txBody>
+          <a:bodyPr/>
+          <a:lstStyle/>
+          <a:p>
+            <a:endParaRPr lang="ru-RU"/>
+          </a:p>
+        </p:txBody>
+      </p:sp>
+      <p:sp>
+        <p:nvSpPr>
+          <p:cNvPr id="12" name="Text 9"/>
+          <p:cNvSpPr/>
+          <p:nvPr/>
+        </p:nvSpPr>
+        <p:spPr>
+          <a:xfrm>
+            <a:off x="4791456" y="4663440"/>
+            <a:ext cx="4059936" cy="292608"/>
+          </a:xfrm>
+          <a:prstGeom prst="rect">
+            <a:avLst/>
+          </a:prstGeom>
+          <a:noFill/>
+          <a:ln/>
+        </p:spPr>
+        <p:txBody>
+          <a:bodyPr wrap="square" lIns="0" tIns="0" rIns="0" bIns="0" rtlCol="0" anchor="ctr"/>
+          <a:lstStyle/>
+          <a:p>
+            <a:pPr marL="0" indent="0">
+              <a:buNone/>
+            </a:pPr>
+            <a:r>
+              <a:rPr lang="en-US" sz="1300" b="1" dirty="0">
+                <a:solidFill>
+                  <a:srgbClr val="4AC8E8"/>
+                </a:solidFill>
+                <a:latin typeface="Consolas" pitchFamily="34" charset="0"/>
+                <a:ea typeface="Consolas" pitchFamily="34" charset="-122"/>
+                <a:cs typeface="Consolas" pitchFamily="34" charset="-120"/>
+              </a:rPr>
+              <a:t>Bodové svetlo (žiarovka) → perspective</a:t>
+            </a:r>
+            <a:endParaRPr lang="en-US" sz="1300" dirty="0"/>
+          </a:p>
+        </p:txBody>
+      </p:sp>
+      <p:pic>
+        <p:nvPicPr>
+          <p:cNvPr id="3076" name="Picture 4" descr="Colors, Depth Testing, and Alpha Blending | Real-Time 3D Graphics with  WebGL 2">
+            <a:extLst>
+              <a:ext uri="{FF2B5EF4-FFF2-40B4-BE49-F238E27FC236}">
+                <a16:creationId xmlns:a16="http://schemas.microsoft.com/office/drawing/2014/main" id="{2EA49F5F-7F24-0DD6-22DA-4364622924B7}"/>
+              </a:ext>
+            </a:extLst>
+          </p:cNvPr>
+          <p:cNvPicPr>
+            <a:picLocks noChangeAspect="1" noChangeArrowheads="1"/>
+          </p:cNvPicPr>
+          <p:nvPr/>
+        </p:nvPicPr>
+        <p:blipFill>
+          <a:blip r:embed="rId3">
+            <a:extLst>
+              <a:ext uri="{28A0092B-C50C-407E-A947-70E740481C1C}">
+                <a14:useLocalDpi xmlns:a14="http://schemas.microsoft.com/office/drawing/2010/main" val="0"/>
+              </a:ext>
+            </a:extLst>
+          </a:blip>
+          <a:srcRect/>
+          <a:stretch>
+            <a:fillRect/>
+          </a:stretch>
+        </p:blipFill>
+        <p:spPr bwMode="auto">
+          <a:xfrm>
+            <a:off x="1561359" y="1371600"/>
+            <a:ext cx="6192753" cy="2997465"/>
+          </a:xfrm>
+          <a:prstGeom prst="rect">
+            <a:avLst/>
+          </a:prstGeom>
+          <a:noFill/>
+          <a:extLst>
+            <a:ext uri="{909E8E84-426E-40DD-AFC4-6F175D3DCCD1}">
+              <a14:hiddenFill xmlns:a14="http://schemas.microsoft.com/office/drawing/2010/main">
+                <a:solidFill>
+                  <a:srgbClr val="FFFFFF"/>
+                </a:solidFill>
+              </a14:hiddenFill>
+            </a:ext>
+          </a:extLst>
+        </p:spPr>
+      </p:pic>
+    </p:spTree>
+  </p:cSld>
+  <p:clrMapOvr>
+    <a:masterClrMapping/>
+  </p:clrMapOvr>
+</p:sld>
+</file>
+
+<file path=ppt/slides/slide11.xml><?xml version="1.0" encoding="utf-8"?>
+<p:sld xmlns:a="http://schemas.openxmlformats.org/drawingml/2006/main" xmlns:r="http://schemas.openxmlformats.org/officeDocument/2006/relationships" xmlns:p="http://schemas.openxmlformats.org/presentationml/2006/main">
+  <p:cSld name="Slide 9">
+    <p:bg>
+      <p:bgPr>
+        <a:solidFill>
+          <a:srgbClr val="12151A"/>
+        </a:solidFill>
+        <a:effectLst/>
+      </p:bgPr>
+    </p:bg>
+    <p:spTree>
+      <p:nvGrpSpPr>
+        <p:cNvPr id="1" name=""/>
+        <p:cNvGrpSpPr/>
+        <p:nvPr/>
+      </p:nvGrpSpPr>
+      <p:grpSpPr>
+        <a:xfrm>
+          <a:off x="0" y="0"/>
+          <a:ext cx="0" cy="0"/>
+          <a:chOff x="0" y="0"/>
+          <a:chExt cx="0" cy="0"/>
+        </a:xfrm>
+      </p:grpSpPr>
+      <p:sp>
+        <p:nvSpPr>
+          <p:cNvPr id="2" name="Shape 0"/>
+          <p:cNvSpPr/>
+          <p:nvPr/>
+        </p:nvSpPr>
+        <p:spPr>
+          <a:xfrm>
+            <a:off x="0" y="0"/>
+            <a:ext cx="9144000" cy="292608"/>
+          </a:xfrm>
+          <a:prstGeom prst="rect">
+            <a:avLst/>
+          </a:prstGeom>
+          <a:solidFill>
+            <a:srgbClr val="1A1E26"/>
+          </a:solidFill>
+          <a:ln w="12700">
+            <a:solidFill>
+              <a:srgbClr val="1A1E26"/>
+            </a:solidFill>
+            <a:prstDash val="solid"/>
+          </a:ln>
+        </p:spPr>
+        <p:txBody>
+          <a:bodyPr/>
+          <a:lstStyle/>
+          <a:p>
+            <a:endParaRPr lang="ru-RU"/>
+          </a:p>
+        </p:txBody>
+      </p:sp>
+      <p:sp>
+        <p:nvSpPr>
+          <p:cNvPr id="3" name="Text 1"/>
+          <p:cNvSpPr/>
+          <p:nvPr/>
+        </p:nvSpPr>
+        <p:spPr>
+          <a:xfrm>
+            <a:off x="164592" y="0"/>
+            <a:ext cx="6400800" cy="292608"/>
+          </a:xfrm>
+          <a:prstGeom prst="rect">
+            <a:avLst/>
+          </a:prstGeom>
+          <a:noFill/>
+          <a:ln/>
+        </p:spPr>
+        <p:txBody>
+          <a:bodyPr wrap="square" lIns="0" tIns="0" rIns="0" bIns="0" rtlCol="0" anchor="ctr"/>
+          <a:lstStyle/>
+          <a:p>
+            <a:pPr marL="0" indent="0">
+              <a:buNone/>
+            </a:pPr>
+            <a:r>
+              <a:rPr lang="en-US" sz="1100" dirty="0">
+                <a:solidFill>
+                  <a:srgbClr val="888888"/>
+                </a:solidFill>
+                <a:latin typeface="Consolas" pitchFamily="34" charset="0"/>
+                <a:ea typeface="Consolas" pitchFamily="34" charset="-122"/>
+                <a:cs typeface="Consolas" pitchFamily="34" charset="-120"/>
+              </a:rPr>
+              <a:t>// pass 2 — shadow test — transformácia</a:t>
+            </a:r>
+            <a:endParaRPr lang="en-US" sz="1100" dirty="0"/>
+          </a:p>
+        </p:txBody>
+      </p:sp>
+      <p:sp>
+        <p:nvSpPr>
+          <p:cNvPr id="4" name="Text 2"/>
+          <p:cNvSpPr/>
+          <p:nvPr/>
+        </p:nvSpPr>
+        <p:spPr>
+          <a:xfrm>
+            <a:off x="7772400" y="0"/>
+            <a:ext cx="1280160" cy="292608"/>
+          </a:xfrm>
+          <a:prstGeom prst="rect">
+            <a:avLst/>
+          </a:prstGeom>
+          <a:noFill/>
+          <a:ln/>
+        </p:spPr>
+        <p:txBody>
+          <a:bodyPr wrap="square" lIns="0" tIns="0" rIns="0" bIns="0" rtlCol="0" anchor="ctr"/>
+          <a:lstStyle/>
+          <a:p>
+            <a:pPr marL="0" indent="0" algn="r">
+              <a:buNone/>
+            </a:pPr>
+            <a:r>
+              <a:rPr lang="en-US" sz="1100" dirty="0">
+                <a:solidFill>
+                  <a:srgbClr val="888888"/>
+                </a:solidFill>
+                <a:latin typeface="Consolas" pitchFamily="34" charset="0"/>
+                <a:ea typeface="Consolas" pitchFamily="34" charset="-122"/>
+                <a:cs typeface="Consolas" pitchFamily="34" charset="-120"/>
+              </a:rPr>
+              <a:t>~2 min</a:t>
+            </a:r>
+            <a:endParaRPr lang="en-US" sz="1100" dirty="0"/>
+          </a:p>
+        </p:txBody>
+      </p:sp>
+      <p:sp>
+        <p:nvSpPr>
+          <p:cNvPr id="5" name="Shape 3"/>
+          <p:cNvSpPr/>
+          <p:nvPr/>
+        </p:nvSpPr>
+        <p:spPr>
+          <a:xfrm>
+            <a:off x="164592" y="402336"/>
+            <a:ext cx="1005840" cy="256032"/>
+          </a:xfrm>
+          <a:prstGeom prst="rect">
+            <a:avLst/>
+          </a:prstGeom>
+          <a:solidFill>
+            <a:srgbClr val="1A1E26"/>
+          </a:solidFill>
+          <a:ln w="12700">
+            <a:solidFill>
+              <a:srgbClr val="E8724A"/>
+            </a:solidFill>
+            <a:prstDash val="solid"/>
+          </a:ln>
+        </p:spPr>
+        <p:txBody>
+          <a:bodyPr/>
+          <a:lstStyle/>
+          <a:p>
+            <a:endParaRPr lang="ru-RU"/>
+          </a:p>
+        </p:txBody>
+      </p:sp>
+      <p:sp>
+        <p:nvSpPr>
+          <p:cNvPr id="6" name="Text 4"/>
+          <p:cNvSpPr/>
+          <p:nvPr/>
+        </p:nvSpPr>
+        <p:spPr>
+          <a:xfrm>
+            <a:off x="164592" y="402336"/>
+            <a:ext cx="1005840" cy="256032"/>
+          </a:xfrm>
+          <a:prstGeom prst="rect">
+            <a:avLst/>
+          </a:prstGeom>
+          <a:noFill/>
+          <a:ln/>
+        </p:spPr>
+        <p:txBody>
+          <a:bodyPr wrap="square" lIns="0" tIns="0" rIns="0" bIns="0" rtlCol="0" anchor="ctr"/>
+          <a:lstStyle/>
+          <a:p>
+            <a:pPr marL="0" indent="0" algn="ctr">
+              <a:buNone/>
+            </a:pPr>
+            <a:r>
+              <a:rPr lang="en-US" sz="1000" dirty="0">
+                <a:solidFill>
+                  <a:srgbClr val="E8724A"/>
+                </a:solidFill>
+                <a:latin typeface="Consolas" pitchFamily="34" charset="0"/>
+                <a:ea typeface="Consolas" pitchFamily="34" charset="-122"/>
+                <a:cs typeface="Consolas" pitchFamily="34" charset="-120"/>
+              </a:rPr>
+              <a:t>TEÓRIA</a:t>
+            </a:r>
+            <a:endParaRPr lang="en-US" sz="1000" dirty="0"/>
+          </a:p>
+        </p:txBody>
+      </p:sp>
+      <p:sp>
+        <p:nvSpPr>
+          <p:cNvPr id="7" name="Text 5"/>
+          <p:cNvSpPr/>
+          <p:nvPr/>
+        </p:nvSpPr>
+        <p:spPr>
+          <a:xfrm>
+            <a:off x="320040" y="777240"/>
+            <a:ext cx="8503920" cy="594360"/>
+          </a:xfrm>
+          <a:prstGeom prst="rect">
+            <a:avLst/>
+          </a:prstGeom>
+          <a:noFill/>
+          <a:ln/>
+        </p:spPr>
+        <p:txBody>
+          <a:bodyPr wrap="square" lIns="0" tIns="0" rIns="0" bIns="0" rtlCol="0" anchor="ctr"/>
+          <a:lstStyle/>
+          <a:p>
+            <a:pPr marL="0" indent="0">
+              <a:buNone/>
+            </a:pPr>
+            <a:r>
+              <a:rPr lang="en-US" sz="3200" b="1" dirty="0">
+                <a:solidFill>
+                  <a:srgbClr val="FFFFFF"/>
+                </a:solidFill>
+                <a:latin typeface="Calibri" pitchFamily="34" charset="0"/>
+                <a:ea typeface="Calibri" pitchFamily="34" charset="-122"/>
+                <a:cs typeface="Calibri" pitchFamily="34" charset="-120"/>
+              </a:rPr>
+              <a:t>Shadow test — transformácia fragmentu</a:t>
+            </a:r>
+            <a:endParaRPr lang="en-US" sz="3200" dirty="0"/>
+          </a:p>
+        </p:txBody>
+      </p:sp>
+      <p:sp>
+        <p:nvSpPr>
+          <p:cNvPr id="8" name="Shape 6"/>
+          <p:cNvSpPr/>
+          <p:nvPr/>
+        </p:nvSpPr>
+        <p:spPr>
+          <a:xfrm>
+            <a:off x="164592" y="1508760"/>
+            <a:ext cx="1335024" cy="749808"/>
+          </a:xfrm>
+          <a:prstGeom prst="rect">
+            <a:avLst/>
+          </a:prstGeom>
+          <a:solidFill>
+            <a:srgbClr val="1E2330"/>
+          </a:solidFill>
+          <a:ln w="12700">
+            <a:solidFill>
+              <a:srgbClr val="888888"/>
+            </a:solidFill>
+            <a:prstDash val="solid"/>
+          </a:ln>
+        </p:spPr>
+        <p:txBody>
+          <a:bodyPr/>
+          <a:lstStyle/>
+          <a:p>
+            <a:endParaRPr lang="ru-RU"/>
+          </a:p>
+        </p:txBody>
+      </p:sp>
+      <p:sp>
+        <p:nvSpPr>
+          <p:cNvPr id="9" name="Text 7"/>
+          <p:cNvSpPr/>
+          <p:nvPr/>
+        </p:nvSpPr>
+        <p:spPr>
+          <a:xfrm>
+            <a:off x="164592" y="1508760"/>
+            <a:ext cx="1335024" cy="749808"/>
+          </a:xfrm>
+          <a:prstGeom prst="rect">
+            <a:avLst/>
+          </a:prstGeom>
+          <a:noFill/>
+          <a:ln/>
+        </p:spPr>
+        <p:txBody>
+          <a:bodyPr wrap="square" lIns="0" tIns="0" rIns="0" bIns="0" rtlCol="0" anchor="ctr"/>
+          <a:lstStyle/>
+          <a:p>
+            <a:pPr marL="0" indent="0" algn="ctr">
+              <a:buNone/>
+            </a:pPr>
+            <a:r>
+              <a:rPr lang="en-US" sz="1100" b="1" dirty="0">
+                <a:solidFill>
+                  <a:srgbClr val="888888"/>
+                </a:solidFill>
+                <a:latin typeface="Consolas" pitchFamily="34" charset="0"/>
+                <a:ea typeface="Consolas" pitchFamily="34" charset="-122"/>
+                <a:cs typeface="Consolas" pitchFamily="34" charset="-120"/>
+              </a:rPr>
+              <a:t>World</a:t>
+            </a:r>
+            <a:endParaRPr lang="en-US" sz="1100" dirty="0"/>
+          </a:p>
+          <a:p>
+            <a:pPr marL="0" indent="0" algn="ctr">
+              <a:buNone/>
+            </a:pPr>
+            <a:r>
+              <a:rPr lang="en-US" sz="1100" b="1" dirty="0">
+                <a:solidFill>
+                  <a:srgbClr val="888888"/>
+                </a:solidFill>
+                <a:latin typeface="Consolas" pitchFamily="34" charset="0"/>
+                <a:ea typeface="Consolas" pitchFamily="34" charset="-122"/>
+                <a:cs typeface="Consolas" pitchFamily="34" charset="-120"/>
+              </a:rPr>
+              <a:t>space</a:t>
+            </a:r>
+            <a:endParaRPr lang="en-US" sz="1100" dirty="0"/>
+          </a:p>
+        </p:txBody>
+      </p:sp>
+      <p:sp>
+        <p:nvSpPr>
+          <p:cNvPr id="10" name="Shape 8"/>
+          <p:cNvSpPr/>
+          <p:nvPr/>
+        </p:nvSpPr>
+        <p:spPr>
+          <a:xfrm>
+            <a:off x="1517904" y="1883664"/>
+            <a:ext cx="164592" cy="0"/>
+          </a:xfrm>
+          <a:prstGeom prst="line">
+            <a:avLst/>
+          </a:prstGeom>
+          <a:noFill/>
+          <a:ln w="25400">
+            <a:solidFill>
+              <a:srgbClr val="E8724A"/>
+            </a:solidFill>
+            <a:prstDash val="solid"/>
+          </a:ln>
+        </p:spPr>
+        <p:txBody>
+          <a:bodyPr/>
+          <a:lstStyle/>
+          <a:p>
+            <a:endParaRPr lang="ru-RU"/>
+          </a:p>
+        </p:txBody>
+      </p:sp>
+      <p:sp>
+        <p:nvSpPr>
+          <p:cNvPr id="11" name="Shape 9"/>
+          <p:cNvSpPr/>
+          <p:nvPr/>
+        </p:nvSpPr>
+        <p:spPr>
+          <a:xfrm>
+            <a:off x="1700784" y="1508760"/>
+            <a:ext cx="1335024" cy="749808"/>
+          </a:xfrm>
+          <a:prstGeom prst="rect">
+            <a:avLst/>
+          </a:prstGeom>
+          <a:solidFill>
+            <a:srgbClr val="1E2330"/>
+          </a:solidFill>
+          <a:ln w="12700">
+            <a:solidFill>
+              <a:srgbClr val="E8C44A"/>
+            </a:solidFill>
+            <a:prstDash val="solid"/>
+          </a:ln>
+        </p:spPr>
+        <p:txBody>
+          <a:bodyPr/>
+          <a:lstStyle/>
+          <a:p>
+            <a:endParaRPr lang="ru-RU"/>
+          </a:p>
+        </p:txBody>
+      </p:sp>
+      <p:sp>
+        <p:nvSpPr>
+          <p:cNvPr id="12" name="Text 10"/>
+          <p:cNvSpPr/>
+          <p:nvPr/>
+        </p:nvSpPr>
+        <p:spPr>
+          <a:xfrm>
+            <a:off x="1700784" y="1508760"/>
+            <a:ext cx="1335024" cy="749808"/>
+          </a:xfrm>
+          <a:prstGeom prst="rect">
+            <a:avLst/>
+          </a:prstGeom>
+          <a:noFill/>
+          <a:ln/>
+        </p:spPr>
+        <p:txBody>
+          <a:bodyPr wrap="square" lIns="0" tIns="0" rIns="0" bIns="0" rtlCol="0" anchor="ctr"/>
+          <a:lstStyle/>
+          <a:p>
+            <a:pPr marL="0" indent="0" algn="ctr">
+              <a:buNone/>
+            </a:pPr>
+            <a:r>
+              <a:rPr lang="en-US" sz="1100" b="1" dirty="0">
+                <a:solidFill>
+                  <a:srgbClr val="E8C44A"/>
+                </a:solidFill>
+                <a:latin typeface="Consolas" pitchFamily="34" charset="0"/>
+                <a:ea typeface="Consolas" pitchFamily="34" charset="-122"/>
+                <a:cs typeface="Consolas" pitchFamily="34" charset="-120"/>
+              </a:rPr>
+              <a:t>Light</a:t>
+            </a:r>
+            <a:endParaRPr lang="en-US" sz="1100" dirty="0"/>
+          </a:p>
+          <a:p>
+            <a:pPr marL="0" indent="0" algn="ctr">
+              <a:buNone/>
+            </a:pPr>
+            <a:r>
+              <a:rPr lang="en-US" sz="1100" b="1" dirty="0">
+                <a:solidFill>
+                  <a:srgbClr val="E8C44A"/>
+                </a:solidFill>
+                <a:latin typeface="Consolas" pitchFamily="34" charset="0"/>
+                <a:ea typeface="Consolas" pitchFamily="34" charset="-122"/>
+                <a:cs typeface="Consolas" pitchFamily="34" charset="-120"/>
+              </a:rPr>
+              <a:t>view</a:t>
+            </a:r>
+            <a:endParaRPr lang="en-US" sz="1100" dirty="0"/>
+          </a:p>
+        </p:txBody>
+      </p:sp>
+      <p:sp>
+        <p:nvSpPr>
+          <p:cNvPr id="13" name="Shape 11"/>
+          <p:cNvSpPr/>
+          <p:nvPr/>
+        </p:nvSpPr>
+        <p:spPr>
+          <a:xfrm>
+            <a:off x="3054096" y="1883664"/>
+            <a:ext cx="164592" cy="0"/>
+          </a:xfrm>
+          <a:prstGeom prst="line">
+            <a:avLst/>
+          </a:prstGeom>
+          <a:noFill/>
+          <a:ln w="25400">
+            <a:solidFill>
+              <a:srgbClr val="E8724A"/>
+            </a:solidFill>
+            <a:prstDash val="solid"/>
+          </a:ln>
+        </p:spPr>
+        <p:txBody>
+          <a:bodyPr/>
+          <a:lstStyle/>
+          <a:p>
+            <a:endParaRPr lang="ru-RU"/>
+          </a:p>
+        </p:txBody>
+      </p:sp>
+      <p:sp>
+        <p:nvSpPr>
+          <p:cNvPr id="14" name="Shape 12"/>
+          <p:cNvSpPr/>
+          <p:nvPr/>
+        </p:nvSpPr>
+        <p:spPr>
+          <a:xfrm>
+            <a:off x="3236976" y="1508760"/>
+            <a:ext cx="1335024" cy="749808"/>
+          </a:xfrm>
+          <a:prstGeom prst="rect">
+            <a:avLst/>
+          </a:prstGeom>
+          <a:solidFill>
+            <a:srgbClr val="1E2330"/>
+          </a:solidFill>
+          <a:ln w="12700">
+            <a:solidFill>
+              <a:srgbClr val="E8724A"/>
+            </a:solidFill>
+            <a:prstDash val="solid"/>
+          </a:ln>
+        </p:spPr>
+        <p:txBody>
+          <a:bodyPr/>
+          <a:lstStyle/>
+          <a:p>
+            <a:endParaRPr lang="ru-RU"/>
+          </a:p>
+        </p:txBody>
+      </p:sp>
+      <p:sp>
+        <p:nvSpPr>
+          <p:cNvPr id="15" name="Text 13"/>
+          <p:cNvSpPr/>
+          <p:nvPr/>
+        </p:nvSpPr>
+        <p:spPr>
+          <a:xfrm>
+            <a:off x="3236976" y="1508760"/>
+            <a:ext cx="1335024" cy="749808"/>
+          </a:xfrm>
+          <a:prstGeom prst="rect">
+            <a:avLst/>
+          </a:prstGeom>
+          <a:noFill/>
+          <a:ln/>
+        </p:spPr>
+        <p:txBody>
+          <a:bodyPr wrap="square" lIns="0" tIns="0" rIns="0" bIns="0" rtlCol="0" anchor="ctr"/>
+          <a:lstStyle/>
+          <a:p>
+            <a:pPr marL="0" indent="0" algn="ctr">
+              <a:buNone/>
+            </a:pPr>
+            <a:r>
+              <a:rPr lang="en-US" sz="1100" b="1" dirty="0">
+                <a:solidFill>
+                  <a:srgbClr val="E8724A"/>
+                </a:solidFill>
+                <a:latin typeface="Consolas" pitchFamily="34" charset="0"/>
+                <a:ea typeface="Consolas" pitchFamily="34" charset="-122"/>
+                <a:cs typeface="Consolas" pitchFamily="34" charset="-120"/>
+              </a:rPr>
+              <a:t>Light</a:t>
+            </a:r>
+            <a:endParaRPr lang="en-US" sz="1100" dirty="0"/>
+          </a:p>
+          <a:p>
+            <a:pPr marL="0" indent="0" algn="ctr">
+              <a:buNone/>
+            </a:pPr>
+            <a:r>
+              <a:rPr lang="en-US" sz="1100" b="1" dirty="0">
+                <a:solidFill>
+                  <a:srgbClr val="E8724A"/>
+                </a:solidFill>
+                <a:latin typeface="Consolas" pitchFamily="34" charset="0"/>
+                <a:ea typeface="Consolas" pitchFamily="34" charset="-122"/>
+                <a:cs typeface="Consolas" pitchFamily="34" charset="-120"/>
+              </a:rPr>
+              <a:t>proj.</a:t>
+            </a:r>
+            <a:endParaRPr lang="en-US" sz="1100" dirty="0"/>
+          </a:p>
+        </p:txBody>
+      </p:sp>
+      <p:sp>
+        <p:nvSpPr>
+          <p:cNvPr id="16" name="Shape 14"/>
+          <p:cNvSpPr/>
+          <p:nvPr/>
+        </p:nvSpPr>
+        <p:spPr>
+          <a:xfrm>
+            <a:off x="4590288" y="1883664"/>
+            <a:ext cx="164592" cy="0"/>
+          </a:xfrm>
+          <a:prstGeom prst="line">
+            <a:avLst/>
+          </a:prstGeom>
+          <a:noFill/>
+          <a:ln w="25400">
+            <a:solidFill>
+              <a:srgbClr val="E8724A"/>
+            </a:solidFill>
+            <a:prstDash val="solid"/>
+          </a:ln>
+        </p:spPr>
+        <p:txBody>
+          <a:bodyPr/>
+          <a:lstStyle/>
+          <a:p>
+            <a:endParaRPr lang="ru-RU"/>
+          </a:p>
+        </p:txBody>
+      </p:sp>
+      <p:sp>
+        <p:nvSpPr>
+          <p:cNvPr id="17" name="Shape 15"/>
+          <p:cNvSpPr/>
+          <p:nvPr/>
+        </p:nvSpPr>
+        <p:spPr>
+          <a:xfrm>
+            <a:off x="4773168" y="1508760"/>
+            <a:ext cx="1335024" cy="749808"/>
+          </a:xfrm>
+          <a:prstGeom prst="rect">
+            <a:avLst/>
+          </a:prstGeom>
+          <a:solidFill>
+            <a:srgbClr val="1E2330"/>
+          </a:solidFill>
+          <a:ln w="12700">
+            <a:solidFill>
+              <a:srgbClr val="4AC8E8"/>
+            </a:solidFill>
+            <a:prstDash val="solid"/>
+          </a:ln>
+        </p:spPr>
+        <p:txBody>
+          <a:bodyPr/>
+          <a:lstStyle/>
+          <a:p>
+            <a:endParaRPr lang="ru-RU"/>
+          </a:p>
+        </p:txBody>
+      </p:sp>
+      <p:sp>
+        <p:nvSpPr>
+          <p:cNvPr id="18" name="Text 16"/>
+          <p:cNvSpPr/>
+          <p:nvPr/>
+        </p:nvSpPr>
+        <p:spPr>
+          <a:xfrm>
+            <a:off x="4773168" y="1508760"/>
+            <a:ext cx="1335024" cy="749808"/>
+          </a:xfrm>
+          <a:prstGeom prst="rect">
+            <a:avLst/>
+          </a:prstGeom>
+          <a:noFill/>
+          <a:ln/>
+        </p:spPr>
+        <p:txBody>
+          <a:bodyPr wrap="square" lIns="0" tIns="0" rIns="0" bIns="0" rtlCol="0" anchor="ctr"/>
+          <a:lstStyle/>
+          <a:p>
+            <a:pPr marL="0" indent="0" algn="ctr">
+              <a:buNone/>
+            </a:pPr>
+            <a:r>
+              <a:rPr lang="en-US" sz="1100" b="1" dirty="0">
+                <a:solidFill>
+                  <a:srgbClr val="4AC8E8"/>
+                </a:solidFill>
+                <a:latin typeface="Consolas" pitchFamily="34" charset="0"/>
+                <a:ea typeface="Consolas" pitchFamily="34" charset="-122"/>
+                <a:cs typeface="Consolas" pitchFamily="34" charset="-120"/>
+              </a:rPr>
+              <a:t>NDC</a:t>
+            </a:r>
+            <a:endParaRPr lang="en-US" sz="1100" dirty="0"/>
+          </a:p>
+          <a:p>
+            <a:pPr marL="0" indent="0" algn="ctr">
+              <a:buNone/>
+            </a:pPr>
+            <a:r>
+              <a:rPr lang="en-US" sz="1100" b="1" dirty="0">
+                <a:solidFill>
+                  <a:srgbClr val="4AC8E8"/>
+                </a:solidFill>
+                <a:latin typeface="Consolas" pitchFamily="34" charset="0"/>
+                <a:ea typeface="Consolas" pitchFamily="34" charset="-122"/>
+                <a:cs typeface="Consolas" pitchFamily="34" charset="-120"/>
+              </a:rPr>
+              <a:t>[-1,1]</a:t>
+            </a:r>
+            <a:endParaRPr lang="en-US" sz="1100" dirty="0"/>
+          </a:p>
+        </p:txBody>
+      </p:sp>
+      <p:sp>
+        <p:nvSpPr>
+          <p:cNvPr id="19" name="Shape 17"/>
+          <p:cNvSpPr/>
+          <p:nvPr/>
+        </p:nvSpPr>
+        <p:spPr>
+          <a:xfrm>
+            <a:off x="6126480" y="1883664"/>
+            <a:ext cx="164592" cy="0"/>
+          </a:xfrm>
+          <a:prstGeom prst="line">
+            <a:avLst/>
+          </a:prstGeom>
+          <a:noFill/>
+          <a:ln w="25400">
+            <a:solidFill>
+              <a:srgbClr val="E8724A"/>
+            </a:solidFill>
+            <a:prstDash val="solid"/>
+          </a:ln>
+        </p:spPr>
+        <p:txBody>
+          <a:bodyPr/>
+          <a:lstStyle/>
+          <a:p>
+            <a:endParaRPr lang="ru-RU"/>
+          </a:p>
+        </p:txBody>
+      </p:sp>
+      <p:sp>
+        <p:nvSpPr>
+          <p:cNvPr id="20" name="Shape 18"/>
+          <p:cNvSpPr/>
+          <p:nvPr/>
+        </p:nvSpPr>
+        <p:spPr>
+          <a:xfrm>
+            <a:off x="6309360" y="1508760"/>
+            <a:ext cx="1335024" cy="749808"/>
+          </a:xfrm>
+          <a:prstGeom prst="rect">
+            <a:avLst/>
+          </a:prstGeom>
+          <a:solidFill>
+            <a:srgbClr val="1E2330"/>
+          </a:solidFill>
+          <a:ln w="12700">
+            <a:solidFill>
+              <a:srgbClr val="4AE88A"/>
+            </a:solidFill>
+            <a:prstDash val="solid"/>
+          </a:ln>
+        </p:spPr>
+        <p:txBody>
+          <a:bodyPr/>
+          <a:lstStyle/>
+          <a:p>
+            <a:endParaRPr lang="ru-RU"/>
+          </a:p>
+        </p:txBody>
+      </p:sp>
+      <p:sp>
+        <p:nvSpPr>
+          <p:cNvPr id="21" name="Text 19"/>
+          <p:cNvSpPr/>
+          <p:nvPr/>
+        </p:nvSpPr>
+        <p:spPr>
+          <a:xfrm>
+            <a:off x="6309360" y="1508760"/>
+            <a:ext cx="1335024" cy="749808"/>
+          </a:xfrm>
+          <a:prstGeom prst="rect">
+            <a:avLst/>
+          </a:prstGeom>
+          <a:noFill/>
+          <a:ln/>
+        </p:spPr>
+        <p:txBody>
+          <a:bodyPr wrap="square" lIns="0" tIns="0" rIns="0" bIns="0" rtlCol="0" anchor="ctr"/>
+          <a:lstStyle/>
+          <a:p>
+            <a:pPr marL="0" indent="0" algn="ctr">
+              <a:buNone/>
+            </a:pPr>
+            <a:r>
+              <a:rPr lang="en-US" sz="1100" b="1" dirty="0">
+                <a:solidFill>
+                  <a:srgbClr val="4AE88A"/>
+                </a:solidFill>
+                <a:latin typeface="Consolas" pitchFamily="34" charset="0"/>
+                <a:ea typeface="Consolas" pitchFamily="34" charset="-122"/>
+                <a:cs typeface="Consolas" pitchFamily="34" charset="-120"/>
+              </a:rPr>
+              <a:t>UV</a:t>
+            </a:r>
+            <a:endParaRPr lang="en-US" sz="1100" dirty="0"/>
+          </a:p>
+          <a:p>
+            <a:pPr marL="0" indent="0" algn="ctr">
+              <a:buNone/>
+            </a:pPr>
+            <a:r>
+              <a:rPr lang="en-US" sz="1100" b="1" dirty="0">
+                <a:solidFill>
+                  <a:srgbClr val="4AE88A"/>
+                </a:solidFill>
+                <a:latin typeface="Consolas" pitchFamily="34" charset="0"/>
+                <a:ea typeface="Consolas" pitchFamily="34" charset="-122"/>
+                <a:cs typeface="Consolas" pitchFamily="34" charset="-120"/>
+              </a:rPr>
+              <a:t>[0,1]</a:t>
+            </a:r>
+            <a:endParaRPr lang="en-US" sz="1100" dirty="0"/>
+          </a:p>
+        </p:txBody>
+      </p:sp>
+      <p:pic>
+        <p:nvPicPr>
+          <p:cNvPr id="22" name="Image 0" descr="preencoded.png"/>
+          <p:cNvPicPr>
+            <a:picLocks noChangeAspect="1"/>
+          </p:cNvPicPr>
+          <p:nvPr/>
+        </p:nvPicPr>
+        <p:blipFill>
+          <a:blip r:embed="rId3"/>
+          <a:stretch>
+            <a:fillRect/>
+          </a:stretch>
+        </p:blipFill>
+        <p:spPr>
+          <a:xfrm>
+            <a:off x="164592" y="2377440"/>
+            <a:ext cx="4160520" cy="1965960"/>
+          </a:xfrm>
+          <a:prstGeom prst="rect">
+            <a:avLst/>
+          </a:prstGeom>
+        </p:spPr>
+      </p:pic>
+      <p:sp>
+        <p:nvSpPr>
+          <p:cNvPr id="23" name="Shape 20"/>
+          <p:cNvSpPr/>
+          <p:nvPr/>
+        </p:nvSpPr>
+        <p:spPr>
+          <a:xfrm>
+            <a:off x="4480560" y="2377440"/>
+            <a:ext cx="4498848" cy="896112"/>
+          </a:xfrm>
+          <a:prstGeom prst="rect">
+            <a:avLst/>
+          </a:prstGeom>
+          <a:solidFill>
+            <a:srgbClr val="1E2330"/>
+          </a:solidFill>
+          <a:ln w="12700">
+            <a:solidFill>
+              <a:srgbClr val="E8C44A"/>
+            </a:solidFill>
+            <a:prstDash val="solid"/>
+          </a:ln>
+        </p:spPr>
+        <p:txBody>
+          <a:bodyPr/>
+          <a:lstStyle/>
+          <a:p>
+            <a:endParaRPr lang="ru-RU"/>
+          </a:p>
+        </p:txBody>
+      </p:sp>
+      <p:sp>
+        <p:nvSpPr>
+          <p:cNvPr id="24" name="Text 21"/>
+          <p:cNvSpPr/>
+          <p:nvPr/>
+        </p:nvSpPr>
+        <p:spPr>
+          <a:xfrm>
+            <a:off x="4608576" y="2468880"/>
+            <a:ext cx="4242816" cy="292608"/>
+          </a:xfrm>
+          <a:prstGeom prst="rect">
+            <a:avLst/>
+          </a:prstGeom>
+          <a:noFill/>
+          <a:ln/>
+        </p:spPr>
+        <p:txBody>
+          <a:bodyPr wrap="square" lIns="0" tIns="0" rIns="0" bIns="0" rtlCol="0" anchor="ctr"/>
+          <a:lstStyle/>
+          <a:p>
+            <a:pPr marL="0" indent="0">
+              <a:buNone/>
+            </a:pPr>
+            <a:r>
+              <a:rPr lang="en-US" sz="1300" b="1" dirty="0">
+                <a:solidFill>
+                  <a:srgbClr val="E8C44A"/>
+                </a:solidFill>
+                <a:latin typeface="Consolas" pitchFamily="34" charset="0"/>
+                <a:ea typeface="Consolas" pitchFamily="34" charset="-122"/>
+                <a:cs typeface="Consolas" pitchFamily="34" charset="-120"/>
+              </a:rPr>
+              <a:t>① Perspektívne delenie → NDC</a:t>
+            </a:r>
+            <a:endParaRPr lang="en-US" sz="1300" dirty="0"/>
+          </a:p>
+        </p:txBody>
+      </p:sp>
+      <p:sp>
+        <p:nvSpPr>
+          <p:cNvPr id="25" name="Text 22"/>
+          <p:cNvSpPr/>
+          <p:nvPr/>
+        </p:nvSpPr>
+        <p:spPr>
+          <a:xfrm>
+            <a:off x="4608576" y="2798064"/>
+            <a:ext cx="4242816" cy="402336"/>
+          </a:xfrm>
+          <a:prstGeom prst="rect">
+            <a:avLst/>
+          </a:prstGeom>
+          <a:noFill/>
+          <a:ln/>
+        </p:spPr>
+        <p:txBody>
+          <a:bodyPr wrap="square" lIns="0" tIns="0" rIns="0" bIns="0" rtlCol="0" anchor="t"/>
+          <a:lstStyle/>
+          <a:p>
+            <a:pPr marL="0" indent="0">
+              <a:buNone/>
+            </a:pPr>
+            <a:r>
+              <a:rPr lang="en-US" sz="1200" dirty="0">
+                <a:solidFill>
+                  <a:srgbClr val="CCCCCC"/>
+                </a:solidFill>
+                <a:latin typeface="Consolas" pitchFamily="34" charset="0"/>
+                <a:ea typeface="Consolas" pitchFamily="34" charset="-122"/>
+                <a:cs typeface="Consolas" pitchFamily="34" charset="-120"/>
+              </a:rPr>
+              <a:t>projCoords = lsPos.xyz / lsPos.w</a:t>
+            </a:r>
+            <a:endParaRPr lang="en-US" sz="1200" dirty="0"/>
+          </a:p>
+          <a:p>
+            <a:pPr marL="0" indent="0">
+              <a:buNone/>
+            </a:pPr>
+            <a:r>
+              <a:rPr lang="en-US" sz="1200" dirty="0">
+                <a:solidFill>
+                  <a:srgbClr val="CCCCCC"/>
+                </a:solidFill>
+                <a:latin typeface="Consolas" pitchFamily="34" charset="0"/>
+                <a:ea typeface="Consolas" pitchFamily="34" charset="-122"/>
+                <a:cs typeface="Consolas" pitchFamily="34" charset="-120"/>
+              </a:rPr>
+              <a:t>Pre ortho: w=1, delenie nič nerobí.</a:t>
+            </a:r>
+            <a:endParaRPr lang="en-US" sz="1200" dirty="0"/>
+          </a:p>
+        </p:txBody>
+      </p:sp>
+      <p:sp>
+        <p:nvSpPr>
+          <p:cNvPr id="26" name="Shape 23"/>
+          <p:cNvSpPr/>
+          <p:nvPr/>
+        </p:nvSpPr>
+        <p:spPr>
+          <a:xfrm>
+            <a:off x="4480560" y="3364992"/>
+            <a:ext cx="4498848" cy="896112"/>
+          </a:xfrm>
+          <a:prstGeom prst="rect">
+            <a:avLst/>
+          </a:prstGeom>
+          <a:solidFill>
+            <a:srgbClr val="1E2330"/>
+          </a:solidFill>
+          <a:ln w="12700">
+            <a:solidFill>
+              <a:srgbClr val="4AE88A"/>
+            </a:solidFill>
+            <a:prstDash val="solid"/>
+          </a:ln>
+        </p:spPr>
+        <p:txBody>
+          <a:bodyPr/>
+          <a:lstStyle/>
+          <a:p>
+            <a:endParaRPr lang="ru-RU"/>
+          </a:p>
+        </p:txBody>
+      </p:sp>
+      <p:sp>
+        <p:nvSpPr>
+          <p:cNvPr id="27" name="Text 24"/>
+          <p:cNvSpPr/>
+          <p:nvPr/>
+        </p:nvSpPr>
+        <p:spPr>
+          <a:xfrm>
+            <a:off x="4608576" y="3456432"/>
+            <a:ext cx="4242816" cy="292608"/>
+          </a:xfrm>
+          <a:prstGeom prst="rect">
+            <a:avLst/>
+          </a:prstGeom>
+          <a:noFill/>
+          <a:ln/>
+        </p:spPr>
+        <p:txBody>
+          <a:bodyPr wrap="square" lIns="0" tIns="0" rIns="0" bIns="0" rtlCol="0" anchor="ctr"/>
+          <a:lstStyle/>
+          <a:p>
+            <a:pPr marL="0" indent="0">
+              <a:buNone/>
+            </a:pPr>
+            <a:r>
+              <a:rPr lang="en-US" sz="1300" b="1" dirty="0">
+                <a:solidFill>
+                  <a:srgbClr val="4AE88A"/>
+                </a:solidFill>
+                <a:latin typeface="Consolas" pitchFamily="34" charset="0"/>
+                <a:ea typeface="Consolas" pitchFamily="34" charset="-122"/>
+                <a:cs typeface="Consolas" pitchFamily="34" charset="-120"/>
+              </a:rPr>
+              <a:t>② Normalizácia NDC → UV [0,1]</a:t>
+            </a:r>
+            <a:endParaRPr lang="en-US" sz="1300" dirty="0"/>
+          </a:p>
+        </p:txBody>
+      </p:sp>
+      <p:sp>
+        <p:nvSpPr>
+          <p:cNvPr id="28" name="Text 25"/>
+          <p:cNvSpPr/>
+          <p:nvPr/>
+        </p:nvSpPr>
+        <p:spPr>
+          <a:xfrm>
+            <a:off x="4608576" y="3785616"/>
+            <a:ext cx="4242816" cy="402336"/>
+          </a:xfrm>
+          <a:prstGeom prst="rect">
+            <a:avLst/>
+          </a:prstGeom>
+          <a:noFill/>
+          <a:ln/>
+        </p:spPr>
+        <p:txBody>
+          <a:bodyPr wrap="square" lIns="0" tIns="0" rIns="0" bIns="0" rtlCol="0" anchor="t"/>
+          <a:lstStyle/>
+          <a:p>
+            <a:pPr marL="0" indent="0">
+              <a:buNone/>
+            </a:pPr>
+            <a:r>
+              <a:rPr lang="en-US" sz="1200" dirty="0">
+                <a:solidFill>
+                  <a:srgbClr val="CCCCCC"/>
+                </a:solidFill>
+                <a:latin typeface="Consolas" pitchFamily="34" charset="0"/>
+                <a:ea typeface="Consolas" pitchFamily="34" charset="-122"/>
+                <a:cs typeface="Consolas" pitchFamily="34" charset="-120"/>
+              </a:rPr>
+              <a:t>proj = proj * 0.5 + 0.5</a:t>
+            </a:r>
+            <a:endParaRPr lang="en-US" sz="1200" dirty="0"/>
+          </a:p>
+          <a:p>
+            <a:pPr marL="0" indent="0">
+              <a:buNone/>
+            </a:pPr>
+            <a:r>
+              <a:rPr lang="en-US" sz="1200" dirty="0">
+                <a:solidFill>
+                  <a:srgbClr val="CCCCCC"/>
+                </a:solidFill>
+                <a:latin typeface="Consolas" pitchFamily="34" charset="0"/>
+                <a:ea typeface="Consolas" pitchFamily="34" charset="-122"/>
+                <a:cs typeface="Consolas" pitchFamily="34" charset="-120"/>
+              </a:rPr>
+              <a:t>proj.xy = UV pre depth mapu,  proj.z = hĺbka</a:t>
+            </a:r>
+            <a:endParaRPr lang="en-US" sz="1200" dirty="0"/>
+          </a:p>
+        </p:txBody>
+      </p:sp>
+      <p:sp>
+        <p:nvSpPr>
+          <p:cNvPr id="29" name="Shape 26"/>
+          <p:cNvSpPr/>
+          <p:nvPr/>
+        </p:nvSpPr>
+        <p:spPr>
+          <a:xfrm>
+            <a:off x="0" y="4800600"/>
+            <a:ext cx="9144000" cy="338328"/>
+          </a:xfrm>
+          <a:prstGeom prst="rect">
+            <a:avLst/>
+          </a:prstGeom>
+          <a:solidFill>
+            <a:srgbClr val="1A1E26"/>
+          </a:solidFill>
+          <a:ln w="12700">
+            <a:solidFill>
+              <a:srgbClr val="1A1E26"/>
+            </a:solidFill>
+            <a:prstDash val="solid"/>
+          </a:ln>
+        </p:spPr>
+        <p:txBody>
+          <a:bodyPr/>
+          <a:lstStyle/>
+          <a:p>
+            <a:endParaRPr lang="ru-RU"/>
+          </a:p>
+        </p:txBody>
+      </p:sp>
+      <p:sp>
+        <p:nvSpPr>
+          <p:cNvPr id="30" name="Text 27"/>
+          <p:cNvSpPr/>
+          <p:nvPr/>
+        </p:nvSpPr>
+        <p:spPr>
+          <a:xfrm>
+            <a:off x="274320" y="4800600"/>
+            <a:ext cx="8595360" cy="338328"/>
+          </a:xfrm>
+          <a:prstGeom prst="rect">
+            <a:avLst/>
+          </a:prstGeom>
+          <a:noFill/>
+          <a:ln/>
+        </p:spPr>
+        <p:txBody>
+          <a:bodyPr wrap="square" lIns="0" tIns="0" rIns="0" bIns="0" rtlCol="0" anchor="ctr"/>
+          <a:lstStyle/>
+          <a:p>
+            <a:pPr marL="0" indent="0">
+              <a:buNone/>
+            </a:pPr>
+            <a:r>
+              <a:rPr lang="en-US" sz="1200" dirty="0">
+                <a:solidFill>
+                  <a:srgbClr val="CCCCCC"/>
+                </a:solidFill>
+                <a:latin typeface="Consolas" pitchFamily="34" charset="0"/>
+                <a:ea typeface="Consolas" pitchFamily="34" charset="-122"/>
+                <a:cs typeface="Consolas" pitchFamily="34" charset="-120"/>
+              </a:rPr>
+              <a:t>Výsledok: proj.xy hovorí kde vzorkovať depth mapu,  proj.z je hĺbka nášho fragmentu.</a:t>
+            </a:r>
+            <a:endParaRPr lang="en-US" sz="1200" dirty="0"/>
+          </a:p>
+        </p:txBody>
+      </p:sp>
+    </p:spTree>
+  </p:cSld>
+  <p:clrMapOvr>
+    <a:masterClrMapping/>
+  </p:clrMapOvr>
+</p:sld>
+</file>
+
+<file path=ppt/slides/slide12.xml><?xml version="1.0" encoding="utf-8"?>
+<p:sld xmlns:a="http://schemas.openxmlformats.org/drawingml/2006/main" xmlns:r="http://schemas.openxmlformats.org/officeDocument/2006/relationships" xmlns:p="http://schemas.openxmlformats.org/presentationml/2006/main">
   <p:cSld name="Slide 10">
     <p:bg>
       <p:bgPr>
@@ -3685,7 +5531,7 @@
 </p:sld>
 </file>
 
-<file path=ppt/slides/slide11.xml><?xml version="1.0" encoding="utf-8"?>
+<file path=ppt/slides/slide13.xml><?xml version="1.0" encoding="utf-8"?>
 <p:sld xmlns:a="http://schemas.openxmlformats.org/drawingml/2006/main" xmlns:r="http://schemas.openxmlformats.org/officeDocument/2006/relationships" xmlns:p="http://schemas.openxmlformats.org/presentationml/2006/main">
   <p:cSld name="Slide 11">
     <p:bg>
@@ -4279,7 +6125,7 @@
 </p:sld>
 </file>
 
-<file path=ppt/slides/slide12.xml><?xml version="1.0" encoding="utf-8"?>
+<file path=ppt/slides/slide14.xml><?xml version="1.0" encoding="utf-8"?>
 <p:sld xmlns:a="http://schemas.openxmlformats.org/drawingml/2006/main" xmlns:r="http://schemas.openxmlformats.org/officeDocument/2006/relationships" xmlns:p="http://schemas.openxmlformats.org/presentationml/2006/main">
   <p:cSld name="Slide 12">
     <p:bg>
@@ -4775,7 +6621,7 @@
 </p:sld>
 </file>
 
-<file path=ppt/slides/slide13.xml><?xml version="1.0" encoding="utf-8"?>
+<file path=ppt/slides/slide15.xml><?xml version="1.0" encoding="utf-8"?>
 <p:sld xmlns:a="http://schemas.openxmlformats.org/drawingml/2006/main" xmlns:r="http://schemas.openxmlformats.org/officeDocument/2006/relationships" xmlns:p="http://schemas.openxmlformats.org/presentationml/2006/main">
   <p:cSld name="Slide 13">
     <p:bg>
@@ -5271,7 +7117,7 @@
 </p:sld>
 </file>
 
-<file path=ppt/slides/slide14.xml><?xml version="1.0" encoding="utf-8"?>
+<file path=ppt/slides/slide16.xml><?xml version="1.0" encoding="utf-8"?>
 <p:sld xmlns:a="http://schemas.openxmlformats.org/drawingml/2006/main" xmlns:r="http://schemas.openxmlformats.org/officeDocument/2006/relationships" xmlns:p="http://schemas.openxmlformats.org/presentationml/2006/main">
   <p:cSld name="Slide 14">
     <p:bg>
@@ -5863,7 +7709,7 @@
 </p:sld>
 </file>
 
-<file path=ppt/slides/slide15.xml><?xml version="1.0" encoding="utf-8"?>
+<file path=ppt/slides/slide17.xml><?xml version="1.0" encoding="utf-8"?>
 <p:sld xmlns:a="http://schemas.openxmlformats.org/drawingml/2006/main" xmlns:r="http://schemas.openxmlformats.org/officeDocument/2006/relationships" xmlns:p="http://schemas.openxmlformats.org/presentationml/2006/main">
   <p:cSld name="Slide 15">
     <p:bg>
@@ -7191,7 +9037,7 @@
 </p:sld>
 </file>
 
-<file path=ppt/slides/slide16.xml><?xml version="1.0" encoding="utf-8"?>
+<file path=ppt/slides/slide18.xml><?xml version="1.0" encoding="utf-8"?>
 <p:sld xmlns:a="http://schemas.openxmlformats.org/drawingml/2006/main" xmlns:r="http://schemas.openxmlformats.org/officeDocument/2006/relationships" xmlns:p="http://schemas.openxmlformats.org/presentationml/2006/main">
   <p:cSld name="Slide 16">
     <p:bg>
@@ -10092,7 +11938,7 @@
 
 <file path=ppt/slides/slide5.xml><?xml version="1.0" encoding="utf-8"?>
 <p:sld xmlns:a="http://schemas.openxmlformats.org/drawingml/2006/main" xmlns:r="http://schemas.openxmlformats.org/officeDocument/2006/relationships" xmlns:p="http://schemas.openxmlformats.org/presentationml/2006/main">
-  <p:cSld name="Slide 5">
+  <p:cSld>
     <p:bg>
       <p:bgPr>
         <a:solidFill>
@@ -10103,7 +11949,13 @@
     </p:bg>
     <p:spTree>
       <p:nvGrpSpPr>
-        <p:cNvPr id="1" name=""/>
+        <p:cNvPr id="1" name="">
+          <a:extLst>
+            <a:ext uri="{FF2B5EF4-FFF2-40B4-BE49-F238E27FC236}">
+              <a16:creationId xmlns:a16="http://schemas.microsoft.com/office/drawing/2014/main" id="{94D66237-1202-B5BF-D77B-88D753EC6509}"/>
+            </a:ext>
+          </a:extLst>
+        </p:cNvPr>
         <p:cNvGrpSpPr/>
         <p:nvPr/>
       </p:nvGrpSpPr>
@@ -10117,7 +11969,13 @@
       </p:grpSpPr>
       <p:sp>
         <p:nvSpPr>
-          <p:cNvPr id="2" name="Shape 0"/>
+          <p:cNvPr id="20" name="Shape 0">
+            <a:extLst>
+              <a:ext uri="{FF2B5EF4-FFF2-40B4-BE49-F238E27FC236}">
+                <a16:creationId xmlns:a16="http://schemas.microsoft.com/office/drawing/2014/main" id="{7C24ED68-D58B-4054-9E16-EE45CF27A5EA}"/>
+              </a:ext>
+            </a:extLst>
+          </p:cNvPr>
           <p:cNvSpPr/>
           <p:nvPr/>
         </p:nvSpPr>
@@ -10149,7 +12007,13 @@
       </p:sp>
       <p:sp>
         <p:nvSpPr>
-          <p:cNvPr id="3" name="Text 1"/>
+          <p:cNvPr id="21" name="Text 1">
+            <a:extLst>
+              <a:ext uri="{FF2B5EF4-FFF2-40B4-BE49-F238E27FC236}">
+                <a16:creationId xmlns:a16="http://schemas.microsoft.com/office/drawing/2014/main" id="{EE274FE1-9D75-2CAA-D899-CA6607880143}"/>
+              </a:ext>
+            </a:extLst>
+          </p:cNvPr>
           <p:cNvSpPr/>
           <p:nvPr/>
         </p:nvSpPr>
@@ -10180,7 +12044,7 @@
                 <a:ea typeface="Consolas" pitchFamily="34" charset="-122"/>
                 <a:cs typeface="Consolas" pitchFamily="34" charset="-120"/>
               </a:rPr>
-              <a:t>// pass 1 — GPU pamäť</a:t>
+              <a:t>// framebuffer — základy</a:t>
             </a:r>
             <a:endParaRPr lang="en-US" sz="1100" dirty="0"/>
           </a:p>
@@ -10188,7 +12052,13 @@
       </p:sp>
       <p:sp>
         <p:nvSpPr>
-          <p:cNvPr id="4" name="Text 2"/>
+          <p:cNvPr id="22" name="Text 2">
+            <a:extLst>
+              <a:ext uri="{FF2B5EF4-FFF2-40B4-BE49-F238E27FC236}">
+                <a16:creationId xmlns:a16="http://schemas.microsoft.com/office/drawing/2014/main" id="{F4FCC09E-0917-39AF-7F04-3DAD8E292999}"/>
+              </a:ext>
+            </a:extLst>
+          </p:cNvPr>
           <p:cNvSpPr/>
           <p:nvPr/>
         </p:nvSpPr>
@@ -10227,7 +12097,13 @@
       </p:sp>
       <p:sp>
         <p:nvSpPr>
-          <p:cNvPr id="5" name="Shape 3"/>
+          <p:cNvPr id="23" name="Shape 3">
+            <a:extLst>
+              <a:ext uri="{FF2B5EF4-FFF2-40B4-BE49-F238E27FC236}">
+                <a16:creationId xmlns:a16="http://schemas.microsoft.com/office/drawing/2014/main" id="{952848C6-88D8-98CA-BAC8-42B15B730CF1}"/>
+              </a:ext>
+            </a:extLst>
+          </p:cNvPr>
           <p:cNvSpPr/>
           <p:nvPr/>
         </p:nvSpPr>
@@ -10259,7 +12135,13 @@
       </p:sp>
       <p:sp>
         <p:nvSpPr>
-          <p:cNvPr id="6" name="Text 4"/>
+          <p:cNvPr id="24" name="Text 4">
+            <a:extLst>
+              <a:ext uri="{FF2B5EF4-FFF2-40B4-BE49-F238E27FC236}">
+                <a16:creationId xmlns:a16="http://schemas.microsoft.com/office/drawing/2014/main" id="{44DF73A5-F221-4071-9294-12A6BBC4E609}"/>
+              </a:ext>
+            </a:extLst>
+          </p:cNvPr>
           <p:cNvSpPr/>
           <p:nvPr/>
         </p:nvSpPr>
@@ -10298,14 +12180,20 @@
       </p:sp>
       <p:sp>
         <p:nvSpPr>
-          <p:cNvPr id="7" name="Text 5"/>
+          <p:cNvPr id="25" name="Text 5">
+            <a:extLst>
+              <a:ext uri="{FF2B5EF4-FFF2-40B4-BE49-F238E27FC236}">
+                <a16:creationId xmlns:a16="http://schemas.microsoft.com/office/drawing/2014/main" id="{B4958A9E-D2E5-0DD5-EC6E-BB6FA25CAB2C}"/>
+              </a:ext>
+            </a:extLst>
+          </p:cNvPr>
           <p:cNvSpPr/>
           <p:nvPr/>
         </p:nvSpPr>
         <p:spPr>
           <a:xfrm>
             <a:off x="320040" y="777240"/>
-            <a:ext cx="8229600" cy="594360"/>
+            <a:ext cx="8503920" cy="594360"/>
           </a:xfrm>
           <a:prstGeom prst="rect">
             <a:avLst/>
@@ -10329,7 +12217,7 @@
                 <a:ea typeface="Calibri" pitchFamily="34" charset="-122"/>
                 <a:cs typeface="Calibri" pitchFamily="34" charset="-120"/>
               </a:rPr>
-              <a:t>Kde žijú dáta na GPU?</a:t>
+              <a:t>Čo je Framebuffer?</a:t>
             </a:r>
             <a:endParaRPr lang="en-US" sz="3600" dirty="0"/>
           </a:p>
@@ -10337,14 +12225,455 @@
       </p:sp>
       <p:sp>
         <p:nvSpPr>
-          <p:cNvPr id="8" name="Shape 6"/>
-          <p:cNvSpPr/>
-          <p:nvPr/>
-        </p:nvSpPr>
-        <p:spPr>
-          <a:xfrm>
-            <a:off x="164592" y="1508760"/>
-            <a:ext cx="2194560" cy="2926080"/>
+          <p:cNvPr id="26" name="Shape 6">
+            <a:extLst>
+              <a:ext uri="{FF2B5EF4-FFF2-40B4-BE49-F238E27FC236}">
+                <a16:creationId xmlns:a16="http://schemas.microsoft.com/office/drawing/2014/main" id="{B165475D-27C3-2D81-5B5B-AC8CCBAC4205}"/>
+              </a:ext>
+            </a:extLst>
+          </p:cNvPr>
+          <p:cNvSpPr/>
+          <p:nvPr/>
+        </p:nvSpPr>
+        <p:spPr>
+          <a:xfrm>
+            <a:off x="164592" y="1481328"/>
+            <a:ext cx="8814816" cy="804672"/>
+          </a:xfrm>
+          <a:prstGeom prst="rect">
+            <a:avLst/>
+          </a:prstGeom>
+          <a:solidFill>
+            <a:srgbClr val="1E2330"/>
+          </a:solidFill>
+          <a:ln w="12700">
+            <a:solidFill>
+              <a:srgbClr val="E8724A"/>
+            </a:solidFill>
+            <a:prstDash val="solid"/>
+          </a:ln>
+        </p:spPr>
+        <p:txBody>
+          <a:bodyPr/>
+          <a:lstStyle/>
+          <a:p>
+            <a:endParaRPr lang="ru-RU"/>
+          </a:p>
+        </p:txBody>
+      </p:sp>
+      <p:sp>
+        <p:nvSpPr>
+          <p:cNvPr id="27" name="Text 7">
+            <a:extLst>
+              <a:ext uri="{FF2B5EF4-FFF2-40B4-BE49-F238E27FC236}">
+                <a16:creationId xmlns:a16="http://schemas.microsoft.com/office/drawing/2014/main" id="{76AEB61A-E939-D482-CFEF-5ADEA1F82F71}"/>
+              </a:ext>
+            </a:extLst>
+          </p:cNvPr>
+          <p:cNvSpPr/>
+          <p:nvPr/>
+        </p:nvSpPr>
+        <p:spPr>
+          <a:xfrm>
+            <a:off x="292608" y="1572768"/>
+            <a:ext cx="8558784" cy="292608"/>
+          </a:xfrm>
+          <a:prstGeom prst="rect">
+            <a:avLst/>
+          </a:prstGeom>
+          <a:noFill/>
+          <a:ln/>
+        </p:spPr>
+        <p:txBody>
+          <a:bodyPr wrap="square" lIns="0" tIns="0" rIns="0" bIns="0" rtlCol="0" anchor="ctr"/>
+          <a:lstStyle/>
+          <a:p>
+            <a:pPr marL="0" indent="0">
+              <a:buNone/>
+            </a:pPr>
+            <a:r>
+              <a:rPr lang="en-US" sz="1300" b="1" dirty="0">
+                <a:solidFill>
+                  <a:srgbClr val="E8724A"/>
+                </a:solidFill>
+                <a:latin typeface="Consolas" pitchFamily="34" charset="0"/>
+                <a:ea typeface="Consolas" pitchFamily="34" charset="-122"/>
+                <a:cs typeface="Consolas" pitchFamily="34" charset="-120"/>
+              </a:rPr>
+              <a:t>Definícia</a:t>
+            </a:r>
+            <a:endParaRPr lang="en-US" sz="1300" dirty="0"/>
+          </a:p>
+        </p:txBody>
+      </p:sp>
+      <p:sp>
+        <p:nvSpPr>
+          <p:cNvPr id="28" name="Text 8">
+            <a:extLst>
+              <a:ext uri="{FF2B5EF4-FFF2-40B4-BE49-F238E27FC236}">
+                <a16:creationId xmlns:a16="http://schemas.microsoft.com/office/drawing/2014/main" id="{CF2283EA-0869-7C27-D581-D736A7B4D100}"/>
+              </a:ext>
+            </a:extLst>
+          </p:cNvPr>
+          <p:cNvSpPr/>
+          <p:nvPr/>
+        </p:nvSpPr>
+        <p:spPr>
+          <a:xfrm>
+            <a:off x="292608" y="1901952"/>
+            <a:ext cx="8558784" cy="310896"/>
+          </a:xfrm>
+          <a:prstGeom prst="rect">
+            <a:avLst/>
+          </a:prstGeom>
+          <a:noFill/>
+          <a:ln/>
+        </p:spPr>
+        <p:txBody>
+          <a:bodyPr wrap="square" lIns="0" tIns="0" rIns="0" bIns="0" rtlCol="0" anchor="t"/>
+          <a:lstStyle/>
+          <a:p>
+            <a:pPr marL="0" indent="0">
+              <a:buNone/>
+            </a:pPr>
+            <a:r>
+              <a:rPr lang="en-US" sz="1200" dirty="0">
+                <a:solidFill>
+                  <a:srgbClr val="CCCCCC"/>
+                </a:solidFill>
+                <a:latin typeface="Consolas" pitchFamily="34" charset="0"/>
+                <a:ea typeface="Consolas" pitchFamily="34" charset="-122"/>
+                <a:cs typeface="Consolas" pitchFamily="34" charset="-120"/>
+              </a:rPr>
+              <a:t>Framebuffer je pamäťový priestor kde GPU skladuje výsledok renderovania — farby, hļbku, stencil.</a:t>
+            </a:r>
+            <a:endParaRPr lang="en-US" sz="1200" dirty="0"/>
+          </a:p>
+        </p:txBody>
+      </p:sp>
+      <p:sp>
+        <p:nvSpPr>
+          <p:cNvPr id="29" name="Shape 9">
+            <a:extLst>
+              <a:ext uri="{FF2B5EF4-FFF2-40B4-BE49-F238E27FC236}">
+                <a16:creationId xmlns:a16="http://schemas.microsoft.com/office/drawing/2014/main" id="{43AA7B1F-F541-F1C1-3433-88DE3D34B223}"/>
+              </a:ext>
+            </a:extLst>
+          </p:cNvPr>
+          <p:cNvSpPr/>
+          <p:nvPr/>
+        </p:nvSpPr>
+        <p:spPr>
+          <a:xfrm>
+            <a:off x="164592" y="2395728"/>
+            <a:ext cx="2816352" cy="1828800"/>
+          </a:xfrm>
+          <a:prstGeom prst="rect">
+            <a:avLst/>
+          </a:prstGeom>
+          <a:solidFill>
+            <a:srgbClr val="1E2330"/>
+          </a:solidFill>
+          <a:ln w="12700">
+            <a:solidFill>
+              <a:srgbClr val="E8724A"/>
+            </a:solidFill>
+            <a:prstDash val="solid"/>
+          </a:ln>
+        </p:spPr>
+        <p:txBody>
+          <a:bodyPr/>
+          <a:lstStyle/>
+          <a:p>
+            <a:endParaRPr lang="ru-RU"/>
+          </a:p>
+        </p:txBody>
+      </p:sp>
+      <p:sp>
+        <p:nvSpPr>
+          <p:cNvPr id="30" name="Text 10">
+            <a:extLst>
+              <a:ext uri="{FF2B5EF4-FFF2-40B4-BE49-F238E27FC236}">
+                <a16:creationId xmlns:a16="http://schemas.microsoft.com/office/drawing/2014/main" id="{9E1A5193-21A5-79FB-AB91-1B337C88F914}"/>
+              </a:ext>
+            </a:extLst>
+          </p:cNvPr>
+          <p:cNvSpPr/>
+          <p:nvPr/>
+        </p:nvSpPr>
+        <p:spPr>
+          <a:xfrm>
+            <a:off x="274320" y="2487168"/>
+            <a:ext cx="2596896" cy="274320"/>
+          </a:xfrm>
+          <a:prstGeom prst="rect">
+            <a:avLst/>
+          </a:prstGeom>
+          <a:noFill/>
+          <a:ln/>
+        </p:spPr>
+        <p:txBody>
+          <a:bodyPr wrap="square" lIns="0" tIns="0" rIns="0" bIns="0" rtlCol="0" anchor="ctr"/>
+          <a:lstStyle/>
+          <a:p>
+            <a:pPr marL="0" indent="0">
+              <a:buNone/>
+            </a:pPr>
+            <a:r>
+              <a:rPr lang="en-US" sz="1300" b="1" dirty="0">
+                <a:solidFill>
+                  <a:srgbClr val="E8724A"/>
+                </a:solidFill>
+                <a:latin typeface="Consolas" pitchFamily="34" charset="0"/>
+                <a:ea typeface="Consolas" pitchFamily="34" charset="-122"/>
+                <a:cs typeface="Consolas" pitchFamily="34" charset="-120"/>
+              </a:rPr>
+              <a:t>Color buffer</a:t>
+            </a:r>
+            <a:endParaRPr lang="en-US" sz="1300" dirty="0"/>
+          </a:p>
+        </p:txBody>
+      </p:sp>
+      <p:sp>
+        <p:nvSpPr>
+          <p:cNvPr id="31" name="Text 11">
+            <a:extLst>
+              <a:ext uri="{FF2B5EF4-FFF2-40B4-BE49-F238E27FC236}">
+                <a16:creationId xmlns:a16="http://schemas.microsoft.com/office/drawing/2014/main" id="{4C9ED764-A277-7642-9894-31572CD583B3}"/>
+              </a:ext>
+            </a:extLst>
+          </p:cNvPr>
+          <p:cNvSpPr/>
+          <p:nvPr/>
+        </p:nvSpPr>
+        <p:spPr>
+          <a:xfrm>
+            <a:off x="274320" y="2834640"/>
+            <a:ext cx="2596896" cy="1280160"/>
+          </a:xfrm>
+          <a:prstGeom prst="rect">
+            <a:avLst/>
+          </a:prstGeom>
+          <a:noFill/>
+          <a:ln/>
+        </p:spPr>
+        <p:txBody>
+          <a:bodyPr wrap="square" lIns="0" tIns="0" rIns="0" bIns="0" rtlCol="0" anchor="ctr"/>
+          <a:lstStyle/>
+          <a:p>
+            <a:pPr marL="0" indent="0">
+              <a:buNone/>
+            </a:pPr>
+            <a:r>
+              <a:rPr lang="en-US" sz="1200" dirty="0">
+                <a:solidFill>
+                  <a:srgbClr val="CCCCCC"/>
+                </a:solidFill>
+                <a:latin typeface="Consolas" pitchFamily="34" charset="0"/>
+                <a:ea typeface="Consolas" pitchFamily="34" charset="-122"/>
+                <a:cs typeface="Consolas" pitchFamily="34" charset="-120"/>
+              </a:rPr>
+              <a:t>RGB farba každého pixelu.</a:t>
+            </a:r>
+            <a:endParaRPr lang="en-US" sz="1200" dirty="0"/>
+          </a:p>
+          <a:p>
+            <a:pPr marL="0" indent="0">
+              <a:buNone/>
+            </a:pPr>
+            <a:r>
+              <a:rPr lang="en-US" sz="1200" dirty="0">
+                <a:solidFill>
+                  <a:srgbClr val="CCCCCC"/>
+                </a:solidFill>
+                <a:latin typeface="Consolas" pitchFamily="34" charset="0"/>
+                <a:ea typeface="Consolas" pitchFamily="34" charset="-122"/>
+                <a:cs typeface="Consolas" pitchFamily="34" charset="-120"/>
+              </a:rPr>
+              <a:t>To čo vidíš na obrazovke.</a:t>
+            </a:r>
+            <a:endParaRPr lang="en-US" sz="1200" dirty="0"/>
+          </a:p>
+        </p:txBody>
+      </p:sp>
+      <p:sp>
+        <p:nvSpPr>
+          <p:cNvPr id="32" name="Shape 12">
+            <a:extLst>
+              <a:ext uri="{FF2B5EF4-FFF2-40B4-BE49-F238E27FC236}">
+                <a16:creationId xmlns:a16="http://schemas.microsoft.com/office/drawing/2014/main" id="{6E84F3C0-B4B1-2DE3-CDF4-9816C0BA0278}"/>
+              </a:ext>
+            </a:extLst>
+          </p:cNvPr>
+          <p:cNvSpPr/>
+          <p:nvPr/>
+        </p:nvSpPr>
+        <p:spPr>
+          <a:xfrm>
+            <a:off x="3108960" y="2395728"/>
+            <a:ext cx="2816352" cy="1828800"/>
+          </a:xfrm>
+          <a:prstGeom prst="rect">
+            <a:avLst/>
+          </a:prstGeom>
+          <a:solidFill>
+            <a:srgbClr val="1E2330"/>
+          </a:solidFill>
+          <a:ln w="12700">
+            <a:solidFill>
+              <a:srgbClr val="4AC8E8"/>
+            </a:solidFill>
+            <a:prstDash val="solid"/>
+          </a:ln>
+        </p:spPr>
+        <p:txBody>
+          <a:bodyPr/>
+          <a:lstStyle/>
+          <a:p>
+            <a:endParaRPr lang="ru-RU"/>
+          </a:p>
+        </p:txBody>
+      </p:sp>
+      <p:sp>
+        <p:nvSpPr>
+          <p:cNvPr id="33" name="Text 13">
+            <a:extLst>
+              <a:ext uri="{FF2B5EF4-FFF2-40B4-BE49-F238E27FC236}">
+                <a16:creationId xmlns:a16="http://schemas.microsoft.com/office/drawing/2014/main" id="{5894DCD4-A0C3-302A-A0B7-341601D4C81F}"/>
+              </a:ext>
+            </a:extLst>
+          </p:cNvPr>
+          <p:cNvSpPr/>
+          <p:nvPr/>
+        </p:nvSpPr>
+        <p:spPr>
+          <a:xfrm>
+            <a:off x="3218688" y="2487168"/>
+            <a:ext cx="2596896" cy="274320"/>
+          </a:xfrm>
+          <a:prstGeom prst="rect">
+            <a:avLst/>
+          </a:prstGeom>
+          <a:noFill/>
+          <a:ln/>
+        </p:spPr>
+        <p:txBody>
+          <a:bodyPr wrap="square" lIns="0" tIns="0" rIns="0" bIns="0" rtlCol="0" anchor="ctr"/>
+          <a:lstStyle/>
+          <a:p>
+            <a:pPr marL="0" indent="0">
+              <a:buNone/>
+            </a:pPr>
+            <a:r>
+              <a:rPr lang="en-US" sz="1300" b="1" dirty="0">
+                <a:solidFill>
+                  <a:srgbClr val="4AC8E8"/>
+                </a:solidFill>
+                <a:latin typeface="Consolas" pitchFamily="34" charset="0"/>
+                <a:ea typeface="Consolas" pitchFamily="34" charset="-122"/>
+                <a:cs typeface="Consolas" pitchFamily="34" charset="-120"/>
+              </a:rPr>
+              <a:t>Depth buffer</a:t>
+            </a:r>
+            <a:endParaRPr lang="en-US" sz="1300" dirty="0"/>
+          </a:p>
+        </p:txBody>
+      </p:sp>
+      <p:sp>
+        <p:nvSpPr>
+          <p:cNvPr id="34" name="Text 14">
+            <a:extLst>
+              <a:ext uri="{FF2B5EF4-FFF2-40B4-BE49-F238E27FC236}">
+                <a16:creationId xmlns:a16="http://schemas.microsoft.com/office/drawing/2014/main" id="{166CE20A-FB35-2187-C080-66EA44C31E12}"/>
+              </a:ext>
+            </a:extLst>
+          </p:cNvPr>
+          <p:cNvSpPr/>
+          <p:nvPr/>
+        </p:nvSpPr>
+        <p:spPr>
+          <a:xfrm>
+            <a:off x="3218688" y="2834640"/>
+            <a:ext cx="2596896" cy="1280160"/>
+          </a:xfrm>
+          <a:prstGeom prst="rect">
+            <a:avLst/>
+          </a:prstGeom>
+          <a:noFill/>
+          <a:ln/>
+        </p:spPr>
+        <p:txBody>
+          <a:bodyPr wrap="square" lIns="0" tIns="0" rIns="0" bIns="0" rtlCol="0" anchor="ctr"/>
+          <a:lstStyle/>
+          <a:p>
+            <a:pPr marL="0" indent="0">
+              <a:buNone/>
+            </a:pPr>
+            <a:r>
+              <a:rPr lang="en-US" sz="1200" dirty="0">
+                <a:solidFill>
+                  <a:srgbClr val="CCCCCC"/>
+                </a:solidFill>
+                <a:latin typeface="Consolas" pitchFamily="34" charset="0"/>
+                <a:ea typeface="Consolas" pitchFamily="34" charset="-122"/>
+                <a:cs typeface="Consolas" pitchFamily="34" charset="-120"/>
+              </a:rPr>
+              <a:t>Hļbka každého pixelu.</a:t>
+            </a:r>
+            <a:endParaRPr lang="en-US" sz="1200" dirty="0"/>
+          </a:p>
+          <a:p>
+            <a:pPr marL="0" indent="0">
+              <a:buNone/>
+            </a:pPr>
+            <a:r>
+              <a:rPr lang="en-US" sz="1200" dirty="0">
+                <a:solidFill>
+                  <a:srgbClr val="CCCCCC"/>
+                </a:solidFill>
+                <a:latin typeface="Consolas" pitchFamily="34" charset="0"/>
+                <a:ea typeface="Consolas" pitchFamily="34" charset="-122"/>
+                <a:cs typeface="Consolas" pitchFamily="34" charset="-120"/>
+              </a:rPr>
+              <a:t>Používa sa na occlusion —</a:t>
+            </a:r>
+            <a:endParaRPr lang="en-US" sz="1200" dirty="0"/>
+          </a:p>
+          <a:p>
+            <a:pPr marL="0" indent="0">
+              <a:buNone/>
+            </a:pPr>
+            <a:r>
+              <a:rPr lang="en-US" sz="1200" dirty="0">
+                <a:solidFill>
+                  <a:srgbClr val="CCCCCC"/>
+                </a:solidFill>
+                <a:latin typeface="Consolas" pitchFamily="34" charset="0"/>
+                <a:ea typeface="Consolas" pitchFamily="34" charset="-122"/>
+                <a:cs typeface="Consolas" pitchFamily="34" charset="-120"/>
+              </a:rPr>
+              <a:t>kto je pred kým.</a:t>
+            </a:r>
+            <a:endParaRPr lang="en-US" sz="1200" dirty="0"/>
+          </a:p>
+        </p:txBody>
+      </p:sp>
+      <p:sp>
+        <p:nvSpPr>
+          <p:cNvPr id="35" name="Shape 15">
+            <a:extLst>
+              <a:ext uri="{FF2B5EF4-FFF2-40B4-BE49-F238E27FC236}">
+                <a16:creationId xmlns:a16="http://schemas.microsoft.com/office/drawing/2014/main" id="{CA600C57-92DD-7936-AC42-B1E6523839D3}"/>
+              </a:ext>
+            </a:extLst>
+          </p:cNvPr>
+          <p:cNvSpPr/>
+          <p:nvPr/>
+        </p:nvSpPr>
+        <p:spPr>
+          <a:xfrm>
+            <a:off x="6053328" y="2395728"/>
+            <a:ext cx="2816352" cy="1828800"/>
           </a:xfrm>
           <a:prstGeom prst="rect">
             <a:avLst/>
@@ -10369,14 +12698,20 @@
       </p:sp>
       <p:sp>
         <p:nvSpPr>
-          <p:cNvPr id="9" name="Text 7"/>
-          <p:cNvSpPr/>
-          <p:nvPr/>
-        </p:nvSpPr>
-        <p:spPr>
-          <a:xfrm>
-            <a:off x="164592" y="1600200"/>
-            <a:ext cx="2194560" cy="274320"/>
+          <p:cNvPr id="36" name="Text 16">
+            <a:extLst>
+              <a:ext uri="{FF2B5EF4-FFF2-40B4-BE49-F238E27FC236}">
+                <a16:creationId xmlns:a16="http://schemas.microsoft.com/office/drawing/2014/main" id="{E44FDFA6-BA67-F4F7-2D4C-186086198102}"/>
+              </a:ext>
+            </a:extLst>
+          </p:cNvPr>
+          <p:cNvSpPr/>
+          <p:nvPr/>
+        </p:nvSpPr>
+        <p:spPr>
+          <a:xfrm>
+            <a:off x="6163056" y="2487168"/>
+            <a:ext cx="2596896" cy="274320"/>
           </a:xfrm>
           <a:prstGeom prst="rect">
             <a:avLst/>
@@ -10388,7 +12723,7 @@
           <a:bodyPr wrap="square" lIns="0" tIns="0" rIns="0" bIns="0" rtlCol="0" anchor="ctr"/>
           <a:lstStyle/>
           <a:p>
-            <a:pPr marL="0" indent="0" algn="ctr">
+            <a:pPr marL="0" indent="0">
               <a:buNone/>
             </a:pPr>
             <a:r>
@@ -10400,7 +12735,7 @@
                 <a:ea typeface="Consolas" pitchFamily="34" charset="-122"/>
                 <a:cs typeface="Consolas" pitchFamily="34" charset="-120"/>
               </a:rPr>
-              <a:t>CPU / RAM</a:t>
+              <a:t>Stencil buffer</a:t>
             </a:r>
             <a:endParaRPr lang="en-US" sz="1300" dirty="0"/>
           </a:p>
@@ -10408,14 +12743,20 @@
       </p:sp>
       <p:sp>
         <p:nvSpPr>
-          <p:cNvPr id="10" name="Text 8"/>
-          <p:cNvSpPr/>
-          <p:nvPr/>
-        </p:nvSpPr>
-        <p:spPr>
-          <a:xfrm>
-            <a:off x="292608" y="1965960"/>
-            <a:ext cx="1920240" cy="1371600"/>
+          <p:cNvPr id="37" name="Text 17">
+            <a:extLst>
+              <a:ext uri="{FF2B5EF4-FFF2-40B4-BE49-F238E27FC236}">
+                <a16:creationId xmlns:a16="http://schemas.microsoft.com/office/drawing/2014/main" id="{BB9195B9-6B0A-A0F5-CA23-24FB88320FBD}"/>
+              </a:ext>
+            </a:extLst>
+          </p:cNvPr>
+          <p:cNvSpPr/>
+          <p:nvPr/>
+        </p:nvSpPr>
+        <p:spPr>
+          <a:xfrm>
+            <a:off x="6163056" y="2834640"/>
+            <a:ext cx="2596896" cy="1280160"/>
           </a:xfrm>
           <a:prstGeom prst="rect">
             <a:avLst/>
@@ -10439,7 +12780,7 @@
                 <a:ea typeface="Consolas" pitchFamily="34" charset="-122"/>
                 <a:cs typeface="Consolas" pitchFamily="34" charset="-120"/>
               </a:rPr>
-              <a:t>Java kód</a:t>
+              <a:t>Maska — ktoré pixely</a:t>
             </a:r>
             <a:endParaRPr lang="en-US" sz="1200" dirty="0"/>
           </a:p>
@@ -10456,7 +12797,7 @@
                 <a:ea typeface="Consolas" pitchFamily="34" charset="-122"/>
                 <a:cs typeface="Consolas" pitchFamily="34" charset="-120"/>
               </a:rPr>
-              <a:t>─────────</a:t>
+              <a:t>kresliť a ktoré nie.</a:t>
             </a:r>
             <a:endParaRPr lang="en-US" sz="1200" dirty="0"/>
           </a:p>
@@ -10473,10 +12814,76 @@
                 <a:ea typeface="Consolas" pitchFamily="34" charset="-122"/>
                 <a:cs typeface="Consolas" pitchFamily="34" charset="-120"/>
               </a:rPr>
-              <a:t>int shadowFBO</a:t>
+              <a:t>Dnes nepoužívame.</a:t>
             </a:r>
             <a:endParaRPr lang="en-US" sz="1200" dirty="0"/>
           </a:p>
+        </p:txBody>
+      </p:sp>
+      <p:sp>
+        <p:nvSpPr>
+          <p:cNvPr id="38" name="Shape 18">
+            <a:extLst>
+              <a:ext uri="{FF2B5EF4-FFF2-40B4-BE49-F238E27FC236}">
+                <a16:creationId xmlns:a16="http://schemas.microsoft.com/office/drawing/2014/main" id="{FCBF6B91-D813-E0DF-915B-FEF29D5A06AA}"/>
+              </a:ext>
+            </a:extLst>
+          </p:cNvPr>
+          <p:cNvSpPr/>
+          <p:nvPr/>
+        </p:nvSpPr>
+        <p:spPr>
+          <a:xfrm>
+            <a:off x="0" y="4800600"/>
+            <a:ext cx="9144000" cy="338328"/>
+          </a:xfrm>
+          <a:prstGeom prst="rect">
+            <a:avLst/>
+          </a:prstGeom>
+          <a:solidFill>
+            <a:srgbClr val="1A1E26"/>
+          </a:solidFill>
+          <a:ln w="12700">
+            <a:solidFill>
+              <a:srgbClr val="1A1E26"/>
+            </a:solidFill>
+            <a:prstDash val="solid"/>
+          </a:ln>
+        </p:spPr>
+        <p:txBody>
+          <a:bodyPr/>
+          <a:lstStyle/>
+          <a:p>
+            <a:endParaRPr lang="ru-RU"/>
+          </a:p>
+        </p:txBody>
+      </p:sp>
+      <p:sp>
+        <p:nvSpPr>
+          <p:cNvPr id="39" name="Text 19">
+            <a:extLst>
+              <a:ext uri="{FF2B5EF4-FFF2-40B4-BE49-F238E27FC236}">
+                <a16:creationId xmlns:a16="http://schemas.microsoft.com/office/drawing/2014/main" id="{F7AA85C9-A244-DDDE-7DCB-432FF21FAEB8}"/>
+              </a:ext>
+            </a:extLst>
+          </p:cNvPr>
+          <p:cNvSpPr/>
+          <p:nvPr/>
+        </p:nvSpPr>
+        <p:spPr>
+          <a:xfrm>
+            <a:off x="274320" y="4800600"/>
+            <a:ext cx="8595360" cy="338328"/>
+          </a:xfrm>
+          <a:prstGeom prst="rect">
+            <a:avLst/>
+          </a:prstGeom>
+          <a:noFill/>
+          <a:ln/>
+        </p:spPr>
+        <p:txBody>
+          <a:bodyPr wrap="square" lIns="0" tIns="0" rIns="0" bIns="0" rtlCol="0" anchor="ctr"/>
+          <a:lstStyle/>
           <a:p>
             <a:pPr marL="0" indent="0">
               <a:buNone/>
@@ -10490,22 +12897,110 @@
                 <a:ea typeface="Consolas" pitchFamily="34" charset="-122"/>
                 <a:cs typeface="Consolas" pitchFamily="34" charset="-120"/>
               </a:rPr>
-              <a:t>int shadowMap</a:t>
+              <a:t>Default framebuffer → výstup na monitor.  Shadow FBO → výstup do GPU textúry.</a:t>
             </a:r>
             <a:endParaRPr lang="en-US" sz="1200" dirty="0"/>
           </a:p>
         </p:txBody>
       </p:sp>
-      <p:sp>
-        <p:nvSpPr>
-          <p:cNvPr id="11" name="Text 9"/>
-          <p:cNvSpPr/>
-          <p:nvPr/>
-        </p:nvSpPr>
-        <p:spPr>
-          <a:xfrm>
-            <a:off x="164592" y="3291840"/>
-            <a:ext cx="2194560" cy="365760"/>
+    </p:spTree>
+    <p:extLst>
+      <p:ext uri="{BB962C8B-B14F-4D97-AF65-F5344CB8AC3E}">
+        <p14:creationId xmlns:p14="http://schemas.microsoft.com/office/powerpoint/2010/main" val="1323779555"/>
+      </p:ext>
+    </p:extLst>
+  </p:cSld>
+  <p:clrMapOvr>
+    <a:masterClrMapping/>
+  </p:clrMapOvr>
+</p:sld>
+</file>
+
+<file path=ppt/slides/slide6.xml><?xml version="1.0" encoding="utf-8"?>
+<p:sld xmlns:a="http://schemas.openxmlformats.org/drawingml/2006/main" xmlns:r="http://schemas.openxmlformats.org/officeDocument/2006/relationships" xmlns:p="http://schemas.openxmlformats.org/presentationml/2006/main">
+  <p:cSld>
+    <p:bg>
+      <p:bgPr>
+        <a:solidFill>
+          <a:srgbClr val="12151A"/>
+        </a:solidFill>
+        <a:effectLst/>
+      </p:bgPr>
+    </p:bg>
+    <p:spTree>
+      <p:nvGrpSpPr>
+        <p:cNvPr id="1" name="">
+          <a:extLst>
+            <a:ext uri="{FF2B5EF4-FFF2-40B4-BE49-F238E27FC236}">
+              <a16:creationId xmlns:a16="http://schemas.microsoft.com/office/drawing/2014/main" id="{DDC80623-C9A6-37A6-BA2F-01D3EC661810}"/>
+            </a:ext>
+          </a:extLst>
+        </p:cNvPr>
+        <p:cNvGrpSpPr/>
+        <p:nvPr/>
+      </p:nvGrpSpPr>
+      <p:grpSpPr>
+        <a:xfrm>
+          <a:off x="0" y="0"/>
+          <a:ext cx="0" cy="0"/>
+          <a:chOff x="0" y="0"/>
+          <a:chExt cx="0" cy="0"/>
+        </a:xfrm>
+      </p:grpSpPr>
+      <p:sp>
+        <p:nvSpPr>
+          <p:cNvPr id="38" name="Shape 0">
+            <a:extLst>
+              <a:ext uri="{FF2B5EF4-FFF2-40B4-BE49-F238E27FC236}">
+                <a16:creationId xmlns:a16="http://schemas.microsoft.com/office/drawing/2014/main" id="{76FEB54A-E0DA-E3C2-9E5B-FB029A830FC3}"/>
+              </a:ext>
+            </a:extLst>
+          </p:cNvPr>
+          <p:cNvSpPr/>
+          <p:nvPr/>
+        </p:nvSpPr>
+        <p:spPr>
+          <a:xfrm>
+            <a:off x="0" y="0"/>
+            <a:ext cx="9144000" cy="292608"/>
+          </a:xfrm>
+          <a:prstGeom prst="rect">
+            <a:avLst/>
+          </a:prstGeom>
+          <a:solidFill>
+            <a:srgbClr val="1A1E26"/>
+          </a:solidFill>
+          <a:ln w="12700">
+            <a:solidFill>
+              <a:srgbClr val="1A1E26"/>
+            </a:solidFill>
+            <a:prstDash val="solid"/>
+          </a:ln>
+        </p:spPr>
+        <p:txBody>
+          <a:bodyPr/>
+          <a:lstStyle/>
+          <a:p>
+            <a:endParaRPr lang="ru-RU"/>
+          </a:p>
+        </p:txBody>
+      </p:sp>
+      <p:sp>
+        <p:nvSpPr>
+          <p:cNvPr id="39" name="Text 1">
+            <a:extLst>
+              <a:ext uri="{FF2B5EF4-FFF2-40B4-BE49-F238E27FC236}">
+                <a16:creationId xmlns:a16="http://schemas.microsoft.com/office/drawing/2014/main" id="{A63B43C4-C1D7-432E-D5FD-23E77D7C820F}"/>
+              </a:ext>
+            </a:extLst>
+          </p:cNvPr>
+          <p:cNvSpPr/>
+          <p:nvPr/>
+        </p:nvSpPr>
+        <p:spPr>
+          <a:xfrm>
+            <a:off x="164592" y="0"/>
+            <a:ext cx="6400800" cy="292608"/>
           </a:xfrm>
           <a:prstGeom prst="rect">
             <a:avLst/>
@@ -10517,7 +13012,7 @@
           <a:bodyPr wrap="square" lIns="0" tIns="0" rIns="0" bIns="0" rtlCol="0" anchor="ctr"/>
           <a:lstStyle/>
           <a:p>
-            <a:pPr marL="0" indent="0" algn="ctr">
+            <a:pPr marL="0" indent="0">
               <a:buNone/>
             </a:pPr>
             <a:r>
@@ -10529,7 +13024,7 @@
                 <a:ea typeface="Consolas" pitchFamily="34" charset="-122"/>
                 <a:cs typeface="Consolas" pitchFamily="34" charset="-120"/>
               </a:rPr>
-              <a:t>len handles (čísla!)</a:t>
+              <a:t>// shadery — základy</a:t>
             </a:r>
             <a:endParaRPr lang="en-US" sz="1100" dirty="0"/>
           </a:p>
@@ -10537,20 +13032,73 @@
       </p:sp>
       <p:sp>
         <p:nvSpPr>
-          <p:cNvPr id="12" name="Shape 10"/>
-          <p:cNvSpPr/>
-          <p:nvPr/>
-        </p:nvSpPr>
-        <p:spPr>
-          <a:xfrm>
-            <a:off x="2359152" y="2971800"/>
-            <a:ext cx="502920" cy="0"/>
-          </a:xfrm>
-          <a:prstGeom prst="line">
-            <a:avLst/>
-          </a:prstGeom>
-          <a:noFill/>
-          <a:ln w="25400">
+          <p:cNvPr id="40" name="Text 2">
+            <a:extLst>
+              <a:ext uri="{FF2B5EF4-FFF2-40B4-BE49-F238E27FC236}">
+                <a16:creationId xmlns:a16="http://schemas.microsoft.com/office/drawing/2014/main" id="{3F1CE360-8C1E-F51F-7F0F-E11C7D521209}"/>
+              </a:ext>
+            </a:extLst>
+          </p:cNvPr>
+          <p:cNvSpPr/>
+          <p:nvPr/>
+        </p:nvSpPr>
+        <p:spPr>
+          <a:xfrm>
+            <a:off x="7772400" y="0"/>
+            <a:ext cx="1280160" cy="292608"/>
+          </a:xfrm>
+          <a:prstGeom prst="rect">
+            <a:avLst/>
+          </a:prstGeom>
+          <a:noFill/>
+          <a:ln/>
+        </p:spPr>
+        <p:txBody>
+          <a:bodyPr wrap="square" lIns="0" tIns="0" rIns="0" bIns="0" rtlCol="0" anchor="ctr"/>
+          <a:lstStyle/>
+          <a:p>
+            <a:pPr marL="0" indent="0" algn="r">
+              <a:buNone/>
+            </a:pPr>
+            <a:r>
+              <a:rPr lang="en-US" sz="1100" dirty="0">
+                <a:solidFill>
+                  <a:srgbClr val="888888"/>
+                </a:solidFill>
+                <a:latin typeface="Consolas" pitchFamily="34" charset="0"/>
+                <a:ea typeface="Consolas" pitchFamily="34" charset="-122"/>
+                <a:cs typeface="Consolas" pitchFamily="34" charset="-120"/>
+              </a:rPr>
+              <a:t>~2 min</a:t>
+            </a:r>
+            <a:endParaRPr lang="en-US" sz="1100" dirty="0"/>
+          </a:p>
+        </p:txBody>
+      </p:sp>
+      <p:sp>
+        <p:nvSpPr>
+          <p:cNvPr id="41" name="Shape 3">
+            <a:extLst>
+              <a:ext uri="{FF2B5EF4-FFF2-40B4-BE49-F238E27FC236}">
+                <a16:creationId xmlns:a16="http://schemas.microsoft.com/office/drawing/2014/main" id="{2ABDA704-171C-3A6A-0B34-B5A17EE39F96}"/>
+              </a:ext>
+            </a:extLst>
+          </p:cNvPr>
+          <p:cNvSpPr/>
+          <p:nvPr/>
+        </p:nvSpPr>
+        <p:spPr>
+          <a:xfrm>
+            <a:off x="164592" y="402336"/>
+            <a:ext cx="1005840" cy="256032"/>
+          </a:xfrm>
+          <a:prstGeom prst="rect">
+            <a:avLst/>
+          </a:prstGeom>
+          <a:solidFill>
+            <a:srgbClr val="1A1E26"/>
+          </a:solidFill>
+          <a:ln w="12700">
             <a:solidFill>
               <a:srgbClr val="E8724A"/>
             </a:solidFill>
@@ -10567,14 +13115,20 @@
       </p:sp>
       <p:sp>
         <p:nvSpPr>
-          <p:cNvPr id="13" name="Text 11"/>
-          <p:cNvSpPr/>
-          <p:nvPr/>
-        </p:nvSpPr>
-        <p:spPr>
-          <a:xfrm>
-            <a:off x="2359152" y="2724912"/>
-            <a:ext cx="502920" cy="219456"/>
+          <p:cNvPr id="42" name="Text 4">
+            <a:extLst>
+              <a:ext uri="{FF2B5EF4-FFF2-40B4-BE49-F238E27FC236}">
+                <a16:creationId xmlns:a16="http://schemas.microsoft.com/office/drawing/2014/main" id="{1455D62F-88FF-392D-D2BC-94B471A63216}"/>
+              </a:ext>
+            </a:extLst>
+          </p:cNvPr>
+          <p:cNvSpPr/>
+          <p:nvPr/>
+        </p:nvSpPr>
+        <p:spPr>
+          <a:xfrm>
+            <a:off x="164592" y="402336"/>
+            <a:ext cx="1005840" cy="256032"/>
           </a:xfrm>
           <a:prstGeom prst="rect">
             <a:avLst/>
@@ -10590,7 +13144,7 @@
               <a:buNone/>
             </a:pPr>
             <a:r>
-              <a:rPr lang="en-US" sz="900" dirty="0">
+              <a:rPr lang="en-US" sz="1000" dirty="0">
                 <a:solidFill>
                   <a:srgbClr val="E8724A"/>
                 </a:solidFill>
@@ -10598,22 +13152,73 @@
                 <a:ea typeface="Consolas" pitchFamily="34" charset="-122"/>
                 <a:cs typeface="Consolas" pitchFamily="34" charset="-120"/>
               </a:rPr>
-              <a:t>GL calls</a:t>
-            </a:r>
-            <a:endParaRPr lang="en-US" sz="900" dirty="0"/>
-          </a:p>
-        </p:txBody>
-      </p:sp>
-      <p:sp>
-        <p:nvSpPr>
-          <p:cNvPr id="14" name="Shape 12"/>
-          <p:cNvSpPr/>
-          <p:nvPr/>
-        </p:nvSpPr>
-        <p:spPr>
-          <a:xfrm>
-            <a:off x="2862072" y="1508760"/>
-            <a:ext cx="3474720" cy="2926080"/>
+              <a:t>TEÓRIA</a:t>
+            </a:r>
+            <a:endParaRPr lang="en-US" sz="1000" dirty="0"/>
+          </a:p>
+        </p:txBody>
+      </p:sp>
+      <p:sp>
+        <p:nvSpPr>
+          <p:cNvPr id="43" name="Text 5">
+            <a:extLst>
+              <a:ext uri="{FF2B5EF4-FFF2-40B4-BE49-F238E27FC236}">
+                <a16:creationId xmlns:a16="http://schemas.microsoft.com/office/drawing/2014/main" id="{889C9535-B4AE-B17B-3F60-FA91B68AC84F}"/>
+              </a:ext>
+            </a:extLst>
+          </p:cNvPr>
+          <p:cNvSpPr/>
+          <p:nvPr/>
+        </p:nvSpPr>
+        <p:spPr>
+          <a:xfrm>
+            <a:off x="320040" y="777240"/>
+            <a:ext cx="8503920" cy="594360"/>
+          </a:xfrm>
+          <a:prstGeom prst="rect">
+            <a:avLst/>
+          </a:prstGeom>
+          <a:noFill/>
+          <a:ln/>
+        </p:spPr>
+        <p:txBody>
+          <a:bodyPr wrap="square" lIns="0" tIns="0" rIns="0" bIns="0" rtlCol="0" anchor="ctr"/>
+          <a:lstStyle/>
+          <a:p>
+            <a:pPr marL="0" indent="0">
+              <a:buNone/>
+            </a:pPr>
+            <a:r>
+              <a:rPr lang="en-US" sz="3600" b="1" dirty="0">
+                <a:solidFill>
+                  <a:srgbClr val="FFFFFF"/>
+                </a:solidFill>
+                <a:latin typeface="Calibri" pitchFamily="34" charset="0"/>
+                <a:ea typeface="Calibri" pitchFamily="34" charset="-122"/>
+                <a:cs typeface="Calibri" pitchFamily="34" charset="-120"/>
+              </a:rPr>
+              <a:t>Čo je shader?</a:t>
+            </a:r>
+            <a:endParaRPr lang="en-US" sz="3600" dirty="0"/>
+          </a:p>
+        </p:txBody>
+      </p:sp>
+      <p:sp>
+        <p:nvSpPr>
+          <p:cNvPr id="44" name="Shape 6">
+            <a:extLst>
+              <a:ext uri="{FF2B5EF4-FFF2-40B4-BE49-F238E27FC236}">
+                <a16:creationId xmlns:a16="http://schemas.microsoft.com/office/drawing/2014/main" id="{0D667DC5-CA84-46BC-890A-1276708AB816}"/>
+              </a:ext>
+            </a:extLst>
+          </p:cNvPr>
+          <p:cNvSpPr/>
+          <p:nvPr/>
+        </p:nvSpPr>
+        <p:spPr>
+          <a:xfrm>
+            <a:off x="164592" y="1481328"/>
+            <a:ext cx="8814816" cy="804672"/>
           </a:xfrm>
           <a:prstGeom prst="rect">
             <a:avLst/>
@@ -10638,14 +13243,20 @@
       </p:sp>
       <p:sp>
         <p:nvSpPr>
-          <p:cNvPr id="15" name="Text 13"/>
-          <p:cNvSpPr/>
-          <p:nvPr/>
-        </p:nvSpPr>
-        <p:spPr>
-          <a:xfrm>
-            <a:off x="2862072" y="1600200"/>
-            <a:ext cx="3474720" cy="274320"/>
+          <p:cNvPr id="45" name="Text 7">
+            <a:extLst>
+              <a:ext uri="{FF2B5EF4-FFF2-40B4-BE49-F238E27FC236}">
+                <a16:creationId xmlns:a16="http://schemas.microsoft.com/office/drawing/2014/main" id="{CEDC5015-E427-089A-187B-C3C8788C48A8}"/>
+              </a:ext>
+            </a:extLst>
+          </p:cNvPr>
+          <p:cNvSpPr/>
+          <p:nvPr/>
+        </p:nvSpPr>
+        <p:spPr>
+          <a:xfrm>
+            <a:off x="292608" y="1572768"/>
+            <a:ext cx="8558784" cy="292608"/>
           </a:xfrm>
           <a:prstGeom prst="rect">
             <a:avLst/>
@@ -10657,7 +13268,7 @@
           <a:bodyPr wrap="square" lIns="0" tIns="0" rIns="0" bIns="0" rtlCol="0" anchor="ctr"/>
           <a:lstStyle/>
           <a:p>
-            <a:pPr marL="0" indent="0" algn="ctr">
+            <a:pPr marL="0" indent="0">
               <a:buNone/>
             </a:pPr>
             <a:r>
@@ -10669,7 +13280,7 @@
                 <a:ea typeface="Consolas" pitchFamily="34" charset="-122"/>
                 <a:cs typeface="Consolas" pitchFamily="34" charset="-120"/>
               </a:rPr>
-              <a:t>GPU pamäť (VRAM)</a:t>
+              <a:t>Definícia</a:t>
             </a:r>
             <a:endParaRPr lang="en-US" sz="1300" dirty="0"/>
           </a:p>
@@ -10677,20 +13288,71 @@
       </p:sp>
       <p:sp>
         <p:nvSpPr>
-          <p:cNvPr id="16" name="Shape 14"/>
-          <p:cNvSpPr/>
-          <p:nvPr/>
-        </p:nvSpPr>
-        <p:spPr>
-          <a:xfrm>
-            <a:off x="3017520" y="2011680"/>
-            <a:ext cx="3163824" cy="640080"/>
+          <p:cNvPr id="46" name="Text 8">
+            <a:extLst>
+              <a:ext uri="{FF2B5EF4-FFF2-40B4-BE49-F238E27FC236}">
+                <a16:creationId xmlns:a16="http://schemas.microsoft.com/office/drawing/2014/main" id="{7BE045C9-3937-AA79-C8A4-EC2727B8A14E}"/>
+              </a:ext>
+            </a:extLst>
+          </p:cNvPr>
+          <p:cNvSpPr/>
+          <p:nvPr/>
+        </p:nvSpPr>
+        <p:spPr>
+          <a:xfrm>
+            <a:off x="292608" y="1901952"/>
+            <a:ext cx="8558784" cy="310896"/>
+          </a:xfrm>
+          <a:prstGeom prst="rect">
+            <a:avLst/>
+          </a:prstGeom>
+          <a:noFill/>
+          <a:ln/>
+        </p:spPr>
+        <p:txBody>
+          <a:bodyPr wrap="square" lIns="0" tIns="0" rIns="0" bIns="0" rtlCol="0" anchor="t"/>
+          <a:lstStyle/>
+          <a:p>
+            <a:pPr marL="0" indent="0">
+              <a:buNone/>
+            </a:pPr>
+            <a:r>
+              <a:rPr lang="en-US" sz="1200" dirty="0">
+                <a:solidFill>
+                  <a:srgbClr val="CCCCCC"/>
+                </a:solidFill>
+                <a:latin typeface="Consolas" pitchFamily="34" charset="0"/>
+                <a:ea typeface="Consolas" pitchFamily="34" charset="-122"/>
+                <a:cs typeface="Consolas" pitchFamily="34" charset="-120"/>
+              </a:rPr>
+              <a:t>Shader je malý program ktorý beží priamo na GPU — nie na CPU. Píše sa v jazyku GLSL.</a:t>
+            </a:r>
+            <a:endParaRPr lang="en-US" sz="1200" dirty="0"/>
+          </a:p>
+        </p:txBody>
+      </p:sp>
+      <p:sp>
+        <p:nvSpPr>
+          <p:cNvPr id="47" name="Shape 9">
+            <a:extLst>
+              <a:ext uri="{FF2B5EF4-FFF2-40B4-BE49-F238E27FC236}">
+                <a16:creationId xmlns:a16="http://schemas.microsoft.com/office/drawing/2014/main" id="{C56BB60B-B756-6356-5640-AF155D443F56}"/>
+              </a:ext>
+            </a:extLst>
+          </p:cNvPr>
+          <p:cNvSpPr/>
+          <p:nvPr/>
+        </p:nvSpPr>
+        <p:spPr>
+          <a:xfrm>
+            <a:off x="164592" y="2395728"/>
+            <a:ext cx="4297680" cy="1938528"/>
           </a:xfrm>
           <a:prstGeom prst="rect">
             <a:avLst/>
           </a:prstGeom>
           <a:solidFill>
-            <a:srgbClr val="252B3A"/>
+            <a:srgbClr val="1E2330"/>
           </a:solidFill>
           <a:ln w="12700">
             <a:solidFill>
@@ -10709,14 +13371,20 @@
       </p:sp>
       <p:sp>
         <p:nvSpPr>
-          <p:cNvPr id="17" name="Text 15"/>
-          <p:cNvSpPr/>
-          <p:nvPr/>
-        </p:nvSpPr>
-        <p:spPr>
-          <a:xfrm>
-            <a:off x="3017520" y="2011680"/>
-            <a:ext cx="3163824" cy="640080"/>
+          <p:cNvPr id="48" name="Text 10">
+            <a:extLst>
+              <a:ext uri="{FF2B5EF4-FFF2-40B4-BE49-F238E27FC236}">
+                <a16:creationId xmlns:a16="http://schemas.microsoft.com/office/drawing/2014/main" id="{BA75CFB1-5FAD-934E-E351-24362E28A0FC}"/>
+              </a:ext>
+            </a:extLst>
+          </p:cNvPr>
+          <p:cNvSpPr/>
+          <p:nvPr/>
+        </p:nvSpPr>
+        <p:spPr>
+          <a:xfrm>
+            <a:off x="292608" y="2487168"/>
+            <a:ext cx="4041648" cy="292608"/>
           </a:xfrm>
           <a:prstGeom prst="rect">
             <a:avLst/>
@@ -10728,7 +13396,7 @@
           <a:bodyPr wrap="square" lIns="0" tIns="0" rIns="0" bIns="0" rtlCol="0" anchor="ctr"/>
           <a:lstStyle/>
           <a:p>
-            <a:pPr marL="0" indent="0" algn="ctr">
+            <a:pPr marL="0" indent="0">
               <a:buNone/>
             </a:pPr>
             <a:r>
@@ -10740,7 +13408,7 @@
                 <a:ea typeface="Consolas" pitchFamily="34" charset="-122"/>
                 <a:cs typeface="Consolas" pitchFamily="34" charset="-120"/>
               </a:rPr>
-              <a:t>FBO</a:t>
+              <a:t>Vertex shader</a:t>
             </a:r>
             <a:endParaRPr lang="en-US" sz="1300" dirty="0"/>
           </a:p>
@@ -10748,89 +13416,134 @@
       </p:sp>
       <p:sp>
         <p:nvSpPr>
-          <p:cNvPr id="18" name="Shape 16"/>
-          <p:cNvSpPr/>
-          <p:nvPr/>
-        </p:nvSpPr>
-        <p:spPr>
-          <a:xfrm>
-            <a:off x="4599432" y="2651760"/>
-            <a:ext cx="0" cy="256032"/>
-          </a:xfrm>
-          <a:prstGeom prst="line">
-            <a:avLst/>
-          </a:prstGeom>
-          <a:noFill/>
-          <a:ln w="12700">
-            <a:solidFill>
-              <a:srgbClr val="4AC8E8"/>
-            </a:solidFill>
-            <a:prstDash val="solid"/>
-          </a:ln>
-        </p:spPr>
-        <p:txBody>
-          <a:bodyPr/>
-          <a:lstStyle/>
-          <a:p>
-            <a:endParaRPr lang="ru-RU"/>
-          </a:p>
-        </p:txBody>
-      </p:sp>
-      <p:sp>
-        <p:nvSpPr>
-          <p:cNvPr id="19" name="Text 17"/>
-          <p:cNvSpPr/>
-          <p:nvPr/>
-        </p:nvSpPr>
-        <p:spPr>
-          <a:xfrm>
-            <a:off x="3017520" y="2743200"/>
-            <a:ext cx="3163824" cy="219456"/>
-          </a:xfrm>
-          <a:prstGeom prst="rect">
-            <a:avLst/>
-          </a:prstGeom>
-          <a:noFill/>
-          <a:ln/>
-        </p:spPr>
-        <p:txBody>
-          <a:bodyPr wrap="square" lIns="0" tIns="0" rIns="0" bIns="0" rtlCol="0" anchor="ctr"/>
-          <a:lstStyle/>
-          <a:p>
-            <a:pPr marL="0" indent="0" algn="ctr">
-              <a:buNone/>
-            </a:pPr>
-            <a:r>
-              <a:rPr lang="en-US" sz="900" dirty="0">
-                <a:solidFill>
-                  <a:srgbClr val="4AC8E8"/>
-                </a:solidFill>
-                <a:latin typeface="Consolas" pitchFamily="34" charset="0"/>
-                <a:ea typeface="Consolas" pitchFamily="34" charset="-122"/>
-                <a:cs typeface="Consolas" pitchFamily="34" charset="-120"/>
-              </a:rPr>
-              <a:t>GL_DEPTH_ATTACHMENT</a:t>
-            </a:r>
-            <a:endParaRPr lang="en-US" sz="900" dirty="0"/>
-          </a:p>
-        </p:txBody>
-      </p:sp>
-      <p:sp>
-        <p:nvSpPr>
-          <p:cNvPr id="20" name="Shape 18"/>
-          <p:cNvSpPr/>
-          <p:nvPr/>
-        </p:nvSpPr>
-        <p:spPr>
-          <a:xfrm>
-            <a:off x="3017520" y="2999232"/>
-            <a:ext cx="3163824" cy="822960"/>
+          <p:cNvPr id="49" name="Text 11">
+            <a:extLst>
+              <a:ext uri="{FF2B5EF4-FFF2-40B4-BE49-F238E27FC236}">
+                <a16:creationId xmlns:a16="http://schemas.microsoft.com/office/drawing/2014/main" id="{8E3CC2D3-5C6C-D7F9-E9B4-351110E03AE1}"/>
+              </a:ext>
+            </a:extLst>
+          </p:cNvPr>
+          <p:cNvSpPr/>
+          <p:nvPr/>
+        </p:nvSpPr>
+        <p:spPr>
+          <a:xfrm>
+            <a:off x="292608" y="2816352"/>
+            <a:ext cx="4041648" cy="1444752"/>
+          </a:xfrm>
+          <a:prstGeom prst="rect">
+            <a:avLst/>
+          </a:prstGeom>
+          <a:noFill/>
+          <a:ln/>
+        </p:spPr>
+        <p:txBody>
+          <a:bodyPr wrap="square" lIns="0" tIns="0" rIns="0" bIns="0" rtlCol="0" anchor="t"/>
+          <a:lstStyle/>
+          <a:p>
+            <a:pPr marL="0" indent="0">
+              <a:buNone/>
+            </a:pPr>
+            <a:r>
+              <a:rPr lang="en-US" sz="1200" dirty="0">
+                <a:solidFill>
+                  <a:srgbClr val="CCCCCC"/>
+                </a:solidFill>
+                <a:latin typeface="Consolas" pitchFamily="34" charset="0"/>
+                <a:ea typeface="Consolas" pitchFamily="34" charset="-122"/>
+                <a:cs typeface="Consolas" pitchFamily="34" charset="-120"/>
+              </a:rPr>
+              <a:t>Beží raz pre každý vrchol (vertex).</a:t>
+            </a:r>
+            <a:endParaRPr lang="en-US" sz="1200" dirty="0"/>
+          </a:p>
+          <a:p>
+            <a:pPr marL="0" indent="0">
+              <a:buNone/>
+            </a:pPr>
+            <a:endParaRPr lang="en-US" sz="1200" dirty="0"/>
+          </a:p>
+          <a:p>
+            <a:pPr marL="0" indent="0">
+              <a:buNone/>
+            </a:pPr>
+            <a:r>
+              <a:rPr lang="en-US" sz="1200" dirty="0">
+                <a:solidFill>
+                  <a:srgbClr val="CCCCCC"/>
+                </a:solidFill>
+                <a:latin typeface="Consolas" pitchFamily="34" charset="0"/>
+                <a:ea typeface="Consolas" pitchFamily="34" charset="-122"/>
+                <a:cs typeface="Consolas" pitchFamily="34" charset="-120"/>
+              </a:rPr>
+              <a:t>Vstup: pozicia vrcholu v 3D priestore.</a:t>
+            </a:r>
+            <a:endParaRPr lang="en-US" sz="1200" dirty="0"/>
+          </a:p>
+          <a:p>
+            <a:pPr marL="0" indent="0">
+              <a:buNone/>
+            </a:pPr>
+            <a:r>
+              <a:rPr lang="en-US" sz="1200" dirty="0">
+                <a:solidFill>
+                  <a:srgbClr val="CCCCCC"/>
+                </a:solidFill>
+                <a:latin typeface="Consolas" pitchFamily="34" charset="0"/>
+                <a:ea typeface="Consolas" pitchFamily="34" charset="-122"/>
+                <a:cs typeface="Consolas" pitchFamily="34" charset="-120"/>
+              </a:rPr>
+              <a:t>Výstup: kde je vrchol na obrazovke.</a:t>
+            </a:r>
+            <a:endParaRPr lang="en-US" sz="1200" dirty="0"/>
+          </a:p>
+          <a:p>
+            <a:pPr marL="0" indent="0">
+              <a:buNone/>
+            </a:pPr>
+            <a:endParaRPr lang="en-US" sz="1200" dirty="0"/>
+          </a:p>
+          <a:p>
+            <a:pPr marL="0" indent="0">
+              <a:buNone/>
+            </a:pPr>
+            <a:r>
+              <a:rPr lang="en-US" sz="1200" dirty="0">
+                <a:solidFill>
+                  <a:srgbClr val="CCCCCC"/>
+                </a:solidFill>
+                <a:latin typeface="Consolas" pitchFamily="34" charset="0"/>
+                <a:ea typeface="Consolas" pitchFamily="34" charset="-122"/>
+                <a:cs typeface="Consolas" pitchFamily="34" charset="-120"/>
+              </a:rPr>
+              <a:t>Hlavná práca: násobi maticami.</a:t>
+            </a:r>
+            <a:endParaRPr lang="en-US" sz="1200" dirty="0"/>
+          </a:p>
+        </p:txBody>
+      </p:sp>
+      <p:sp>
+        <p:nvSpPr>
+          <p:cNvPr id="50" name="Shape 12">
+            <a:extLst>
+              <a:ext uri="{FF2B5EF4-FFF2-40B4-BE49-F238E27FC236}">
+                <a16:creationId xmlns:a16="http://schemas.microsoft.com/office/drawing/2014/main" id="{A5860914-7541-9EEE-8BF2-24C7E7B66B49}"/>
+              </a:ext>
+            </a:extLst>
+          </p:cNvPr>
+          <p:cNvSpPr/>
+          <p:nvPr/>
+        </p:nvSpPr>
+        <p:spPr>
+          <a:xfrm>
+            <a:off x="4663440" y="2395728"/>
+            <a:ext cx="4315968" cy="1938528"/>
           </a:xfrm>
           <a:prstGeom prst="rect">
             <a:avLst/>
           </a:prstGeom>
           <a:solidFill>
-            <a:srgbClr val="252B3A"/>
+            <a:srgbClr val="1E2330"/>
           </a:solidFill>
           <a:ln w="12700">
             <a:solidFill>
@@ -10849,14 +13562,20 @@
       </p:sp>
       <p:sp>
         <p:nvSpPr>
-          <p:cNvPr id="21" name="Text 19"/>
-          <p:cNvSpPr/>
-          <p:nvPr/>
-        </p:nvSpPr>
-        <p:spPr>
-          <a:xfrm>
-            <a:off x="3017520" y="2999232"/>
-            <a:ext cx="3163824" cy="822960"/>
+          <p:cNvPr id="51" name="Text 13">
+            <a:extLst>
+              <a:ext uri="{FF2B5EF4-FFF2-40B4-BE49-F238E27FC236}">
+                <a16:creationId xmlns:a16="http://schemas.microsoft.com/office/drawing/2014/main" id="{42B38E64-7E1A-B447-A5CC-A0A7EC2FF0BC}"/>
+              </a:ext>
+            </a:extLst>
+          </p:cNvPr>
+          <p:cNvSpPr/>
+          <p:nvPr/>
+        </p:nvSpPr>
+        <p:spPr>
+          <a:xfrm>
+            <a:off x="4791456" y="2487168"/>
+            <a:ext cx="4059936" cy="292608"/>
           </a:xfrm>
           <a:prstGeom prst="rect">
             <a:avLst/>
@@ -10868,201 +13587,90 @@
           <a:bodyPr wrap="square" lIns="0" tIns="0" rIns="0" bIns="0" rtlCol="0" anchor="ctr"/>
           <a:lstStyle/>
           <a:p>
-            <a:pPr marL="0" indent="0" algn="ctr">
+            <a:pPr marL="0" indent="0">
+              <a:buNone/>
+            </a:pPr>
+            <a:r>
+              <a:rPr lang="en-US" sz="1300" b="1" dirty="0">
+                <a:solidFill>
+                  <a:srgbClr val="4AC8E8"/>
+                </a:solidFill>
+                <a:latin typeface="Consolas" pitchFamily="34" charset="0"/>
+                <a:ea typeface="Consolas" pitchFamily="34" charset="-122"/>
+                <a:cs typeface="Consolas" pitchFamily="34" charset="-120"/>
+              </a:rPr>
+              <a:t>Fragment shader</a:t>
+            </a:r>
+            <a:endParaRPr lang="en-US" sz="1300" dirty="0"/>
+          </a:p>
+        </p:txBody>
+      </p:sp>
+      <p:sp>
+        <p:nvSpPr>
+          <p:cNvPr id="52" name="Text 14">
+            <a:extLst>
+              <a:ext uri="{FF2B5EF4-FFF2-40B4-BE49-F238E27FC236}">
+                <a16:creationId xmlns:a16="http://schemas.microsoft.com/office/drawing/2014/main" id="{D8E5D41C-971E-FAD6-E080-120916D9E236}"/>
+              </a:ext>
+            </a:extLst>
+          </p:cNvPr>
+          <p:cNvSpPr/>
+          <p:nvPr/>
+        </p:nvSpPr>
+        <p:spPr>
+          <a:xfrm>
+            <a:off x="4791456" y="2816352"/>
+            <a:ext cx="4059936" cy="1444752"/>
+          </a:xfrm>
+          <a:prstGeom prst="rect">
+            <a:avLst/>
+          </a:prstGeom>
+          <a:noFill/>
+          <a:ln/>
+        </p:spPr>
+        <p:txBody>
+          <a:bodyPr wrap="square" lIns="0" tIns="0" rIns="0" bIns="0" rtlCol="0" anchor="t"/>
+          <a:lstStyle/>
+          <a:p>
+            <a:pPr marL="0" indent="0">
               <a:buNone/>
             </a:pPr>
             <a:r>
               <a:rPr lang="en-US" sz="1200" dirty="0">
                 <a:solidFill>
-                  <a:srgbClr val="4AC8E8"/>
-                </a:solidFill>
-                <a:latin typeface="Consolas" pitchFamily="34" charset="0"/>
-                <a:ea typeface="Consolas" pitchFamily="34" charset="-122"/>
-                <a:cs typeface="Consolas" pitchFamily="34" charset="-120"/>
-              </a:rPr>
-              <a:t>Depth Texture</a:t>
+                  <a:srgbClr val="CCCCCC"/>
+                </a:solidFill>
+                <a:latin typeface="Consolas" pitchFamily="34" charset="0"/>
+                <a:ea typeface="Consolas" pitchFamily="34" charset="-122"/>
+                <a:cs typeface="Consolas" pitchFamily="34" charset="-120"/>
+              </a:rPr>
+              <a:t>Beží raz pre každý pixel výsledku.</a:t>
             </a:r>
             <a:endParaRPr lang="en-US" sz="1200" dirty="0"/>
           </a:p>
           <a:p>
-            <a:pPr marL="0" indent="0" algn="ctr">
+            <a:pPr marL="0" indent="0">
+              <a:buNone/>
+            </a:pPr>
+            <a:endParaRPr lang="en-US" sz="1200" dirty="0"/>
+          </a:p>
+          <a:p>
+            <a:pPr marL="0" indent="0">
               <a:buNone/>
             </a:pPr>
             <a:r>
               <a:rPr lang="en-US" sz="1200" dirty="0">
                 <a:solidFill>
-                  <a:srgbClr val="4AC8E8"/>
-                </a:solidFill>
-                <a:latin typeface="Consolas" pitchFamily="34" charset="0"/>
-                <a:ea typeface="Consolas" pitchFamily="34" charset="-122"/>
-                <a:cs typeface="Consolas" pitchFamily="34" charset="-120"/>
-              </a:rPr>
-              <a:t>1024 × 1024 × float32</a:t>
+                  <a:srgbClr val="CCCCCC"/>
+                </a:solidFill>
+                <a:latin typeface="Consolas" pitchFamily="34" charset="0"/>
+                <a:ea typeface="Consolas" pitchFamily="34" charset="-122"/>
+                <a:cs typeface="Consolas" pitchFamily="34" charset="-120"/>
+              </a:rPr>
+              <a:t>Vstup: interpoované dáta z vertex shadera.</a:t>
             </a:r>
             <a:endParaRPr lang="en-US" sz="1200" dirty="0"/>
           </a:p>
-        </p:txBody>
-      </p:sp>
-      <p:sp>
-        <p:nvSpPr>
-          <p:cNvPr id="22" name="Shape 20"/>
-          <p:cNvSpPr/>
-          <p:nvPr/>
-        </p:nvSpPr>
-        <p:spPr>
-          <a:xfrm>
-            <a:off x="6336792" y="2971800"/>
-            <a:ext cx="457200" cy="0"/>
-          </a:xfrm>
-          <a:prstGeom prst="line">
-            <a:avLst/>
-          </a:prstGeom>
-          <a:noFill/>
-          <a:ln w="25400">
-            <a:solidFill>
-              <a:srgbClr val="888888"/>
-            </a:solidFill>
-            <a:prstDash val="solid"/>
-          </a:ln>
-        </p:spPr>
-        <p:txBody>
-          <a:bodyPr/>
-          <a:lstStyle/>
-          <a:p>
-            <a:endParaRPr lang="ru-RU"/>
-          </a:p>
-        </p:txBody>
-      </p:sp>
-      <p:sp>
-        <p:nvSpPr>
-          <p:cNvPr id="23" name="Text 21"/>
-          <p:cNvSpPr/>
-          <p:nvPr/>
-        </p:nvSpPr>
-        <p:spPr>
-          <a:xfrm>
-            <a:off x="6336792" y="2724912"/>
-            <a:ext cx="457200" cy="219456"/>
-          </a:xfrm>
-          <a:prstGeom prst="rect">
-            <a:avLst/>
-          </a:prstGeom>
-          <a:noFill/>
-          <a:ln/>
-        </p:spPr>
-        <p:txBody>
-          <a:bodyPr wrap="square" lIns="0" tIns="0" rIns="0" bIns="0" rtlCol="0" anchor="ctr"/>
-          <a:lstStyle/>
-          <a:p>
-            <a:pPr marL="0" indent="0" algn="ctr">
-              <a:buNone/>
-            </a:pPr>
-            <a:r>
-              <a:rPr lang="en-US" sz="900" dirty="0">
-                <a:solidFill>
-                  <a:srgbClr val="888888"/>
-                </a:solidFill>
-                <a:latin typeface="Consolas" pitchFamily="34" charset="0"/>
-                <a:ea typeface="Consolas" pitchFamily="34" charset="-122"/>
-                <a:cs typeface="Consolas" pitchFamily="34" charset="-120"/>
-              </a:rPr>
-              <a:t>frame</a:t>
-            </a:r>
-            <a:endParaRPr lang="en-US" sz="900" dirty="0"/>
-          </a:p>
-        </p:txBody>
-      </p:sp>
-      <p:sp>
-        <p:nvSpPr>
-          <p:cNvPr id="24" name="Shape 22"/>
-          <p:cNvSpPr/>
-          <p:nvPr/>
-        </p:nvSpPr>
-        <p:spPr>
-          <a:xfrm>
-            <a:off x="6793992" y="1508760"/>
-            <a:ext cx="2185416" cy="2926080"/>
-          </a:xfrm>
-          <a:prstGeom prst="rect">
-            <a:avLst/>
-          </a:prstGeom>
-          <a:solidFill>
-            <a:srgbClr val="1E2330"/>
-          </a:solidFill>
-          <a:ln w="12700">
-            <a:solidFill>
-              <a:srgbClr val="888888"/>
-            </a:solidFill>
-            <a:prstDash val="solid"/>
-          </a:ln>
-        </p:spPr>
-        <p:txBody>
-          <a:bodyPr/>
-          <a:lstStyle/>
-          <a:p>
-            <a:endParaRPr lang="ru-RU"/>
-          </a:p>
-        </p:txBody>
-      </p:sp>
-      <p:sp>
-        <p:nvSpPr>
-          <p:cNvPr id="25" name="Text 23"/>
-          <p:cNvSpPr/>
-          <p:nvPr/>
-        </p:nvSpPr>
-        <p:spPr>
-          <a:xfrm>
-            <a:off x="6793992" y="1600200"/>
-            <a:ext cx="2185416" cy="274320"/>
-          </a:xfrm>
-          <a:prstGeom prst="rect">
-            <a:avLst/>
-          </a:prstGeom>
-          <a:noFill/>
-          <a:ln/>
-        </p:spPr>
-        <p:txBody>
-          <a:bodyPr wrap="square" lIns="0" tIns="0" rIns="0" bIns="0" rtlCol="0" anchor="ctr"/>
-          <a:lstStyle/>
-          <a:p>
-            <a:pPr marL="0" indent="0" algn="ctr">
-              <a:buNone/>
-            </a:pPr>
-            <a:r>
-              <a:rPr lang="en-US" sz="1300" b="1" dirty="0">
-                <a:solidFill>
-                  <a:srgbClr val="888888"/>
-                </a:solidFill>
-                <a:latin typeface="Consolas" pitchFamily="34" charset="0"/>
-                <a:ea typeface="Consolas" pitchFamily="34" charset="-122"/>
-                <a:cs typeface="Consolas" pitchFamily="34" charset="-120"/>
-              </a:rPr>
-              <a:t>Default FBO</a:t>
-            </a:r>
-            <a:endParaRPr lang="en-US" sz="1300" dirty="0"/>
-          </a:p>
-        </p:txBody>
-      </p:sp>
-      <p:sp>
-        <p:nvSpPr>
-          <p:cNvPr id="26" name="Text 24"/>
-          <p:cNvSpPr/>
-          <p:nvPr/>
-        </p:nvSpPr>
-        <p:spPr>
-          <a:xfrm>
-            <a:off x="6903720" y="1965960"/>
-            <a:ext cx="1920240" cy="1463040"/>
-          </a:xfrm>
-          <a:prstGeom prst="rect">
-            <a:avLst/>
-          </a:prstGeom>
-          <a:noFill/>
-          <a:ln/>
-        </p:spPr>
-        <p:txBody>
-          <a:bodyPr wrap="square" lIns="0" tIns="0" rIns="0" bIns="0" rtlCol="0" anchor="ctr"/>
-          <a:lstStyle/>
           <a:p>
             <a:pPr marL="0" indent="0">
               <a:buNone/>
@@ -11076,7 +13684,7 @@
                 <a:ea typeface="Consolas" pitchFamily="34" charset="-122"/>
                 <a:cs typeface="Consolas" pitchFamily="34" charset="-120"/>
               </a:rPr>
-              <a:t>Color buffer</a:t>
+              <a:t>Výstup: farba tohto pixelu.</a:t>
             </a:r>
             <a:endParaRPr lang="en-US" sz="1200" dirty="0"/>
           </a:p>
@@ -11084,6 +13692,12 @@
             <a:pPr marL="0" indent="0">
               <a:buNone/>
             </a:pPr>
+            <a:endParaRPr lang="en-US" sz="1200" dirty="0"/>
+          </a:p>
+          <a:p>
+            <a:pPr marL="0" indent="0">
+              <a:buNone/>
+            </a:pPr>
             <a:r>
               <a:rPr lang="en-US" sz="1200" dirty="0">
                 <a:solidFill>
@@ -11093,49 +13707,21 @@
                 <a:ea typeface="Consolas" pitchFamily="34" charset="-122"/>
                 <a:cs typeface="Consolas" pitchFamily="34" charset="-120"/>
               </a:rPr>
-              <a:t>Depth buffer</a:t>
+              <a:t>Hlavná práca: počítať osvetlenie.</a:t>
             </a:r>
             <a:endParaRPr lang="en-US" sz="1200" dirty="0"/>
           </a:p>
-          <a:p>
-            <a:pPr marL="0" indent="0">
-              <a:buNone/>
-            </a:pPr>
-            <a:r>
-              <a:rPr lang="en-US" sz="1200" dirty="0">
-                <a:solidFill>
-                  <a:srgbClr val="CCCCCC"/>
-                </a:solidFill>
-                <a:latin typeface="Consolas" pitchFamily="34" charset="0"/>
-                <a:ea typeface="Consolas" pitchFamily="34" charset="-122"/>
-                <a:cs typeface="Consolas" pitchFamily="34" charset="-120"/>
-              </a:rPr>
-              <a:t>─────────────</a:t>
-            </a:r>
-            <a:endParaRPr lang="en-US" sz="1200" dirty="0"/>
-          </a:p>
-          <a:p>
-            <a:pPr marL="0" indent="0">
-              <a:buNone/>
-            </a:pPr>
-            <a:r>
-              <a:rPr lang="en-US" sz="1200" dirty="0">
-                <a:solidFill>
-                  <a:srgbClr val="CCCCCC"/>
-                </a:solidFill>
-                <a:latin typeface="Consolas" pitchFamily="34" charset="0"/>
-                <a:ea typeface="Consolas" pitchFamily="34" charset="-122"/>
-                <a:cs typeface="Consolas" pitchFamily="34" charset="-120"/>
-              </a:rPr>
-              <a:t>→ monitor</a:t>
-            </a:r>
-            <a:endParaRPr lang="en-US" sz="1200" dirty="0"/>
-          </a:p>
-        </p:txBody>
-      </p:sp>
-      <p:sp>
-        <p:nvSpPr>
-          <p:cNvPr id="27" name="Shape 25"/>
+        </p:txBody>
+      </p:sp>
+      <p:sp>
+        <p:nvSpPr>
+          <p:cNvPr id="53" name="Shape 15">
+            <a:extLst>
+              <a:ext uri="{FF2B5EF4-FFF2-40B4-BE49-F238E27FC236}">
+                <a16:creationId xmlns:a16="http://schemas.microsoft.com/office/drawing/2014/main" id="{8A2657D8-ADE9-7D58-81E0-2FF7913666E1}"/>
+              </a:ext>
+            </a:extLst>
+          </p:cNvPr>
           <p:cNvSpPr/>
           <p:nvPr/>
         </p:nvSpPr>
@@ -11167,7 +13753,13 @@
       </p:sp>
       <p:sp>
         <p:nvSpPr>
-          <p:cNvPr id="28" name="Text 26"/>
+          <p:cNvPr id="54" name="Text 16">
+            <a:extLst>
+              <a:ext uri="{FF2B5EF4-FFF2-40B4-BE49-F238E27FC236}">
+                <a16:creationId xmlns:a16="http://schemas.microsoft.com/office/drawing/2014/main" id="{7541A0F1-0CFF-FB17-ABB5-D837469668BE}"/>
+              </a:ext>
+            </a:extLst>
+          </p:cNvPr>
           <p:cNvSpPr/>
           <p:nvPr/>
         </p:nvSpPr>
@@ -11198,13 +13790,18 @@
                 <a:ea typeface="Consolas" pitchFamily="34" charset="-122"/>
                 <a:cs typeface="Consolas" pitchFamily="34" charset="-120"/>
               </a:rPr>
-              <a:t>FBO = presmerujeme render do textúry namiesto na monitor. Handle je len číslo — dáta sú na GPU.</a:t>
+              <a:t>GPU spustí vertex shader pre každý vrchol, potom fragment shader pre každý pixel medzi nimi.</a:t>
             </a:r>
             <a:endParaRPr lang="en-US" sz="1200" dirty="0"/>
           </a:p>
         </p:txBody>
       </p:sp>
     </p:spTree>
+    <p:extLst>
+      <p:ext uri="{BB962C8B-B14F-4D97-AF65-F5344CB8AC3E}">
+        <p14:creationId xmlns:p14="http://schemas.microsoft.com/office/powerpoint/2010/main" val="4032037067"/>
+      </p:ext>
+    </p:extLst>
   </p:cSld>
   <p:clrMapOvr>
     <a:masterClrMapping/>
@@ -11212,7 +13809,1200 @@
 </p:sld>
 </file>
 
-<file path=ppt/slides/slide6.xml><?xml version="1.0" encoding="utf-8"?>
+<file path=ppt/slides/slide7.xml><?xml version="1.0" encoding="utf-8"?>
+<p:sld xmlns:a="http://schemas.openxmlformats.org/drawingml/2006/main" xmlns:r="http://schemas.openxmlformats.org/officeDocument/2006/relationships" xmlns:p="http://schemas.openxmlformats.org/presentationml/2006/main">
+  <p:cSld>
+    <p:bg>
+      <p:bgPr>
+        <a:solidFill>
+          <a:srgbClr val="12151A"/>
+        </a:solidFill>
+        <a:effectLst/>
+      </p:bgPr>
+    </p:bg>
+    <p:spTree>
+      <p:nvGrpSpPr>
+        <p:cNvPr id="1" name="">
+          <a:extLst>
+            <a:ext uri="{FF2B5EF4-FFF2-40B4-BE49-F238E27FC236}">
+              <a16:creationId xmlns:a16="http://schemas.microsoft.com/office/drawing/2014/main" id="{C3E15612-8080-0842-446F-D2133263D426}"/>
+            </a:ext>
+          </a:extLst>
+        </p:cNvPr>
+        <p:cNvGrpSpPr/>
+        <p:nvPr/>
+      </p:nvGrpSpPr>
+      <p:grpSpPr>
+        <a:xfrm>
+          <a:off x="0" y="0"/>
+          <a:ext cx="0" cy="0"/>
+          <a:chOff x="0" y="0"/>
+          <a:chExt cx="0" cy="0"/>
+        </a:xfrm>
+      </p:grpSpPr>
+      <p:sp>
+        <p:nvSpPr>
+          <p:cNvPr id="21" name="Shape 0">
+            <a:extLst>
+              <a:ext uri="{FF2B5EF4-FFF2-40B4-BE49-F238E27FC236}">
+                <a16:creationId xmlns:a16="http://schemas.microsoft.com/office/drawing/2014/main" id="{5CC474F1-ABA3-4C56-D61D-4A636099CF46}"/>
+              </a:ext>
+            </a:extLst>
+          </p:cNvPr>
+          <p:cNvSpPr/>
+          <p:nvPr/>
+        </p:nvSpPr>
+        <p:spPr>
+          <a:xfrm>
+            <a:off x="0" y="0"/>
+            <a:ext cx="9144000" cy="292608"/>
+          </a:xfrm>
+          <a:prstGeom prst="rect">
+            <a:avLst/>
+          </a:prstGeom>
+          <a:solidFill>
+            <a:srgbClr val="1A1E26"/>
+          </a:solidFill>
+          <a:ln w="12700">
+            <a:solidFill>
+              <a:srgbClr val="1A1E26"/>
+            </a:solidFill>
+            <a:prstDash val="solid"/>
+          </a:ln>
+        </p:spPr>
+        <p:txBody>
+          <a:bodyPr/>
+          <a:lstStyle/>
+          <a:p>
+            <a:endParaRPr lang="ru-RU"/>
+          </a:p>
+        </p:txBody>
+      </p:sp>
+      <p:sp>
+        <p:nvSpPr>
+          <p:cNvPr id="22" name="Text 1">
+            <a:extLst>
+              <a:ext uri="{FF2B5EF4-FFF2-40B4-BE49-F238E27FC236}">
+                <a16:creationId xmlns:a16="http://schemas.microsoft.com/office/drawing/2014/main" id="{AB66B9B7-9D03-523E-0ED4-5166E8A8A67E}"/>
+              </a:ext>
+            </a:extLst>
+          </p:cNvPr>
+          <p:cNvSpPr/>
+          <p:nvPr/>
+        </p:nvSpPr>
+        <p:spPr>
+          <a:xfrm>
+            <a:off x="164592" y="0"/>
+            <a:ext cx="6400800" cy="292608"/>
+          </a:xfrm>
+          <a:prstGeom prst="rect">
+            <a:avLst/>
+          </a:prstGeom>
+          <a:noFill/>
+          <a:ln/>
+        </p:spPr>
+        <p:txBody>
+          <a:bodyPr wrap="square" lIns="0" tIns="0" rIns="0" bIns="0" rtlCol="0" anchor="ctr"/>
+          <a:lstStyle/>
+          <a:p>
+            <a:pPr marL="0" indent="0">
+              <a:buNone/>
+            </a:pPr>
+            <a:r>
+              <a:rPr lang="en-US" sz="1100" dirty="0">
+                <a:solidFill>
+                  <a:srgbClr val="888888"/>
+                </a:solidFill>
+                <a:latin typeface="Consolas" pitchFamily="34" charset="0"/>
+                <a:ea typeface="Consolas" pitchFamily="34" charset="-122"/>
+                <a:cs typeface="Consolas" pitchFamily="34" charset="-120"/>
+              </a:rPr>
+              <a:t>// shadery — v našom projekte</a:t>
+            </a:r>
+            <a:endParaRPr lang="en-US" sz="1100" dirty="0"/>
+          </a:p>
+        </p:txBody>
+      </p:sp>
+      <p:sp>
+        <p:nvSpPr>
+          <p:cNvPr id="23" name="Text 2">
+            <a:extLst>
+              <a:ext uri="{FF2B5EF4-FFF2-40B4-BE49-F238E27FC236}">
+                <a16:creationId xmlns:a16="http://schemas.microsoft.com/office/drawing/2014/main" id="{CBFBD680-BEC3-AED3-5E66-D7D6D9CE3C49}"/>
+              </a:ext>
+            </a:extLst>
+          </p:cNvPr>
+          <p:cNvSpPr/>
+          <p:nvPr/>
+        </p:nvSpPr>
+        <p:spPr>
+          <a:xfrm>
+            <a:off x="7772400" y="0"/>
+            <a:ext cx="1280160" cy="292608"/>
+          </a:xfrm>
+          <a:prstGeom prst="rect">
+            <a:avLst/>
+          </a:prstGeom>
+          <a:noFill/>
+          <a:ln/>
+        </p:spPr>
+        <p:txBody>
+          <a:bodyPr wrap="square" lIns="0" tIns="0" rIns="0" bIns="0" rtlCol="0" anchor="ctr"/>
+          <a:lstStyle/>
+          <a:p>
+            <a:pPr marL="0" indent="0" algn="r">
+              <a:buNone/>
+            </a:pPr>
+            <a:r>
+              <a:rPr lang="en-US" sz="1100" dirty="0">
+                <a:solidFill>
+                  <a:srgbClr val="888888"/>
+                </a:solidFill>
+                <a:latin typeface="Consolas" pitchFamily="34" charset="0"/>
+                <a:ea typeface="Consolas" pitchFamily="34" charset="-122"/>
+                <a:cs typeface="Consolas" pitchFamily="34" charset="-120"/>
+              </a:rPr>
+              <a:t>~2 min</a:t>
+            </a:r>
+            <a:endParaRPr lang="en-US" sz="1100" dirty="0"/>
+          </a:p>
+        </p:txBody>
+      </p:sp>
+      <p:sp>
+        <p:nvSpPr>
+          <p:cNvPr id="24" name="Shape 3">
+            <a:extLst>
+              <a:ext uri="{FF2B5EF4-FFF2-40B4-BE49-F238E27FC236}">
+                <a16:creationId xmlns:a16="http://schemas.microsoft.com/office/drawing/2014/main" id="{8C8EB6BA-FAC1-0893-F61F-ECF0E6E4CC14}"/>
+              </a:ext>
+            </a:extLst>
+          </p:cNvPr>
+          <p:cNvSpPr/>
+          <p:nvPr/>
+        </p:nvSpPr>
+        <p:spPr>
+          <a:xfrm>
+            <a:off x="164592" y="402336"/>
+            <a:ext cx="1005840" cy="256032"/>
+          </a:xfrm>
+          <a:prstGeom prst="rect">
+            <a:avLst/>
+          </a:prstGeom>
+          <a:solidFill>
+            <a:srgbClr val="1A1E26"/>
+          </a:solidFill>
+          <a:ln w="12700">
+            <a:solidFill>
+              <a:srgbClr val="E8724A"/>
+            </a:solidFill>
+            <a:prstDash val="solid"/>
+          </a:ln>
+        </p:spPr>
+        <p:txBody>
+          <a:bodyPr/>
+          <a:lstStyle/>
+          <a:p>
+            <a:endParaRPr lang="ru-RU"/>
+          </a:p>
+        </p:txBody>
+      </p:sp>
+      <p:sp>
+        <p:nvSpPr>
+          <p:cNvPr id="25" name="Text 4">
+            <a:extLst>
+              <a:ext uri="{FF2B5EF4-FFF2-40B4-BE49-F238E27FC236}">
+                <a16:creationId xmlns:a16="http://schemas.microsoft.com/office/drawing/2014/main" id="{F7D2F4F7-65A1-F66D-6E49-4803461F3B06}"/>
+              </a:ext>
+            </a:extLst>
+          </p:cNvPr>
+          <p:cNvSpPr/>
+          <p:nvPr/>
+        </p:nvSpPr>
+        <p:spPr>
+          <a:xfrm>
+            <a:off x="164592" y="402336"/>
+            <a:ext cx="1005840" cy="256032"/>
+          </a:xfrm>
+          <a:prstGeom prst="rect">
+            <a:avLst/>
+          </a:prstGeom>
+          <a:noFill/>
+          <a:ln/>
+        </p:spPr>
+        <p:txBody>
+          <a:bodyPr wrap="square" lIns="0" tIns="0" rIns="0" bIns="0" rtlCol="0" anchor="ctr"/>
+          <a:lstStyle/>
+          <a:p>
+            <a:pPr marL="0" indent="0" algn="ctr">
+              <a:buNone/>
+            </a:pPr>
+            <a:r>
+              <a:rPr lang="en-US" sz="1000" dirty="0">
+                <a:solidFill>
+                  <a:srgbClr val="E8724A"/>
+                </a:solidFill>
+                <a:latin typeface="Consolas" pitchFamily="34" charset="0"/>
+                <a:ea typeface="Consolas" pitchFamily="34" charset="-122"/>
+                <a:cs typeface="Consolas" pitchFamily="34" charset="-120"/>
+              </a:rPr>
+              <a:t>TEÓRIA</a:t>
+            </a:r>
+            <a:endParaRPr lang="en-US" sz="1000" dirty="0"/>
+          </a:p>
+        </p:txBody>
+      </p:sp>
+      <p:sp>
+        <p:nvSpPr>
+          <p:cNvPr id="26" name="Text 5">
+            <a:extLst>
+              <a:ext uri="{FF2B5EF4-FFF2-40B4-BE49-F238E27FC236}">
+                <a16:creationId xmlns:a16="http://schemas.microsoft.com/office/drawing/2014/main" id="{7A64AB6F-532D-D1C4-D646-0AFF84F8774E}"/>
+              </a:ext>
+            </a:extLst>
+          </p:cNvPr>
+          <p:cNvSpPr/>
+          <p:nvPr/>
+        </p:nvSpPr>
+        <p:spPr>
+          <a:xfrm>
+            <a:off x="320040" y="777240"/>
+            <a:ext cx="8503920" cy="594360"/>
+          </a:xfrm>
+          <a:prstGeom prst="rect">
+            <a:avLst/>
+          </a:prstGeom>
+          <a:noFill/>
+          <a:ln/>
+        </p:spPr>
+        <p:txBody>
+          <a:bodyPr wrap="square" lIns="0" tIns="0" rIns="0" bIns="0" rtlCol="0" anchor="ctr"/>
+          <a:lstStyle/>
+          <a:p>
+            <a:pPr marL="0" indent="0">
+              <a:buNone/>
+            </a:pPr>
+            <a:r>
+              <a:rPr lang="en-US" sz="3200" b="1" dirty="0">
+                <a:solidFill>
+                  <a:srgbClr val="FFFFFF"/>
+                </a:solidFill>
+                <a:latin typeface="Calibri" pitchFamily="34" charset="0"/>
+                <a:ea typeface="Calibri" pitchFamily="34" charset="-122"/>
+                <a:cs typeface="Calibri" pitchFamily="34" charset="-120"/>
+              </a:rPr>
+              <a:t>Shadery ktoré používame</a:t>
+            </a:r>
+            <a:endParaRPr lang="en-US" sz="3200" dirty="0"/>
+          </a:p>
+        </p:txBody>
+      </p:sp>
+      <p:sp>
+        <p:nvSpPr>
+          <p:cNvPr id="27" name="Shape 6">
+            <a:extLst>
+              <a:ext uri="{FF2B5EF4-FFF2-40B4-BE49-F238E27FC236}">
+                <a16:creationId xmlns:a16="http://schemas.microsoft.com/office/drawing/2014/main" id="{33CF9AD8-855E-9E5C-E367-2A69B75AE202}"/>
+              </a:ext>
+            </a:extLst>
+          </p:cNvPr>
+          <p:cNvSpPr/>
+          <p:nvPr/>
+        </p:nvSpPr>
+        <p:spPr>
+          <a:xfrm>
+            <a:off x="164592" y="1508760"/>
+            <a:ext cx="2084832" cy="2834640"/>
+          </a:xfrm>
+          <a:prstGeom prst="rect">
+            <a:avLst/>
+          </a:prstGeom>
+          <a:solidFill>
+            <a:srgbClr val="1E2330"/>
+          </a:solidFill>
+          <a:ln w="12700">
+            <a:solidFill>
+              <a:srgbClr val="E8C44A"/>
+            </a:solidFill>
+            <a:prstDash val="solid"/>
+          </a:ln>
+        </p:spPr>
+        <p:txBody>
+          <a:bodyPr/>
+          <a:lstStyle/>
+          <a:p>
+            <a:endParaRPr lang="ru-RU"/>
+          </a:p>
+        </p:txBody>
+      </p:sp>
+      <p:sp>
+        <p:nvSpPr>
+          <p:cNvPr id="28" name="Text 7">
+            <a:extLst>
+              <a:ext uri="{FF2B5EF4-FFF2-40B4-BE49-F238E27FC236}">
+                <a16:creationId xmlns:a16="http://schemas.microsoft.com/office/drawing/2014/main" id="{6D50D6DE-A92E-E053-52DC-5CA7396A75E6}"/>
+              </a:ext>
+            </a:extLst>
+          </p:cNvPr>
+          <p:cNvSpPr/>
+          <p:nvPr/>
+        </p:nvSpPr>
+        <p:spPr>
+          <a:xfrm>
+            <a:off x="256032" y="1600200"/>
+            <a:ext cx="1901952" cy="274320"/>
+          </a:xfrm>
+          <a:prstGeom prst="rect">
+            <a:avLst/>
+          </a:prstGeom>
+          <a:noFill/>
+          <a:ln/>
+        </p:spPr>
+        <p:txBody>
+          <a:bodyPr wrap="square" lIns="0" tIns="0" rIns="0" bIns="0" rtlCol="0" anchor="ctr"/>
+          <a:lstStyle/>
+          <a:p>
+            <a:pPr marL="0" indent="0">
+              <a:buNone/>
+            </a:pPr>
+            <a:r>
+              <a:rPr lang="en-US" sz="1200" b="1" dirty="0">
+                <a:solidFill>
+                  <a:srgbClr val="E8C44A"/>
+                </a:solidFill>
+                <a:latin typeface="Consolas" pitchFamily="34" charset="0"/>
+                <a:ea typeface="Consolas" pitchFamily="34" charset="-122"/>
+                <a:cs typeface="Consolas" pitchFamily="34" charset="-120"/>
+              </a:rPr>
+              <a:t>depth.vert</a:t>
+            </a:r>
+            <a:endParaRPr lang="en-US" sz="1200" dirty="0"/>
+          </a:p>
+        </p:txBody>
+      </p:sp>
+      <p:sp>
+        <p:nvSpPr>
+          <p:cNvPr id="29" name="Text 8">
+            <a:extLst>
+              <a:ext uri="{FF2B5EF4-FFF2-40B4-BE49-F238E27FC236}">
+                <a16:creationId xmlns:a16="http://schemas.microsoft.com/office/drawing/2014/main" id="{BD8FBB4C-FF53-63F2-7853-14D6B902BD26}"/>
+              </a:ext>
+            </a:extLst>
+          </p:cNvPr>
+          <p:cNvSpPr/>
+          <p:nvPr/>
+        </p:nvSpPr>
+        <p:spPr>
+          <a:xfrm>
+            <a:off x="256032" y="1965960"/>
+            <a:ext cx="1901952" cy="2194560"/>
+          </a:xfrm>
+          <a:prstGeom prst="rect">
+            <a:avLst/>
+          </a:prstGeom>
+          <a:noFill/>
+          <a:ln/>
+        </p:spPr>
+        <p:txBody>
+          <a:bodyPr wrap="square" lIns="0" tIns="0" rIns="0" bIns="0" rtlCol="0" anchor="ctr"/>
+          <a:lstStyle/>
+          <a:p>
+            <a:pPr marL="0" indent="0">
+              <a:buNone/>
+            </a:pPr>
+            <a:r>
+              <a:rPr lang="en-US" sz="1100" dirty="0">
+                <a:solidFill>
+                  <a:srgbClr val="CCCCCC"/>
+                </a:solidFill>
+                <a:latin typeface="Consolas" pitchFamily="34" charset="0"/>
+                <a:ea typeface="Consolas" pitchFamily="34" charset="-122"/>
+                <a:cs typeface="Consolas" pitchFamily="34" charset="-120"/>
+              </a:rPr>
+              <a:t>Vertex shader pre depth pass.</a:t>
+            </a:r>
+            <a:endParaRPr lang="en-US" sz="1100" dirty="0"/>
+          </a:p>
+          <a:p>
+            <a:pPr marL="0" indent="0">
+              <a:buNone/>
+            </a:pPr>
+            <a:r>
+              <a:rPr lang="en-US" sz="1100" dirty="0">
+                <a:solidFill>
+                  <a:srgbClr val="CCCCCC"/>
+                </a:solidFill>
+                <a:latin typeface="Consolas" pitchFamily="34" charset="0"/>
+                <a:ea typeface="Consolas" pitchFamily="34" charset="-122"/>
+                <a:cs typeface="Consolas" pitchFamily="34" charset="-120"/>
+              </a:rPr>
+              <a:t>Transformuje vrcholy do light space.</a:t>
+            </a:r>
+            <a:endParaRPr lang="en-US" sz="1100" dirty="0"/>
+          </a:p>
+          <a:p>
+            <a:pPr marL="0" indent="0">
+              <a:buNone/>
+            </a:pPr>
+            <a:r>
+              <a:rPr lang="en-US" sz="1100" dirty="0">
+                <a:solidFill>
+                  <a:srgbClr val="CCCCCC"/>
+                </a:solidFill>
+                <a:latin typeface="Consolas" pitchFamily="34" charset="0"/>
+                <a:ea typeface="Consolas" pitchFamily="34" charset="-122"/>
+                <a:cs typeface="Consolas" pitchFamily="34" charset="-120"/>
+              </a:rPr>
+              <a:t>Jedna matica, jeden rádok výsledku.</a:t>
+            </a:r>
+            <a:endParaRPr lang="en-US" sz="1100" dirty="0"/>
+          </a:p>
+        </p:txBody>
+      </p:sp>
+      <p:sp>
+        <p:nvSpPr>
+          <p:cNvPr id="30" name="Shape 9">
+            <a:extLst>
+              <a:ext uri="{FF2B5EF4-FFF2-40B4-BE49-F238E27FC236}">
+                <a16:creationId xmlns:a16="http://schemas.microsoft.com/office/drawing/2014/main" id="{6D7BB3DB-F318-DC66-D155-8D2BC9B4A38F}"/>
+              </a:ext>
+            </a:extLst>
+          </p:cNvPr>
+          <p:cNvSpPr/>
+          <p:nvPr/>
+        </p:nvSpPr>
+        <p:spPr>
+          <a:xfrm>
+            <a:off x="2377440" y="1508760"/>
+            <a:ext cx="2084832" cy="2834640"/>
+          </a:xfrm>
+          <a:prstGeom prst="rect">
+            <a:avLst/>
+          </a:prstGeom>
+          <a:solidFill>
+            <a:srgbClr val="1E2330"/>
+          </a:solidFill>
+          <a:ln w="12700">
+            <a:solidFill>
+              <a:srgbClr val="E8C44A"/>
+            </a:solidFill>
+            <a:prstDash val="solid"/>
+          </a:ln>
+        </p:spPr>
+        <p:txBody>
+          <a:bodyPr/>
+          <a:lstStyle/>
+          <a:p>
+            <a:endParaRPr lang="ru-RU"/>
+          </a:p>
+        </p:txBody>
+      </p:sp>
+      <p:sp>
+        <p:nvSpPr>
+          <p:cNvPr id="31" name="Text 10">
+            <a:extLst>
+              <a:ext uri="{FF2B5EF4-FFF2-40B4-BE49-F238E27FC236}">
+                <a16:creationId xmlns:a16="http://schemas.microsoft.com/office/drawing/2014/main" id="{F8E5CC9B-D6EB-AAD3-5DC0-B98228CB2587}"/>
+              </a:ext>
+            </a:extLst>
+          </p:cNvPr>
+          <p:cNvSpPr/>
+          <p:nvPr/>
+        </p:nvSpPr>
+        <p:spPr>
+          <a:xfrm>
+            <a:off x="2468880" y="1600200"/>
+            <a:ext cx="1901952" cy="274320"/>
+          </a:xfrm>
+          <a:prstGeom prst="rect">
+            <a:avLst/>
+          </a:prstGeom>
+          <a:noFill/>
+          <a:ln/>
+        </p:spPr>
+        <p:txBody>
+          <a:bodyPr wrap="square" lIns="0" tIns="0" rIns="0" bIns="0" rtlCol="0" anchor="ctr"/>
+          <a:lstStyle/>
+          <a:p>
+            <a:pPr marL="0" indent="0">
+              <a:buNone/>
+            </a:pPr>
+            <a:r>
+              <a:rPr lang="en-US" sz="1200" b="1" dirty="0">
+                <a:solidFill>
+                  <a:srgbClr val="E8C44A"/>
+                </a:solidFill>
+                <a:latin typeface="Consolas" pitchFamily="34" charset="0"/>
+                <a:ea typeface="Consolas" pitchFamily="34" charset="-122"/>
+                <a:cs typeface="Consolas" pitchFamily="34" charset="-120"/>
+              </a:rPr>
+              <a:t>depth.frag</a:t>
+            </a:r>
+            <a:endParaRPr lang="en-US" sz="1200" dirty="0"/>
+          </a:p>
+        </p:txBody>
+      </p:sp>
+      <p:sp>
+        <p:nvSpPr>
+          <p:cNvPr id="32" name="Text 11">
+            <a:extLst>
+              <a:ext uri="{FF2B5EF4-FFF2-40B4-BE49-F238E27FC236}">
+                <a16:creationId xmlns:a16="http://schemas.microsoft.com/office/drawing/2014/main" id="{2B4F8688-603F-AF6F-70DC-0D0C06F8FAB3}"/>
+              </a:ext>
+            </a:extLst>
+          </p:cNvPr>
+          <p:cNvSpPr/>
+          <p:nvPr/>
+        </p:nvSpPr>
+        <p:spPr>
+          <a:xfrm>
+            <a:off x="2468880" y="1965960"/>
+            <a:ext cx="1901952" cy="2194560"/>
+          </a:xfrm>
+          <a:prstGeom prst="rect">
+            <a:avLst/>
+          </a:prstGeom>
+          <a:noFill/>
+          <a:ln/>
+        </p:spPr>
+        <p:txBody>
+          <a:bodyPr wrap="square" lIns="0" tIns="0" rIns="0" bIns="0" rtlCol="0" anchor="ctr"/>
+          <a:lstStyle/>
+          <a:p>
+            <a:pPr marL="0" indent="0">
+              <a:buNone/>
+            </a:pPr>
+            <a:r>
+              <a:rPr lang="en-US" sz="1100" dirty="0">
+                <a:solidFill>
+                  <a:srgbClr val="CCCCCC"/>
+                </a:solidFill>
+                <a:latin typeface="Consolas" pitchFamily="34" charset="0"/>
+                <a:ea typeface="Consolas" pitchFamily="34" charset="-122"/>
+                <a:cs typeface="Consolas" pitchFamily="34" charset="-120"/>
+              </a:rPr>
+              <a:t>Fragment shader pre depth pass.</a:t>
+            </a:r>
+            <a:endParaRPr lang="en-US" sz="1100" dirty="0"/>
+          </a:p>
+          <a:p>
+            <a:pPr marL="0" indent="0">
+              <a:buNone/>
+            </a:pPr>
+            <a:r>
+              <a:rPr lang="en-US" sz="1100" dirty="0">
+                <a:solidFill>
+                  <a:srgbClr val="CCCCCC"/>
+                </a:solidFill>
+                <a:latin typeface="Consolas" pitchFamily="34" charset="0"/>
+                <a:ea typeface="Consolas" pitchFamily="34" charset="-122"/>
+                <a:cs typeface="Consolas" pitchFamily="34" charset="-120"/>
+              </a:rPr>
+              <a:t>Je úplne prázdny.</a:t>
+            </a:r>
+            <a:endParaRPr lang="en-US" sz="1100" dirty="0"/>
+          </a:p>
+          <a:p>
+            <a:pPr marL="0" indent="0">
+              <a:buNone/>
+            </a:pPr>
+            <a:r>
+              <a:rPr lang="en-US" sz="1100" dirty="0">
+                <a:solidFill>
+                  <a:srgbClr val="CCCCCC"/>
+                </a:solidFill>
+                <a:latin typeface="Consolas" pitchFamily="34" charset="0"/>
+                <a:ea typeface="Consolas" pitchFamily="34" charset="-122"/>
+                <a:cs typeface="Consolas" pitchFamily="34" charset="-120"/>
+              </a:rPr>
+              <a:t>GPU si zapíše hļbku sám.</a:t>
+            </a:r>
+            <a:endParaRPr lang="en-US" sz="1100" dirty="0"/>
+          </a:p>
+        </p:txBody>
+      </p:sp>
+      <p:sp>
+        <p:nvSpPr>
+          <p:cNvPr id="33" name="Shape 12">
+            <a:extLst>
+              <a:ext uri="{FF2B5EF4-FFF2-40B4-BE49-F238E27FC236}">
+                <a16:creationId xmlns:a16="http://schemas.microsoft.com/office/drawing/2014/main" id="{C9BE1781-8BA8-F6B5-DFD3-2BC9042D8106}"/>
+              </a:ext>
+            </a:extLst>
+          </p:cNvPr>
+          <p:cNvSpPr/>
+          <p:nvPr/>
+        </p:nvSpPr>
+        <p:spPr>
+          <a:xfrm>
+            <a:off x="4590288" y="1508760"/>
+            <a:ext cx="2084832" cy="2834640"/>
+          </a:xfrm>
+          <a:prstGeom prst="rect">
+            <a:avLst/>
+          </a:prstGeom>
+          <a:solidFill>
+            <a:srgbClr val="1E2330"/>
+          </a:solidFill>
+          <a:ln w="12700">
+            <a:solidFill>
+              <a:srgbClr val="4AC8E8"/>
+            </a:solidFill>
+            <a:prstDash val="solid"/>
+          </a:ln>
+        </p:spPr>
+        <p:txBody>
+          <a:bodyPr/>
+          <a:lstStyle/>
+          <a:p>
+            <a:endParaRPr lang="ru-RU"/>
+          </a:p>
+        </p:txBody>
+      </p:sp>
+      <p:sp>
+        <p:nvSpPr>
+          <p:cNvPr id="34" name="Text 13">
+            <a:extLst>
+              <a:ext uri="{FF2B5EF4-FFF2-40B4-BE49-F238E27FC236}">
+                <a16:creationId xmlns:a16="http://schemas.microsoft.com/office/drawing/2014/main" id="{831A9DE8-69B1-A80F-673B-22CBF45B792D}"/>
+              </a:ext>
+            </a:extLst>
+          </p:cNvPr>
+          <p:cNvSpPr/>
+          <p:nvPr/>
+        </p:nvSpPr>
+        <p:spPr>
+          <a:xfrm>
+            <a:off x="4681728" y="1600200"/>
+            <a:ext cx="1901952" cy="274320"/>
+          </a:xfrm>
+          <a:prstGeom prst="rect">
+            <a:avLst/>
+          </a:prstGeom>
+          <a:noFill/>
+          <a:ln/>
+        </p:spPr>
+        <p:txBody>
+          <a:bodyPr wrap="square" lIns="0" tIns="0" rIns="0" bIns="0" rtlCol="0" anchor="ctr"/>
+          <a:lstStyle/>
+          <a:p>
+            <a:pPr marL="0" indent="0">
+              <a:buNone/>
+            </a:pPr>
+            <a:r>
+              <a:rPr lang="en-US" sz="1200" b="1" dirty="0">
+                <a:solidFill>
+                  <a:srgbClr val="4AC8E8"/>
+                </a:solidFill>
+                <a:latin typeface="Consolas" pitchFamily="34" charset="0"/>
+                <a:ea typeface="Consolas" pitchFamily="34" charset="-122"/>
+                <a:cs typeface="Consolas" pitchFamily="34" charset="-120"/>
+              </a:rPr>
+              <a:t>main.vert</a:t>
+            </a:r>
+            <a:endParaRPr lang="en-US" sz="1200" dirty="0"/>
+          </a:p>
+        </p:txBody>
+      </p:sp>
+      <p:sp>
+        <p:nvSpPr>
+          <p:cNvPr id="35" name="Text 14">
+            <a:extLst>
+              <a:ext uri="{FF2B5EF4-FFF2-40B4-BE49-F238E27FC236}">
+                <a16:creationId xmlns:a16="http://schemas.microsoft.com/office/drawing/2014/main" id="{2336C856-221F-3A72-A302-91CF8B4F9EE0}"/>
+              </a:ext>
+            </a:extLst>
+          </p:cNvPr>
+          <p:cNvSpPr/>
+          <p:nvPr/>
+        </p:nvSpPr>
+        <p:spPr>
+          <a:xfrm>
+            <a:off x="4681728" y="1965960"/>
+            <a:ext cx="1901952" cy="2194560"/>
+          </a:xfrm>
+          <a:prstGeom prst="rect">
+            <a:avLst/>
+          </a:prstGeom>
+          <a:noFill/>
+          <a:ln/>
+        </p:spPr>
+        <p:txBody>
+          <a:bodyPr wrap="square" lIns="0" tIns="0" rIns="0" bIns="0" rtlCol="0" anchor="ctr"/>
+          <a:lstStyle/>
+          <a:p>
+            <a:pPr marL="0" indent="0">
+              <a:buNone/>
+            </a:pPr>
+            <a:r>
+              <a:rPr lang="en-US" sz="1100" dirty="0">
+                <a:solidFill>
+                  <a:srgbClr val="CCCCCC"/>
+                </a:solidFill>
+                <a:latin typeface="Consolas" pitchFamily="34" charset="0"/>
+                <a:ea typeface="Consolas" pitchFamily="34" charset="-122"/>
+                <a:cs typeface="Consolas" pitchFamily="34" charset="-120"/>
+              </a:rPr>
+              <a:t>Vertex shader pre hlavný pass.</a:t>
+            </a:r>
+            <a:endParaRPr lang="en-US" sz="1100" dirty="0"/>
+          </a:p>
+          <a:p>
+            <a:pPr marL="0" indent="0">
+              <a:buNone/>
+            </a:pPr>
+            <a:r>
+              <a:rPr lang="en-US" sz="1100" dirty="0">
+                <a:solidFill>
+                  <a:srgbClr val="CCCCCC"/>
+                </a:solidFill>
+                <a:latin typeface="Consolas" pitchFamily="34" charset="0"/>
+                <a:ea typeface="Consolas" pitchFamily="34" charset="-122"/>
+                <a:cs typeface="Consolas" pitchFamily="34" charset="-120"/>
+              </a:rPr>
+              <a:t>Transformuje vrcholy pre kameru.</a:t>
+            </a:r>
+            <a:endParaRPr lang="en-US" sz="1100" dirty="0"/>
+          </a:p>
+          <a:p>
+            <a:pPr marL="0" indent="0">
+              <a:buNone/>
+            </a:pPr>
+            <a:r>
+              <a:rPr lang="en-US" sz="1100" dirty="0">
+                <a:solidFill>
+                  <a:srgbClr val="CCCCCC"/>
+                </a:solidFill>
+                <a:latin typeface="Consolas" pitchFamily="34" charset="0"/>
+                <a:ea typeface="Consolas" pitchFamily="34" charset="-122"/>
+                <a:cs typeface="Consolas" pitchFamily="34" charset="-120"/>
+              </a:rPr>
+              <a:t>Navyše posiela FragPosLightSpace.</a:t>
+            </a:r>
+            <a:endParaRPr lang="en-US" sz="1100" dirty="0"/>
+          </a:p>
+        </p:txBody>
+      </p:sp>
+      <p:sp>
+        <p:nvSpPr>
+          <p:cNvPr id="36" name="Shape 15">
+            <a:extLst>
+              <a:ext uri="{FF2B5EF4-FFF2-40B4-BE49-F238E27FC236}">
+                <a16:creationId xmlns:a16="http://schemas.microsoft.com/office/drawing/2014/main" id="{A6435274-EB0B-5293-C9FD-D11D3B577D7E}"/>
+              </a:ext>
+            </a:extLst>
+          </p:cNvPr>
+          <p:cNvSpPr/>
+          <p:nvPr/>
+        </p:nvSpPr>
+        <p:spPr>
+          <a:xfrm>
+            <a:off x="6803136" y="1508760"/>
+            <a:ext cx="2084832" cy="2834640"/>
+          </a:xfrm>
+          <a:prstGeom prst="rect">
+            <a:avLst/>
+          </a:prstGeom>
+          <a:solidFill>
+            <a:srgbClr val="1E2330"/>
+          </a:solidFill>
+          <a:ln w="12700">
+            <a:solidFill>
+              <a:srgbClr val="4AC8E8"/>
+            </a:solidFill>
+            <a:prstDash val="solid"/>
+          </a:ln>
+        </p:spPr>
+        <p:txBody>
+          <a:bodyPr/>
+          <a:lstStyle/>
+          <a:p>
+            <a:endParaRPr lang="ru-RU"/>
+          </a:p>
+        </p:txBody>
+      </p:sp>
+      <p:sp>
+        <p:nvSpPr>
+          <p:cNvPr id="37" name="Text 16">
+            <a:extLst>
+              <a:ext uri="{FF2B5EF4-FFF2-40B4-BE49-F238E27FC236}">
+                <a16:creationId xmlns:a16="http://schemas.microsoft.com/office/drawing/2014/main" id="{00DC9B4A-A3DE-5690-52F5-FA831804D8FF}"/>
+              </a:ext>
+            </a:extLst>
+          </p:cNvPr>
+          <p:cNvSpPr/>
+          <p:nvPr/>
+        </p:nvSpPr>
+        <p:spPr>
+          <a:xfrm>
+            <a:off x="6894576" y="1600200"/>
+            <a:ext cx="1901952" cy="274320"/>
+          </a:xfrm>
+          <a:prstGeom prst="rect">
+            <a:avLst/>
+          </a:prstGeom>
+          <a:noFill/>
+          <a:ln/>
+        </p:spPr>
+        <p:txBody>
+          <a:bodyPr wrap="square" lIns="0" tIns="0" rIns="0" bIns="0" rtlCol="0" anchor="ctr"/>
+          <a:lstStyle/>
+          <a:p>
+            <a:pPr marL="0" indent="0">
+              <a:buNone/>
+            </a:pPr>
+            <a:r>
+              <a:rPr lang="en-US" sz="1200" b="1" dirty="0">
+                <a:solidFill>
+                  <a:srgbClr val="4AC8E8"/>
+                </a:solidFill>
+                <a:latin typeface="Consolas" pitchFamily="34" charset="0"/>
+                <a:ea typeface="Consolas" pitchFamily="34" charset="-122"/>
+                <a:cs typeface="Consolas" pitchFamily="34" charset="-120"/>
+              </a:rPr>
+              <a:t>main.frag</a:t>
+            </a:r>
+            <a:endParaRPr lang="en-US" sz="1200" dirty="0"/>
+          </a:p>
+        </p:txBody>
+      </p:sp>
+      <p:sp>
+        <p:nvSpPr>
+          <p:cNvPr id="38" name="Text 17">
+            <a:extLst>
+              <a:ext uri="{FF2B5EF4-FFF2-40B4-BE49-F238E27FC236}">
+                <a16:creationId xmlns:a16="http://schemas.microsoft.com/office/drawing/2014/main" id="{0280DD3B-93D3-1D29-982F-3841332CAC1A}"/>
+              </a:ext>
+            </a:extLst>
+          </p:cNvPr>
+          <p:cNvSpPr/>
+          <p:nvPr/>
+        </p:nvSpPr>
+        <p:spPr>
+          <a:xfrm>
+            <a:off x="6894576" y="1965960"/>
+            <a:ext cx="1901952" cy="2194560"/>
+          </a:xfrm>
+          <a:prstGeom prst="rect">
+            <a:avLst/>
+          </a:prstGeom>
+          <a:noFill/>
+          <a:ln/>
+        </p:spPr>
+        <p:txBody>
+          <a:bodyPr wrap="square" lIns="0" tIns="0" rIns="0" bIns="0" rtlCol="0" anchor="ctr"/>
+          <a:lstStyle/>
+          <a:p>
+            <a:pPr marL="0" indent="0">
+              <a:buNone/>
+            </a:pPr>
+            <a:r>
+              <a:rPr lang="en-US" sz="1100" dirty="0">
+                <a:solidFill>
+                  <a:srgbClr val="CCCCCC"/>
+                </a:solidFill>
+                <a:latin typeface="Consolas" pitchFamily="34" charset="0"/>
+                <a:ea typeface="Consolas" pitchFamily="34" charset="-122"/>
+                <a:cs typeface="Consolas" pitchFamily="34" charset="-120"/>
+              </a:rPr>
+              <a:t>Fragment shader pre hlavný pass.</a:t>
+            </a:r>
+            <a:endParaRPr lang="en-US" sz="1100" dirty="0"/>
+          </a:p>
+          <a:p>
+            <a:pPr marL="0" indent="0">
+              <a:buNone/>
+            </a:pPr>
+            <a:r>
+              <a:rPr lang="en-US" sz="1100" dirty="0">
+                <a:solidFill>
+                  <a:srgbClr val="CCCCCC"/>
+                </a:solidFill>
+                <a:latin typeface="Consolas" pitchFamily="34" charset="0"/>
+                <a:ea typeface="Consolas" pitchFamily="34" charset="-122"/>
+                <a:cs typeface="Consolas" pitchFamily="34" charset="-120"/>
+              </a:rPr>
+              <a:t>Phöng osvetlenie + shadowTest().</a:t>
+            </a:r>
+            <a:endParaRPr lang="en-US" sz="1100" dirty="0"/>
+          </a:p>
+          <a:p>
+            <a:pPr marL="0" indent="0">
+              <a:buNone/>
+            </a:pPr>
+            <a:r>
+              <a:rPr lang="en-US" sz="1100" dirty="0">
+                <a:solidFill>
+                  <a:srgbClr val="CCCCCC"/>
+                </a:solidFill>
+                <a:latin typeface="Consolas" pitchFamily="34" charset="0"/>
+                <a:ea typeface="Consolas" pitchFamily="34" charset="-122"/>
+                <a:cs typeface="Consolas" pitchFamily="34" charset="-120"/>
+              </a:rPr>
+              <a:t>Tu sa rozhoduje: tieň alebo svetlo.</a:t>
+            </a:r>
+            <a:endParaRPr lang="en-US" sz="1100" dirty="0"/>
+          </a:p>
+        </p:txBody>
+      </p:sp>
+      <p:sp>
+        <p:nvSpPr>
+          <p:cNvPr id="39" name="Shape 18">
+            <a:extLst>
+              <a:ext uri="{FF2B5EF4-FFF2-40B4-BE49-F238E27FC236}">
+                <a16:creationId xmlns:a16="http://schemas.microsoft.com/office/drawing/2014/main" id="{B7AB08E7-17CA-3FE0-8C58-005BFF30114E}"/>
+              </a:ext>
+            </a:extLst>
+          </p:cNvPr>
+          <p:cNvSpPr/>
+          <p:nvPr/>
+        </p:nvSpPr>
+        <p:spPr>
+          <a:xfrm>
+            <a:off x="164592" y="4462272"/>
+            <a:ext cx="4425696" cy="0"/>
+          </a:xfrm>
+          <a:prstGeom prst="line">
+            <a:avLst/>
+          </a:prstGeom>
+          <a:noFill/>
+          <a:ln w="12700">
+            <a:solidFill>
+              <a:srgbClr val="E8C44A"/>
+            </a:solidFill>
+            <a:prstDash val="solid"/>
+          </a:ln>
+        </p:spPr>
+        <p:txBody>
+          <a:bodyPr/>
+          <a:lstStyle/>
+          <a:p>
+            <a:endParaRPr lang="ru-RU"/>
+          </a:p>
+        </p:txBody>
+      </p:sp>
+      <p:sp>
+        <p:nvSpPr>
+          <p:cNvPr id="40" name="Text 19">
+            <a:extLst>
+              <a:ext uri="{FF2B5EF4-FFF2-40B4-BE49-F238E27FC236}">
+                <a16:creationId xmlns:a16="http://schemas.microsoft.com/office/drawing/2014/main" id="{A54A4D3C-5EE0-5F87-463D-790FDC15CEA3}"/>
+              </a:ext>
+            </a:extLst>
+          </p:cNvPr>
+          <p:cNvSpPr/>
+          <p:nvPr/>
+        </p:nvSpPr>
+        <p:spPr>
+          <a:xfrm>
+            <a:off x="164592" y="4526280"/>
+            <a:ext cx="4425696" cy="228600"/>
+          </a:xfrm>
+          <a:prstGeom prst="rect">
+            <a:avLst/>
+          </a:prstGeom>
+          <a:noFill/>
+          <a:ln/>
+        </p:spPr>
+        <p:txBody>
+          <a:bodyPr wrap="square" lIns="0" tIns="0" rIns="0" bIns="0" rtlCol="0" anchor="ctr"/>
+          <a:lstStyle/>
+          <a:p>
+            <a:pPr marL="0" indent="0" algn="ctr">
+              <a:buNone/>
+            </a:pPr>
+            <a:r>
+              <a:rPr lang="en-US" sz="1100" dirty="0">
+                <a:solidFill>
+                  <a:srgbClr val="E8C44A"/>
+                </a:solidFill>
+                <a:latin typeface="Consolas" pitchFamily="34" charset="0"/>
+                <a:ea typeface="Consolas" pitchFamily="34" charset="-122"/>
+                <a:cs typeface="Consolas" pitchFamily="34" charset="-120"/>
+              </a:rPr>
+              <a:t>depth pass</a:t>
+            </a:r>
+            <a:endParaRPr lang="en-US" sz="1100" dirty="0"/>
+          </a:p>
+        </p:txBody>
+      </p:sp>
+      <p:sp>
+        <p:nvSpPr>
+          <p:cNvPr id="41" name="Shape 20">
+            <a:extLst>
+              <a:ext uri="{FF2B5EF4-FFF2-40B4-BE49-F238E27FC236}">
+                <a16:creationId xmlns:a16="http://schemas.microsoft.com/office/drawing/2014/main" id="{E01D1AE0-888C-0AE8-05B9-ED28B740CAA0}"/>
+              </a:ext>
+            </a:extLst>
+          </p:cNvPr>
+          <p:cNvSpPr/>
+          <p:nvPr/>
+        </p:nvSpPr>
+        <p:spPr>
+          <a:xfrm>
+            <a:off x="4718304" y="4462272"/>
+            <a:ext cx="4261104" cy="0"/>
+          </a:xfrm>
+          <a:prstGeom prst="line">
+            <a:avLst/>
+          </a:prstGeom>
+          <a:noFill/>
+          <a:ln w="12700">
+            <a:solidFill>
+              <a:srgbClr val="4AC8E8"/>
+            </a:solidFill>
+            <a:prstDash val="solid"/>
+          </a:ln>
+        </p:spPr>
+        <p:txBody>
+          <a:bodyPr/>
+          <a:lstStyle/>
+          <a:p>
+            <a:endParaRPr lang="ru-RU"/>
+          </a:p>
+        </p:txBody>
+      </p:sp>
+      <p:sp>
+        <p:nvSpPr>
+          <p:cNvPr id="42" name="Text 21">
+            <a:extLst>
+              <a:ext uri="{FF2B5EF4-FFF2-40B4-BE49-F238E27FC236}">
+                <a16:creationId xmlns:a16="http://schemas.microsoft.com/office/drawing/2014/main" id="{C931F03E-352F-FBA1-3E36-DB96A535907D}"/>
+              </a:ext>
+            </a:extLst>
+          </p:cNvPr>
+          <p:cNvSpPr/>
+          <p:nvPr/>
+        </p:nvSpPr>
+        <p:spPr>
+          <a:xfrm>
+            <a:off x="4718304" y="4526280"/>
+            <a:ext cx="4261104" cy="228600"/>
+          </a:xfrm>
+          <a:prstGeom prst="rect">
+            <a:avLst/>
+          </a:prstGeom>
+          <a:noFill/>
+          <a:ln/>
+        </p:spPr>
+        <p:txBody>
+          <a:bodyPr wrap="square" lIns="0" tIns="0" rIns="0" bIns="0" rtlCol="0" anchor="ctr"/>
+          <a:lstStyle/>
+          <a:p>
+            <a:pPr marL="0" indent="0" algn="ctr">
+              <a:buNone/>
+            </a:pPr>
+            <a:r>
+              <a:rPr lang="en-US" sz="1100" dirty="0">
+                <a:solidFill>
+                  <a:srgbClr val="4AC8E8"/>
+                </a:solidFill>
+                <a:latin typeface="Consolas" pitchFamily="34" charset="0"/>
+                <a:ea typeface="Consolas" pitchFamily="34" charset="-122"/>
+                <a:cs typeface="Consolas" pitchFamily="34" charset="-120"/>
+              </a:rPr>
+              <a:t>main pass</a:t>
+            </a:r>
+            <a:endParaRPr lang="en-US" sz="1100" dirty="0"/>
+          </a:p>
+        </p:txBody>
+      </p:sp>
+      <p:sp>
+        <p:nvSpPr>
+          <p:cNvPr id="43" name="Shape 22">
+            <a:extLst>
+              <a:ext uri="{FF2B5EF4-FFF2-40B4-BE49-F238E27FC236}">
+                <a16:creationId xmlns:a16="http://schemas.microsoft.com/office/drawing/2014/main" id="{A99DB8CB-A7D9-8EA8-0808-D399AD5D652E}"/>
+              </a:ext>
+            </a:extLst>
+          </p:cNvPr>
+          <p:cNvSpPr/>
+          <p:nvPr/>
+        </p:nvSpPr>
+        <p:spPr>
+          <a:xfrm>
+            <a:off x="0" y="4800600"/>
+            <a:ext cx="9144000" cy="338328"/>
+          </a:xfrm>
+          <a:prstGeom prst="rect">
+            <a:avLst/>
+          </a:prstGeom>
+          <a:solidFill>
+            <a:srgbClr val="1A1E26"/>
+          </a:solidFill>
+          <a:ln w="12700">
+            <a:solidFill>
+              <a:srgbClr val="1A1E26"/>
+            </a:solidFill>
+            <a:prstDash val="solid"/>
+          </a:ln>
+        </p:spPr>
+        <p:txBody>
+          <a:bodyPr/>
+          <a:lstStyle/>
+          <a:p>
+            <a:endParaRPr lang="ru-RU"/>
+          </a:p>
+        </p:txBody>
+      </p:sp>
+      <p:sp>
+        <p:nvSpPr>
+          <p:cNvPr id="44" name="Text 23">
+            <a:extLst>
+              <a:ext uri="{FF2B5EF4-FFF2-40B4-BE49-F238E27FC236}">
+                <a16:creationId xmlns:a16="http://schemas.microsoft.com/office/drawing/2014/main" id="{3DAAFCFC-53DA-DA4E-DDDB-52C3C7F3D229}"/>
+              </a:ext>
+            </a:extLst>
+          </p:cNvPr>
+          <p:cNvSpPr/>
+          <p:nvPr/>
+        </p:nvSpPr>
+        <p:spPr>
+          <a:xfrm>
+            <a:off x="274320" y="4800600"/>
+            <a:ext cx="8595360" cy="338328"/>
+          </a:xfrm>
+          <a:prstGeom prst="rect">
+            <a:avLst/>
+          </a:prstGeom>
+          <a:noFill/>
+          <a:ln/>
+        </p:spPr>
+        <p:txBody>
+          <a:bodyPr wrap="square" lIns="0" tIns="0" rIns="0" bIns="0" rtlCol="0" anchor="ctr"/>
+          <a:lstStyle/>
+          <a:p>
+            <a:pPr marL="0" indent="0">
+              <a:buNone/>
+            </a:pPr>
+            <a:r>
+              <a:rPr lang="en-US" sz="1200" dirty="0">
+                <a:solidFill>
+                  <a:srgbClr val="CCCCCC"/>
+                </a:solidFill>
+                <a:latin typeface="Consolas" pitchFamily="34" charset="0"/>
+                <a:ea typeface="Consolas" pitchFamily="34" charset="-122"/>
+                <a:cs typeface="Consolas" pitchFamily="34" charset="-120"/>
+              </a:rPr>
+              <a:t>depth.frag je prázdny — GPU zapisuje hļbku automaticky. main.frag je kde sa odohráva shadow test.</a:t>
+            </a:r>
+            <a:endParaRPr lang="en-US" sz="1200" dirty="0"/>
+          </a:p>
+        </p:txBody>
+      </p:sp>
+    </p:spTree>
+    <p:extLst>
+      <p:ext uri="{BB962C8B-B14F-4D97-AF65-F5344CB8AC3E}">
+        <p14:creationId xmlns:p14="http://schemas.microsoft.com/office/powerpoint/2010/main" val="3429073148"/>
+      </p:ext>
+    </p:extLst>
+  </p:cSld>
+  <p:clrMapOvr>
+    <a:masterClrMapping/>
+  </p:clrMapOvr>
+</p:sld>
+</file>
+
+<file path=ppt/slides/slide8.xml><?xml version="1.0" encoding="utf-8"?>
 <p:sld xmlns:a="http://schemas.openxmlformats.org/drawingml/2006/main" xmlns:r="http://schemas.openxmlformats.org/officeDocument/2006/relationships" xmlns:p="http://schemas.openxmlformats.org/presentationml/2006/main">
   <p:cSld name="Slide 6">
     <p:bg>
@@ -12046,7 +15836,7 @@
 </p:sld>
 </file>
 
-<file path=ppt/slides/slide7.xml><?xml version="1.0" encoding="utf-8"?>
+<file path=ppt/slides/slide9.xml><?xml version="1.0" encoding="utf-8"?>
 <p:sld xmlns:a="http://schemas.openxmlformats.org/drawingml/2006/main" xmlns:r="http://schemas.openxmlformats.org/officeDocument/2006/relationships" xmlns:p="http://schemas.openxmlformats.org/presentationml/2006/main">
   <p:cSld name="Slide 7">
     <p:bg>
@@ -13657,1610 +17447,6 @@
                 <a:cs typeface="Consolas" pitchFamily="34" charset="-120"/>
               </a:rPr>
               <a:t>lightSpaceMatrix nám hovorí kde bol fragment z pohľadu svetla — to isté čo view×projection pre kameru.</a:t>
-            </a:r>
-            <a:endParaRPr lang="en-US" sz="1200" dirty="0"/>
-          </a:p>
-        </p:txBody>
-      </p:sp>
-    </p:spTree>
-  </p:cSld>
-  <p:clrMapOvr>
-    <a:masterClrMapping/>
-  </p:clrMapOvr>
-</p:sld>
-</file>
-
-<file path=ppt/slides/slide8.xml><?xml version="1.0" encoding="utf-8"?>
-<p:sld xmlns:a="http://schemas.openxmlformats.org/drawingml/2006/main" xmlns:r="http://schemas.openxmlformats.org/officeDocument/2006/relationships" xmlns:p="http://schemas.openxmlformats.org/presentationml/2006/main">
-  <p:cSld name="Slide 8">
-    <p:bg>
-      <p:bgPr>
-        <a:solidFill>
-          <a:srgbClr val="12151A"/>
-        </a:solidFill>
-        <a:effectLst/>
-      </p:bgPr>
-    </p:bg>
-    <p:spTree>
-      <p:nvGrpSpPr>
-        <p:cNvPr id="1" name=""/>
-        <p:cNvGrpSpPr/>
-        <p:nvPr/>
-      </p:nvGrpSpPr>
-      <p:grpSpPr>
-        <a:xfrm>
-          <a:off x="0" y="0"/>
-          <a:ext cx="0" cy="0"/>
-          <a:chOff x="0" y="0"/>
-          <a:chExt cx="0" cy="0"/>
-        </a:xfrm>
-      </p:grpSpPr>
-      <p:sp>
-        <p:nvSpPr>
-          <p:cNvPr id="2" name="Shape 0"/>
-          <p:cNvSpPr/>
-          <p:nvPr/>
-        </p:nvSpPr>
-        <p:spPr>
-          <a:xfrm>
-            <a:off x="0" y="0"/>
-            <a:ext cx="9144000" cy="292608"/>
-          </a:xfrm>
-          <a:prstGeom prst="rect">
-            <a:avLst/>
-          </a:prstGeom>
-          <a:solidFill>
-            <a:srgbClr val="1A1E26"/>
-          </a:solidFill>
-          <a:ln w="12700">
-            <a:solidFill>
-              <a:srgbClr val="1A1E26"/>
-            </a:solidFill>
-            <a:prstDash val="solid"/>
-          </a:ln>
-        </p:spPr>
-        <p:txBody>
-          <a:bodyPr/>
-          <a:lstStyle/>
-          <a:p>
-            <a:endParaRPr lang="ru-RU"/>
-          </a:p>
-        </p:txBody>
-      </p:sp>
-      <p:sp>
-        <p:nvSpPr>
-          <p:cNvPr id="3" name="Text 1"/>
-          <p:cNvSpPr/>
-          <p:nvPr/>
-        </p:nvSpPr>
-        <p:spPr>
-          <a:xfrm>
-            <a:off x="164592" y="0"/>
-            <a:ext cx="6400800" cy="292608"/>
-          </a:xfrm>
-          <a:prstGeom prst="rect">
-            <a:avLst/>
-          </a:prstGeom>
-          <a:noFill/>
-          <a:ln/>
-        </p:spPr>
-        <p:txBody>
-          <a:bodyPr wrap="square" lIns="0" tIns="0" rIns="0" bIns="0" rtlCol="0" anchor="ctr"/>
-          <a:lstStyle/>
-          <a:p>
-            <a:pPr marL="0" indent="0">
-              <a:buNone/>
-            </a:pPr>
-            <a:r>
-              <a:rPr lang="en-US" sz="1100" dirty="0">
-                <a:solidFill>
-                  <a:srgbClr val="888888"/>
-                </a:solidFill>
-                <a:latin typeface="Consolas" pitchFamily="34" charset="0"/>
-                <a:ea typeface="Consolas" pitchFamily="34" charset="-122"/>
-                <a:cs typeface="Consolas" pitchFamily="34" charset="-120"/>
-              </a:rPr>
-              <a:t>// light space matrix — projekcia</a:t>
-            </a:r>
-            <a:endParaRPr lang="en-US" sz="1100" dirty="0"/>
-          </a:p>
-        </p:txBody>
-      </p:sp>
-      <p:sp>
-        <p:nvSpPr>
-          <p:cNvPr id="4" name="Text 2"/>
-          <p:cNvSpPr/>
-          <p:nvPr/>
-        </p:nvSpPr>
-        <p:spPr>
-          <a:xfrm>
-            <a:off x="7772400" y="0"/>
-            <a:ext cx="1280160" cy="292608"/>
-          </a:xfrm>
-          <a:prstGeom prst="rect">
-            <a:avLst/>
-          </a:prstGeom>
-          <a:noFill/>
-          <a:ln/>
-        </p:spPr>
-        <p:txBody>
-          <a:bodyPr wrap="square" lIns="0" tIns="0" rIns="0" bIns="0" rtlCol="0" anchor="ctr"/>
-          <a:lstStyle/>
-          <a:p>
-            <a:pPr marL="0" indent="0" algn="r">
-              <a:buNone/>
-            </a:pPr>
-            <a:r>
-              <a:rPr lang="en-US" sz="1100" dirty="0">
-                <a:solidFill>
-                  <a:srgbClr val="888888"/>
-                </a:solidFill>
-                <a:latin typeface="Consolas" pitchFamily="34" charset="0"/>
-                <a:ea typeface="Consolas" pitchFamily="34" charset="-122"/>
-                <a:cs typeface="Consolas" pitchFamily="34" charset="-120"/>
-              </a:rPr>
-              <a:t>~2 min</a:t>
-            </a:r>
-            <a:endParaRPr lang="en-US" sz="1100" dirty="0"/>
-          </a:p>
-        </p:txBody>
-      </p:sp>
-      <p:sp>
-        <p:nvSpPr>
-          <p:cNvPr id="5" name="Shape 3"/>
-          <p:cNvSpPr/>
-          <p:nvPr/>
-        </p:nvSpPr>
-        <p:spPr>
-          <a:xfrm>
-            <a:off x="164592" y="402336"/>
-            <a:ext cx="1005840" cy="256032"/>
-          </a:xfrm>
-          <a:prstGeom prst="rect">
-            <a:avLst/>
-          </a:prstGeom>
-          <a:solidFill>
-            <a:srgbClr val="1A1E26"/>
-          </a:solidFill>
-          <a:ln w="12700">
-            <a:solidFill>
-              <a:srgbClr val="E8724A"/>
-            </a:solidFill>
-            <a:prstDash val="solid"/>
-          </a:ln>
-        </p:spPr>
-        <p:txBody>
-          <a:bodyPr/>
-          <a:lstStyle/>
-          <a:p>
-            <a:endParaRPr lang="ru-RU"/>
-          </a:p>
-        </p:txBody>
-      </p:sp>
-      <p:sp>
-        <p:nvSpPr>
-          <p:cNvPr id="6" name="Text 4"/>
-          <p:cNvSpPr/>
-          <p:nvPr/>
-        </p:nvSpPr>
-        <p:spPr>
-          <a:xfrm>
-            <a:off x="164592" y="402336"/>
-            <a:ext cx="1005840" cy="256032"/>
-          </a:xfrm>
-          <a:prstGeom prst="rect">
-            <a:avLst/>
-          </a:prstGeom>
-          <a:noFill/>
-          <a:ln/>
-        </p:spPr>
-        <p:txBody>
-          <a:bodyPr wrap="square" lIns="0" tIns="0" rIns="0" bIns="0" rtlCol="0" anchor="ctr"/>
-          <a:lstStyle/>
-          <a:p>
-            <a:pPr marL="0" indent="0" algn="ctr">
-              <a:buNone/>
-            </a:pPr>
-            <a:r>
-              <a:rPr lang="en-US" sz="1000" dirty="0">
-                <a:solidFill>
-                  <a:srgbClr val="E8724A"/>
-                </a:solidFill>
-                <a:latin typeface="Consolas" pitchFamily="34" charset="0"/>
-                <a:ea typeface="Consolas" pitchFamily="34" charset="-122"/>
-                <a:cs typeface="Consolas" pitchFamily="34" charset="-120"/>
-              </a:rPr>
-              <a:t>TEÓRIA</a:t>
-            </a:r>
-            <a:endParaRPr lang="en-US" sz="1000" dirty="0"/>
-          </a:p>
-        </p:txBody>
-      </p:sp>
-      <p:sp>
-        <p:nvSpPr>
-          <p:cNvPr id="7" name="Text 5"/>
-          <p:cNvSpPr/>
-          <p:nvPr/>
-        </p:nvSpPr>
-        <p:spPr>
-          <a:xfrm>
-            <a:off x="320040" y="777240"/>
-            <a:ext cx="8503920" cy="594360"/>
-          </a:xfrm>
-          <a:prstGeom prst="rect">
-            <a:avLst/>
-          </a:prstGeom>
-          <a:noFill/>
-          <a:ln/>
-        </p:spPr>
-        <p:txBody>
-          <a:bodyPr wrap="square" lIns="0" tIns="0" rIns="0" bIns="0" rtlCol="0" anchor="ctr"/>
-          <a:lstStyle/>
-          <a:p>
-            <a:pPr marL="0" indent="0">
-              <a:buNone/>
-            </a:pPr>
-            <a:r>
-              <a:rPr lang="en-US" sz="3200" b="1" dirty="0">
-                <a:solidFill>
-                  <a:srgbClr val="FFFFFF"/>
-                </a:solidFill>
-                <a:latin typeface="Calibri" pitchFamily="34" charset="0"/>
-                <a:ea typeface="Calibri" pitchFamily="34" charset="-122"/>
-                <a:cs typeface="Calibri" pitchFamily="34" charset="-120"/>
-              </a:rPr>
-              <a:t>Light Projection — ortho vs perspective</a:t>
-            </a:r>
-            <a:endParaRPr lang="en-US" sz="3200" dirty="0"/>
-          </a:p>
-        </p:txBody>
-      </p:sp>
-      <p:sp>
-        <p:nvSpPr>
-          <p:cNvPr id="9" name="Shape 6"/>
-          <p:cNvSpPr/>
-          <p:nvPr/>
-        </p:nvSpPr>
-        <p:spPr>
-          <a:xfrm>
-            <a:off x="164592" y="4572000"/>
-            <a:ext cx="4297680" cy="411480"/>
-          </a:xfrm>
-          <a:prstGeom prst="rect">
-            <a:avLst/>
-          </a:prstGeom>
-          <a:solidFill>
-            <a:srgbClr val="1E2330"/>
-          </a:solidFill>
-          <a:ln w="12700">
-            <a:solidFill>
-              <a:srgbClr val="E8C44A"/>
-            </a:solidFill>
-            <a:prstDash val="solid"/>
-          </a:ln>
-        </p:spPr>
-        <p:txBody>
-          <a:bodyPr/>
-          <a:lstStyle/>
-          <a:p>
-            <a:endParaRPr lang="ru-RU"/>
-          </a:p>
-        </p:txBody>
-      </p:sp>
-      <p:sp>
-        <p:nvSpPr>
-          <p:cNvPr id="10" name="Text 7"/>
-          <p:cNvSpPr/>
-          <p:nvPr/>
-        </p:nvSpPr>
-        <p:spPr>
-          <a:xfrm>
-            <a:off x="292608" y="4663440"/>
-            <a:ext cx="4041648" cy="292608"/>
-          </a:xfrm>
-          <a:prstGeom prst="rect">
-            <a:avLst/>
-          </a:prstGeom>
-          <a:noFill/>
-          <a:ln/>
-        </p:spPr>
-        <p:txBody>
-          <a:bodyPr wrap="square" lIns="0" tIns="0" rIns="0" bIns="0" rtlCol="0" anchor="ctr"/>
-          <a:lstStyle/>
-          <a:p>
-            <a:pPr marL="0" indent="0">
-              <a:buNone/>
-            </a:pPr>
-            <a:r>
-              <a:rPr lang="en-US" sz="1300" b="1" dirty="0">
-                <a:solidFill>
-                  <a:srgbClr val="E8C44A"/>
-                </a:solidFill>
-                <a:latin typeface="Consolas" pitchFamily="34" charset="0"/>
-                <a:ea typeface="Consolas" pitchFamily="34" charset="-122"/>
-                <a:cs typeface="Consolas" pitchFamily="34" charset="-120"/>
-              </a:rPr>
-              <a:t>Smerové svetlo (slnko) → ortho</a:t>
-            </a:r>
-            <a:endParaRPr lang="en-US" sz="1300" dirty="0"/>
-          </a:p>
-        </p:txBody>
-      </p:sp>
-      <p:sp>
-        <p:nvSpPr>
-          <p:cNvPr id="11" name="Shape 8"/>
-          <p:cNvSpPr/>
-          <p:nvPr/>
-        </p:nvSpPr>
-        <p:spPr>
-          <a:xfrm>
-            <a:off x="4663440" y="4572000"/>
-            <a:ext cx="4315968" cy="411480"/>
-          </a:xfrm>
-          <a:prstGeom prst="rect">
-            <a:avLst/>
-          </a:prstGeom>
-          <a:solidFill>
-            <a:srgbClr val="1E2330"/>
-          </a:solidFill>
-          <a:ln w="12700">
-            <a:solidFill>
-              <a:srgbClr val="4AC8E8"/>
-            </a:solidFill>
-            <a:prstDash val="solid"/>
-          </a:ln>
-        </p:spPr>
-        <p:txBody>
-          <a:bodyPr/>
-          <a:lstStyle/>
-          <a:p>
-            <a:endParaRPr lang="ru-RU"/>
-          </a:p>
-        </p:txBody>
-      </p:sp>
-      <p:sp>
-        <p:nvSpPr>
-          <p:cNvPr id="12" name="Text 9"/>
-          <p:cNvSpPr/>
-          <p:nvPr/>
-        </p:nvSpPr>
-        <p:spPr>
-          <a:xfrm>
-            <a:off x="4791456" y="4663440"/>
-            <a:ext cx="4059936" cy="292608"/>
-          </a:xfrm>
-          <a:prstGeom prst="rect">
-            <a:avLst/>
-          </a:prstGeom>
-          <a:noFill/>
-          <a:ln/>
-        </p:spPr>
-        <p:txBody>
-          <a:bodyPr wrap="square" lIns="0" tIns="0" rIns="0" bIns="0" rtlCol="0" anchor="ctr"/>
-          <a:lstStyle/>
-          <a:p>
-            <a:pPr marL="0" indent="0">
-              <a:buNone/>
-            </a:pPr>
-            <a:r>
-              <a:rPr lang="en-US" sz="1300" b="1" dirty="0">
-                <a:solidFill>
-                  <a:srgbClr val="4AC8E8"/>
-                </a:solidFill>
-                <a:latin typeface="Consolas" pitchFamily="34" charset="0"/>
-                <a:ea typeface="Consolas" pitchFamily="34" charset="-122"/>
-                <a:cs typeface="Consolas" pitchFamily="34" charset="-120"/>
-              </a:rPr>
-              <a:t>Bodové svetlo (žiarovka) → perspective</a:t>
-            </a:r>
-            <a:endParaRPr lang="en-US" sz="1300" dirty="0"/>
-          </a:p>
-        </p:txBody>
-      </p:sp>
-      <p:pic>
-        <p:nvPicPr>
-          <p:cNvPr id="3076" name="Picture 4" descr="Colors, Depth Testing, and Alpha Blending | Real-Time 3D Graphics with  WebGL 2">
-            <a:extLst>
-              <a:ext uri="{FF2B5EF4-FFF2-40B4-BE49-F238E27FC236}">
-                <a16:creationId xmlns:a16="http://schemas.microsoft.com/office/drawing/2014/main" id="{2EA49F5F-7F24-0DD6-22DA-4364622924B7}"/>
-              </a:ext>
-            </a:extLst>
-          </p:cNvPr>
-          <p:cNvPicPr>
-            <a:picLocks noChangeAspect="1" noChangeArrowheads="1"/>
-          </p:cNvPicPr>
-          <p:nvPr/>
-        </p:nvPicPr>
-        <p:blipFill>
-          <a:blip r:embed="rId3">
-            <a:extLst>
-              <a:ext uri="{28A0092B-C50C-407E-A947-70E740481C1C}">
-                <a14:useLocalDpi xmlns:a14="http://schemas.microsoft.com/office/drawing/2010/main" val="0"/>
-              </a:ext>
-            </a:extLst>
-          </a:blip>
-          <a:srcRect/>
-          <a:stretch>
-            <a:fillRect/>
-          </a:stretch>
-        </p:blipFill>
-        <p:spPr bwMode="auto">
-          <a:xfrm>
-            <a:off x="1561359" y="1371600"/>
-            <a:ext cx="6192753" cy="2997465"/>
-          </a:xfrm>
-          <a:prstGeom prst="rect">
-            <a:avLst/>
-          </a:prstGeom>
-          <a:noFill/>
-          <a:extLst>
-            <a:ext uri="{909E8E84-426E-40DD-AFC4-6F175D3DCCD1}">
-              <a14:hiddenFill xmlns:a14="http://schemas.microsoft.com/office/drawing/2010/main">
-                <a:solidFill>
-                  <a:srgbClr val="FFFFFF"/>
-                </a:solidFill>
-              </a14:hiddenFill>
-            </a:ext>
-          </a:extLst>
-        </p:spPr>
-      </p:pic>
-    </p:spTree>
-  </p:cSld>
-  <p:clrMapOvr>
-    <a:masterClrMapping/>
-  </p:clrMapOvr>
-</p:sld>
-</file>
-
-<file path=ppt/slides/slide9.xml><?xml version="1.0" encoding="utf-8"?>
-<p:sld xmlns:a="http://schemas.openxmlformats.org/drawingml/2006/main" xmlns:r="http://schemas.openxmlformats.org/officeDocument/2006/relationships" xmlns:p="http://schemas.openxmlformats.org/presentationml/2006/main">
-  <p:cSld name="Slide 9">
-    <p:bg>
-      <p:bgPr>
-        <a:solidFill>
-          <a:srgbClr val="12151A"/>
-        </a:solidFill>
-        <a:effectLst/>
-      </p:bgPr>
-    </p:bg>
-    <p:spTree>
-      <p:nvGrpSpPr>
-        <p:cNvPr id="1" name=""/>
-        <p:cNvGrpSpPr/>
-        <p:nvPr/>
-      </p:nvGrpSpPr>
-      <p:grpSpPr>
-        <a:xfrm>
-          <a:off x="0" y="0"/>
-          <a:ext cx="0" cy="0"/>
-          <a:chOff x="0" y="0"/>
-          <a:chExt cx="0" cy="0"/>
-        </a:xfrm>
-      </p:grpSpPr>
-      <p:sp>
-        <p:nvSpPr>
-          <p:cNvPr id="2" name="Shape 0"/>
-          <p:cNvSpPr/>
-          <p:nvPr/>
-        </p:nvSpPr>
-        <p:spPr>
-          <a:xfrm>
-            <a:off x="0" y="0"/>
-            <a:ext cx="9144000" cy="292608"/>
-          </a:xfrm>
-          <a:prstGeom prst="rect">
-            <a:avLst/>
-          </a:prstGeom>
-          <a:solidFill>
-            <a:srgbClr val="1A1E26"/>
-          </a:solidFill>
-          <a:ln w="12700">
-            <a:solidFill>
-              <a:srgbClr val="1A1E26"/>
-            </a:solidFill>
-            <a:prstDash val="solid"/>
-          </a:ln>
-        </p:spPr>
-        <p:txBody>
-          <a:bodyPr/>
-          <a:lstStyle/>
-          <a:p>
-            <a:endParaRPr lang="ru-RU"/>
-          </a:p>
-        </p:txBody>
-      </p:sp>
-      <p:sp>
-        <p:nvSpPr>
-          <p:cNvPr id="3" name="Text 1"/>
-          <p:cNvSpPr/>
-          <p:nvPr/>
-        </p:nvSpPr>
-        <p:spPr>
-          <a:xfrm>
-            <a:off x="164592" y="0"/>
-            <a:ext cx="6400800" cy="292608"/>
-          </a:xfrm>
-          <a:prstGeom prst="rect">
-            <a:avLst/>
-          </a:prstGeom>
-          <a:noFill/>
-          <a:ln/>
-        </p:spPr>
-        <p:txBody>
-          <a:bodyPr wrap="square" lIns="0" tIns="0" rIns="0" bIns="0" rtlCol="0" anchor="ctr"/>
-          <a:lstStyle/>
-          <a:p>
-            <a:pPr marL="0" indent="0">
-              <a:buNone/>
-            </a:pPr>
-            <a:r>
-              <a:rPr lang="en-US" sz="1100" dirty="0">
-                <a:solidFill>
-                  <a:srgbClr val="888888"/>
-                </a:solidFill>
-                <a:latin typeface="Consolas" pitchFamily="34" charset="0"/>
-                <a:ea typeface="Consolas" pitchFamily="34" charset="-122"/>
-                <a:cs typeface="Consolas" pitchFamily="34" charset="-120"/>
-              </a:rPr>
-              <a:t>// pass 2 — shadow test — transformácia</a:t>
-            </a:r>
-            <a:endParaRPr lang="en-US" sz="1100" dirty="0"/>
-          </a:p>
-        </p:txBody>
-      </p:sp>
-      <p:sp>
-        <p:nvSpPr>
-          <p:cNvPr id="4" name="Text 2"/>
-          <p:cNvSpPr/>
-          <p:nvPr/>
-        </p:nvSpPr>
-        <p:spPr>
-          <a:xfrm>
-            <a:off x="7772400" y="0"/>
-            <a:ext cx="1280160" cy="292608"/>
-          </a:xfrm>
-          <a:prstGeom prst="rect">
-            <a:avLst/>
-          </a:prstGeom>
-          <a:noFill/>
-          <a:ln/>
-        </p:spPr>
-        <p:txBody>
-          <a:bodyPr wrap="square" lIns="0" tIns="0" rIns="0" bIns="0" rtlCol="0" anchor="ctr"/>
-          <a:lstStyle/>
-          <a:p>
-            <a:pPr marL="0" indent="0" algn="r">
-              <a:buNone/>
-            </a:pPr>
-            <a:r>
-              <a:rPr lang="en-US" sz="1100" dirty="0">
-                <a:solidFill>
-                  <a:srgbClr val="888888"/>
-                </a:solidFill>
-                <a:latin typeface="Consolas" pitchFamily="34" charset="0"/>
-                <a:ea typeface="Consolas" pitchFamily="34" charset="-122"/>
-                <a:cs typeface="Consolas" pitchFamily="34" charset="-120"/>
-              </a:rPr>
-              <a:t>~2 min</a:t>
-            </a:r>
-            <a:endParaRPr lang="en-US" sz="1100" dirty="0"/>
-          </a:p>
-        </p:txBody>
-      </p:sp>
-      <p:sp>
-        <p:nvSpPr>
-          <p:cNvPr id="5" name="Shape 3"/>
-          <p:cNvSpPr/>
-          <p:nvPr/>
-        </p:nvSpPr>
-        <p:spPr>
-          <a:xfrm>
-            <a:off x="164592" y="402336"/>
-            <a:ext cx="1005840" cy="256032"/>
-          </a:xfrm>
-          <a:prstGeom prst="rect">
-            <a:avLst/>
-          </a:prstGeom>
-          <a:solidFill>
-            <a:srgbClr val="1A1E26"/>
-          </a:solidFill>
-          <a:ln w="12700">
-            <a:solidFill>
-              <a:srgbClr val="E8724A"/>
-            </a:solidFill>
-            <a:prstDash val="solid"/>
-          </a:ln>
-        </p:spPr>
-        <p:txBody>
-          <a:bodyPr/>
-          <a:lstStyle/>
-          <a:p>
-            <a:endParaRPr lang="ru-RU"/>
-          </a:p>
-        </p:txBody>
-      </p:sp>
-      <p:sp>
-        <p:nvSpPr>
-          <p:cNvPr id="6" name="Text 4"/>
-          <p:cNvSpPr/>
-          <p:nvPr/>
-        </p:nvSpPr>
-        <p:spPr>
-          <a:xfrm>
-            <a:off x="164592" y="402336"/>
-            <a:ext cx="1005840" cy="256032"/>
-          </a:xfrm>
-          <a:prstGeom prst="rect">
-            <a:avLst/>
-          </a:prstGeom>
-          <a:noFill/>
-          <a:ln/>
-        </p:spPr>
-        <p:txBody>
-          <a:bodyPr wrap="square" lIns="0" tIns="0" rIns="0" bIns="0" rtlCol="0" anchor="ctr"/>
-          <a:lstStyle/>
-          <a:p>
-            <a:pPr marL="0" indent="0" algn="ctr">
-              <a:buNone/>
-            </a:pPr>
-            <a:r>
-              <a:rPr lang="en-US" sz="1000" dirty="0">
-                <a:solidFill>
-                  <a:srgbClr val="E8724A"/>
-                </a:solidFill>
-                <a:latin typeface="Consolas" pitchFamily="34" charset="0"/>
-                <a:ea typeface="Consolas" pitchFamily="34" charset="-122"/>
-                <a:cs typeface="Consolas" pitchFamily="34" charset="-120"/>
-              </a:rPr>
-              <a:t>TEÓRIA</a:t>
-            </a:r>
-            <a:endParaRPr lang="en-US" sz="1000" dirty="0"/>
-          </a:p>
-        </p:txBody>
-      </p:sp>
-      <p:sp>
-        <p:nvSpPr>
-          <p:cNvPr id="7" name="Text 5"/>
-          <p:cNvSpPr/>
-          <p:nvPr/>
-        </p:nvSpPr>
-        <p:spPr>
-          <a:xfrm>
-            <a:off x="320040" y="777240"/>
-            <a:ext cx="8503920" cy="594360"/>
-          </a:xfrm>
-          <a:prstGeom prst="rect">
-            <a:avLst/>
-          </a:prstGeom>
-          <a:noFill/>
-          <a:ln/>
-        </p:spPr>
-        <p:txBody>
-          <a:bodyPr wrap="square" lIns="0" tIns="0" rIns="0" bIns="0" rtlCol="0" anchor="ctr"/>
-          <a:lstStyle/>
-          <a:p>
-            <a:pPr marL="0" indent="0">
-              <a:buNone/>
-            </a:pPr>
-            <a:r>
-              <a:rPr lang="en-US" sz="3200" b="1" dirty="0">
-                <a:solidFill>
-                  <a:srgbClr val="FFFFFF"/>
-                </a:solidFill>
-                <a:latin typeface="Calibri" pitchFamily="34" charset="0"/>
-                <a:ea typeface="Calibri" pitchFamily="34" charset="-122"/>
-                <a:cs typeface="Calibri" pitchFamily="34" charset="-120"/>
-              </a:rPr>
-              <a:t>Shadow test — transformácia fragmentu</a:t>
-            </a:r>
-            <a:endParaRPr lang="en-US" sz="3200" dirty="0"/>
-          </a:p>
-        </p:txBody>
-      </p:sp>
-      <p:sp>
-        <p:nvSpPr>
-          <p:cNvPr id="8" name="Shape 6"/>
-          <p:cNvSpPr/>
-          <p:nvPr/>
-        </p:nvSpPr>
-        <p:spPr>
-          <a:xfrm>
-            <a:off x="164592" y="1508760"/>
-            <a:ext cx="1335024" cy="749808"/>
-          </a:xfrm>
-          <a:prstGeom prst="rect">
-            <a:avLst/>
-          </a:prstGeom>
-          <a:solidFill>
-            <a:srgbClr val="1E2330"/>
-          </a:solidFill>
-          <a:ln w="12700">
-            <a:solidFill>
-              <a:srgbClr val="888888"/>
-            </a:solidFill>
-            <a:prstDash val="solid"/>
-          </a:ln>
-        </p:spPr>
-        <p:txBody>
-          <a:bodyPr/>
-          <a:lstStyle/>
-          <a:p>
-            <a:endParaRPr lang="ru-RU"/>
-          </a:p>
-        </p:txBody>
-      </p:sp>
-      <p:sp>
-        <p:nvSpPr>
-          <p:cNvPr id="9" name="Text 7"/>
-          <p:cNvSpPr/>
-          <p:nvPr/>
-        </p:nvSpPr>
-        <p:spPr>
-          <a:xfrm>
-            <a:off x="164592" y="1508760"/>
-            <a:ext cx="1335024" cy="749808"/>
-          </a:xfrm>
-          <a:prstGeom prst="rect">
-            <a:avLst/>
-          </a:prstGeom>
-          <a:noFill/>
-          <a:ln/>
-        </p:spPr>
-        <p:txBody>
-          <a:bodyPr wrap="square" lIns="0" tIns="0" rIns="0" bIns="0" rtlCol="0" anchor="ctr"/>
-          <a:lstStyle/>
-          <a:p>
-            <a:pPr marL="0" indent="0" algn="ctr">
-              <a:buNone/>
-            </a:pPr>
-            <a:r>
-              <a:rPr lang="en-US" sz="1100" b="1" dirty="0">
-                <a:solidFill>
-                  <a:srgbClr val="888888"/>
-                </a:solidFill>
-                <a:latin typeface="Consolas" pitchFamily="34" charset="0"/>
-                <a:ea typeface="Consolas" pitchFamily="34" charset="-122"/>
-                <a:cs typeface="Consolas" pitchFamily="34" charset="-120"/>
-              </a:rPr>
-              <a:t>World</a:t>
-            </a:r>
-            <a:endParaRPr lang="en-US" sz="1100" dirty="0"/>
-          </a:p>
-          <a:p>
-            <a:pPr marL="0" indent="0" algn="ctr">
-              <a:buNone/>
-            </a:pPr>
-            <a:r>
-              <a:rPr lang="en-US" sz="1100" b="1" dirty="0">
-                <a:solidFill>
-                  <a:srgbClr val="888888"/>
-                </a:solidFill>
-                <a:latin typeface="Consolas" pitchFamily="34" charset="0"/>
-                <a:ea typeface="Consolas" pitchFamily="34" charset="-122"/>
-                <a:cs typeface="Consolas" pitchFamily="34" charset="-120"/>
-              </a:rPr>
-              <a:t>space</a:t>
-            </a:r>
-            <a:endParaRPr lang="en-US" sz="1100" dirty="0"/>
-          </a:p>
-        </p:txBody>
-      </p:sp>
-      <p:sp>
-        <p:nvSpPr>
-          <p:cNvPr id="10" name="Shape 8"/>
-          <p:cNvSpPr/>
-          <p:nvPr/>
-        </p:nvSpPr>
-        <p:spPr>
-          <a:xfrm>
-            <a:off x="1517904" y="1883664"/>
-            <a:ext cx="164592" cy="0"/>
-          </a:xfrm>
-          <a:prstGeom prst="line">
-            <a:avLst/>
-          </a:prstGeom>
-          <a:noFill/>
-          <a:ln w="25400">
-            <a:solidFill>
-              <a:srgbClr val="E8724A"/>
-            </a:solidFill>
-            <a:prstDash val="solid"/>
-          </a:ln>
-        </p:spPr>
-        <p:txBody>
-          <a:bodyPr/>
-          <a:lstStyle/>
-          <a:p>
-            <a:endParaRPr lang="ru-RU"/>
-          </a:p>
-        </p:txBody>
-      </p:sp>
-      <p:sp>
-        <p:nvSpPr>
-          <p:cNvPr id="11" name="Shape 9"/>
-          <p:cNvSpPr/>
-          <p:nvPr/>
-        </p:nvSpPr>
-        <p:spPr>
-          <a:xfrm>
-            <a:off x="1700784" y="1508760"/>
-            <a:ext cx="1335024" cy="749808"/>
-          </a:xfrm>
-          <a:prstGeom prst="rect">
-            <a:avLst/>
-          </a:prstGeom>
-          <a:solidFill>
-            <a:srgbClr val="1E2330"/>
-          </a:solidFill>
-          <a:ln w="12700">
-            <a:solidFill>
-              <a:srgbClr val="E8C44A"/>
-            </a:solidFill>
-            <a:prstDash val="solid"/>
-          </a:ln>
-        </p:spPr>
-        <p:txBody>
-          <a:bodyPr/>
-          <a:lstStyle/>
-          <a:p>
-            <a:endParaRPr lang="ru-RU"/>
-          </a:p>
-        </p:txBody>
-      </p:sp>
-      <p:sp>
-        <p:nvSpPr>
-          <p:cNvPr id="12" name="Text 10"/>
-          <p:cNvSpPr/>
-          <p:nvPr/>
-        </p:nvSpPr>
-        <p:spPr>
-          <a:xfrm>
-            <a:off x="1700784" y="1508760"/>
-            <a:ext cx="1335024" cy="749808"/>
-          </a:xfrm>
-          <a:prstGeom prst="rect">
-            <a:avLst/>
-          </a:prstGeom>
-          <a:noFill/>
-          <a:ln/>
-        </p:spPr>
-        <p:txBody>
-          <a:bodyPr wrap="square" lIns="0" tIns="0" rIns="0" bIns="0" rtlCol="0" anchor="ctr"/>
-          <a:lstStyle/>
-          <a:p>
-            <a:pPr marL="0" indent="0" algn="ctr">
-              <a:buNone/>
-            </a:pPr>
-            <a:r>
-              <a:rPr lang="en-US" sz="1100" b="1" dirty="0">
-                <a:solidFill>
-                  <a:srgbClr val="E8C44A"/>
-                </a:solidFill>
-                <a:latin typeface="Consolas" pitchFamily="34" charset="0"/>
-                <a:ea typeface="Consolas" pitchFamily="34" charset="-122"/>
-                <a:cs typeface="Consolas" pitchFamily="34" charset="-120"/>
-              </a:rPr>
-              <a:t>Light</a:t>
-            </a:r>
-            <a:endParaRPr lang="en-US" sz="1100" dirty="0"/>
-          </a:p>
-          <a:p>
-            <a:pPr marL="0" indent="0" algn="ctr">
-              <a:buNone/>
-            </a:pPr>
-            <a:r>
-              <a:rPr lang="en-US" sz="1100" b="1" dirty="0">
-                <a:solidFill>
-                  <a:srgbClr val="E8C44A"/>
-                </a:solidFill>
-                <a:latin typeface="Consolas" pitchFamily="34" charset="0"/>
-                <a:ea typeface="Consolas" pitchFamily="34" charset="-122"/>
-                <a:cs typeface="Consolas" pitchFamily="34" charset="-120"/>
-              </a:rPr>
-              <a:t>view</a:t>
-            </a:r>
-            <a:endParaRPr lang="en-US" sz="1100" dirty="0"/>
-          </a:p>
-        </p:txBody>
-      </p:sp>
-      <p:sp>
-        <p:nvSpPr>
-          <p:cNvPr id="13" name="Shape 11"/>
-          <p:cNvSpPr/>
-          <p:nvPr/>
-        </p:nvSpPr>
-        <p:spPr>
-          <a:xfrm>
-            <a:off x="3054096" y="1883664"/>
-            <a:ext cx="164592" cy="0"/>
-          </a:xfrm>
-          <a:prstGeom prst="line">
-            <a:avLst/>
-          </a:prstGeom>
-          <a:noFill/>
-          <a:ln w="25400">
-            <a:solidFill>
-              <a:srgbClr val="E8724A"/>
-            </a:solidFill>
-            <a:prstDash val="solid"/>
-          </a:ln>
-        </p:spPr>
-        <p:txBody>
-          <a:bodyPr/>
-          <a:lstStyle/>
-          <a:p>
-            <a:endParaRPr lang="ru-RU"/>
-          </a:p>
-        </p:txBody>
-      </p:sp>
-      <p:sp>
-        <p:nvSpPr>
-          <p:cNvPr id="14" name="Shape 12"/>
-          <p:cNvSpPr/>
-          <p:nvPr/>
-        </p:nvSpPr>
-        <p:spPr>
-          <a:xfrm>
-            <a:off x="3236976" y="1508760"/>
-            <a:ext cx="1335024" cy="749808"/>
-          </a:xfrm>
-          <a:prstGeom prst="rect">
-            <a:avLst/>
-          </a:prstGeom>
-          <a:solidFill>
-            <a:srgbClr val="1E2330"/>
-          </a:solidFill>
-          <a:ln w="12700">
-            <a:solidFill>
-              <a:srgbClr val="E8724A"/>
-            </a:solidFill>
-            <a:prstDash val="solid"/>
-          </a:ln>
-        </p:spPr>
-        <p:txBody>
-          <a:bodyPr/>
-          <a:lstStyle/>
-          <a:p>
-            <a:endParaRPr lang="ru-RU"/>
-          </a:p>
-        </p:txBody>
-      </p:sp>
-      <p:sp>
-        <p:nvSpPr>
-          <p:cNvPr id="15" name="Text 13"/>
-          <p:cNvSpPr/>
-          <p:nvPr/>
-        </p:nvSpPr>
-        <p:spPr>
-          <a:xfrm>
-            <a:off x="3236976" y="1508760"/>
-            <a:ext cx="1335024" cy="749808"/>
-          </a:xfrm>
-          <a:prstGeom prst="rect">
-            <a:avLst/>
-          </a:prstGeom>
-          <a:noFill/>
-          <a:ln/>
-        </p:spPr>
-        <p:txBody>
-          <a:bodyPr wrap="square" lIns="0" tIns="0" rIns="0" bIns="0" rtlCol="0" anchor="ctr"/>
-          <a:lstStyle/>
-          <a:p>
-            <a:pPr marL="0" indent="0" algn="ctr">
-              <a:buNone/>
-            </a:pPr>
-            <a:r>
-              <a:rPr lang="en-US" sz="1100" b="1" dirty="0">
-                <a:solidFill>
-                  <a:srgbClr val="E8724A"/>
-                </a:solidFill>
-                <a:latin typeface="Consolas" pitchFamily="34" charset="0"/>
-                <a:ea typeface="Consolas" pitchFamily="34" charset="-122"/>
-                <a:cs typeface="Consolas" pitchFamily="34" charset="-120"/>
-              </a:rPr>
-              <a:t>Light</a:t>
-            </a:r>
-            <a:endParaRPr lang="en-US" sz="1100" dirty="0"/>
-          </a:p>
-          <a:p>
-            <a:pPr marL="0" indent="0" algn="ctr">
-              <a:buNone/>
-            </a:pPr>
-            <a:r>
-              <a:rPr lang="en-US" sz="1100" b="1" dirty="0">
-                <a:solidFill>
-                  <a:srgbClr val="E8724A"/>
-                </a:solidFill>
-                <a:latin typeface="Consolas" pitchFamily="34" charset="0"/>
-                <a:ea typeface="Consolas" pitchFamily="34" charset="-122"/>
-                <a:cs typeface="Consolas" pitchFamily="34" charset="-120"/>
-              </a:rPr>
-              <a:t>proj.</a:t>
-            </a:r>
-            <a:endParaRPr lang="en-US" sz="1100" dirty="0"/>
-          </a:p>
-        </p:txBody>
-      </p:sp>
-      <p:sp>
-        <p:nvSpPr>
-          <p:cNvPr id="16" name="Shape 14"/>
-          <p:cNvSpPr/>
-          <p:nvPr/>
-        </p:nvSpPr>
-        <p:spPr>
-          <a:xfrm>
-            <a:off x="4590288" y="1883664"/>
-            <a:ext cx="164592" cy="0"/>
-          </a:xfrm>
-          <a:prstGeom prst="line">
-            <a:avLst/>
-          </a:prstGeom>
-          <a:noFill/>
-          <a:ln w="25400">
-            <a:solidFill>
-              <a:srgbClr val="E8724A"/>
-            </a:solidFill>
-            <a:prstDash val="solid"/>
-          </a:ln>
-        </p:spPr>
-        <p:txBody>
-          <a:bodyPr/>
-          <a:lstStyle/>
-          <a:p>
-            <a:endParaRPr lang="ru-RU"/>
-          </a:p>
-        </p:txBody>
-      </p:sp>
-      <p:sp>
-        <p:nvSpPr>
-          <p:cNvPr id="17" name="Shape 15"/>
-          <p:cNvSpPr/>
-          <p:nvPr/>
-        </p:nvSpPr>
-        <p:spPr>
-          <a:xfrm>
-            <a:off x="4773168" y="1508760"/>
-            <a:ext cx="1335024" cy="749808"/>
-          </a:xfrm>
-          <a:prstGeom prst="rect">
-            <a:avLst/>
-          </a:prstGeom>
-          <a:solidFill>
-            <a:srgbClr val="1E2330"/>
-          </a:solidFill>
-          <a:ln w="12700">
-            <a:solidFill>
-              <a:srgbClr val="4AC8E8"/>
-            </a:solidFill>
-            <a:prstDash val="solid"/>
-          </a:ln>
-        </p:spPr>
-        <p:txBody>
-          <a:bodyPr/>
-          <a:lstStyle/>
-          <a:p>
-            <a:endParaRPr lang="ru-RU"/>
-          </a:p>
-        </p:txBody>
-      </p:sp>
-      <p:sp>
-        <p:nvSpPr>
-          <p:cNvPr id="18" name="Text 16"/>
-          <p:cNvSpPr/>
-          <p:nvPr/>
-        </p:nvSpPr>
-        <p:spPr>
-          <a:xfrm>
-            <a:off x="4773168" y="1508760"/>
-            <a:ext cx="1335024" cy="749808"/>
-          </a:xfrm>
-          <a:prstGeom prst="rect">
-            <a:avLst/>
-          </a:prstGeom>
-          <a:noFill/>
-          <a:ln/>
-        </p:spPr>
-        <p:txBody>
-          <a:bodyPr wrap="square" lIns="0" tIns="0" rIns="0" bIns="0" rtlCol="0" anchor="ctr"/>
-          <a:lstStyle/>
-          <a:p>
-            <a:pPr marL="0" indent="0" algn="ctr">
-              <a:buNone/>
-            </a:pPr>
-            <a:r>
-              <a:rPr lang="en-US" sz="1100" b="1" dirty="0">
-                <a:solidFill>
-                  <a:srgbClr val="4AC8E8"/>
-                </a:solidFill>
-                <a:latin typeface="Consolas" pitchFamily="34" charset="0"/>
-                <a:ea typeface="Consolas" pitchFamily="34" charset="-122"/>
-                <a:cs typeface="Consolas" pitchFamily="34" charset="-120"/>
-              </a:rPr>
-              <a:t>NDC</a:t>
-            </a:r>
-            <a:endParaRPr lang="en-US" sz="1100" dirty="0"/>
-          </a:p>
-          <a:p>
-            <a:pPr marL="0" indent="0" algn="ctr">
-              <a:buNone/>
-            </a:pPr>
-            <a:r>
-              <a:rPr lang="en-US" sz="1100" b="1" dirty="0">
-                <a:solidFill>
-                  <a:srgbClr val="4AC8E8"/>
-                </a:solidFill>
-                <a:latin typeface="Consolas" pitchFamily="34" charset="0"/>
-                <a:ea typeface="Consolas" pitchFamily="34" charset="-122"/>
-                <a:cs typeface="Consolas" pitchFamily="34" charset="-120"/>
-              </a:rPr>
-              <a:t>[-1,1]</a:t>
-            </a:r>
-            <a:endParaRPr lang="en-US" sz="1100" dirty="0"/>
-          </a:p>
-        </p:txBody>
-      </p:sp>
-      <p:sp>
-        <p:nvSpPr>
-          <p:cNvPr id="19" name="Shape 17"/>
-          <p:cNvSpPr/>
-          <p:nvPr/>
-        </p:nvSpPr>
-        <p:spPr>
-          <a:xfrm>
-            <a:off x="6126480" y="1883664"/>
-            <a:ext cx="164592" cy="0"/>
-          </a:xfrm>
-          <a:prstGeom prst="line">
-            <a:avLst/>
-          </a:prstGeom>
-          <a:noFill/>
-          <a:ln w="25400">
-            <a:solidFill>
-              <a:srgbClr val="E8724A"/>
-            </a:solidFill>
-            <a:prstDash val="solid"/>
-          </a:ln>
-        </p:spPr>
-        <p:txBody>
-          <a:bodyPr/>
-          <a:lstStyle/>
-          <a:p>
-            <a:endParaRPr lang="ru-RU"/>
-          </a:p>
-        </p:txBody>
-      </p:sp>
-      <p:sp>
-        <p:nvSpPr>
-          <p:cNvPr id="20" name="Shape 18"/>
-          <p:cNvSpPr/>
-          <p:nvPr/>
-        </p:nvSpPr>
-        <p:spPr>
-          <a:xfrm>
-            <a:off x="6309360" y="1508760"/>
-            <a:ext cx="1335024" cy="749808"/>
-          </a:xfrm>
-          <a:prstGeom prst="rect">
-            <a:avLst/>
-          </a:prstGeom>
-          <a:solidFill>
-            <a:srgbClr val="1E2330"/>
-          </a:solidFill>
-          <a:ln w="12700">
-            <a:solidFill>
-              <a:srgbClr val="4AE88A"/>
-            </a:solidFill>
-            <a:prstDash val="solid"/>
-          </a:ln>
-        </p:spPr>
-        <p:txBody>
-          <a:bodyPr/>
-          <a:lstStyle/>
-          <a:p>
-            <a:endParaRPr lang="ru-RU"/>
-          </a:p>
-        </p:txBody>
-      </p:sp>
-      <p:sp>
-        <p:nvSpPr>
-          <p:cNvPr id="21" name="Text 19"/>
-          <p:cNvSpPr/>
-          <p:nvPr/>
-        </p:nvSpPr>
-        <p:spPr>
-          <a:xfrm>
-            <a:off x="6309360" y="1508760"/>
-            <a:ext cx="1335024" cy="749808"/>
-          </a:xfrm>
-          <a:prstGeom prst="rect">
-            <a:avLst/>
-          </a:prstGeom>
-          <a:noFill/>
-          <a:ln/>
-        </p:spPr>
-        <p:txBody>
-          <a:bodyPr wrap="square" lIns="0" tIns="0" rIns="0" bIns="0" rtlCol="0" anchor="ctr"/>
-          <a:lstStyle/>
-          <a:p>
-            <a:pPr marL="0" indent="0" algn="ctr">
-              <a:buNone/>
-            </a:pPr>
-            <a:r>
-              <a:rPr lang="en-US" sz="1100" b="1" dirty="0">
-                <a:solidFill>
-                  <a:srgbClr val="4AE88A"/>
-                </a:solidFill>
-                <a:latin typeface="Consolas" pitchFamily="34" charset="0"/>
-                <a:ea typeface="Consolas" pitchFamily="34" charset="-122"/>
-                <a:cs typeface="Consolas" pitchFamily="34" charset="-120"/>
-              </a:rPr>
-              <a:t>UV</a:t>
-            </a:r>
-            <a:endParaRPr lang="en-US" sz="1100" dirty="0"/>
-          </a:p>
-          <a:p>
-            <a:pPr marL="0" indent="0" algn="ctr">
-              <a:buNone/>
-            </a:pPr>
-            <a:r>
-              <a:rPr lang="en-US" sz="1100" b="1" dirty="0">
-                <a:solidFill>
-                  <a:srgbClr val="4AE88A"/>
-                </a:solidFill>
-                <a:latin typeface="Consolas" pitchFamily="34" charset="0"/>
-                <a:ea typeface="Consolas" pitchFamily="34" charset="-122"/>
-                <a:cs typeface="Consolas" pitchFamily="34" charset="-120"/>
-              </a:rPr>
-              <a:t>[0,1]</a:t>
-            </a:r>
-            <a:endParaRPr lang="en-US" sz="1100" dirty="0"/>
-          </a:p>
-        </p:txBody>
-      </p:sp>
-      <p:pic>
-        <p:nvPicPr>
-          <p:cNvPr id="22" name="Image 0" descr="preencoded.png"/>
-          <p:cNvPicPr>
-            <a:picLocks noChangeAspect="1"/>
-          </p:cNvPicPr>
-          <p:nvPr/>
-        </p:nvPicPr>
-        <p:blipFill>
-          <a:blip r:embed="rId3"/>
-          <a:stretch>
-            <a:fillRect/>
-          </a:stretch>
-        </p:blipFill>
-        <p:spPr>
-          <a:xfrm>
-            <a:off x="164592" y="2377440"/>
-            <a:ext cx="4160520" cy="1965960"/>
-          </a:xfrm>
-          <a:prstGeom prst="rect">
-            <a:avLst/>
-          </a:prstGeom>
-        </p:spPr>
-      </p:pic>
-      <p:sp>
-        <p:nvSpPr>
-          <p:cNvPr id="23" name="Shape 20"/>
-          <p:cNvSpPr/>
-          <p:nvPr/>
-        </p:nvSpPr>
-        <p:spPr>
-          <a:xfrm>
-            <a:off x="4480560" y="2377440"/>
-            <a:ext cx="4498848" cy="896112"/>
-          </a:xfrm>
-          <a:prstGeom prst="rect">
-            <a:avLst/>
-          </a:prstGeom>
-          <a:solidFill>
-            <a:srgbClr val="1E2330"/>
-          </a:solidFill>
-          <a:ln w="12700">
-            <a:solidFill>
-              <a:srgbClr val="E8C44A"/>
-            </a:solidFill>
-            <a:prstDash val="solid"/>
-          </a:ln>
-        </p:spPr>
-        <p:txBody>
-          <a:bodyPr/>
-          <a:lstStyle/>
-          <a:p>
-            <a:endParaRPr lang="ru-RU"/>
-          </a:p>
-        </p:txBody>
-      </p:sp>
-      <p:sp>
-        <p:nvSpPr>
-          <p:cNvPr id="24" name="Text 21"/>
-          <p:cNvSpPr/>
-          <p:nvPr/>
-        </p:nvSpPr>
-        <p:spPr>
-          <a:xfrm>
-            <a:off x="4608576" y="2468880"/>
-            <a:ext cx="4242816" cy="292608"/>
-          </a:xfrm>
-          <a:prstGeom prst="rect">
-            <a:avLst/>
-          </a:prstGeom>
-          <a:noFill/>
-          <a:ln/>
-        </p:spPr>
-        <p:txBody>
-          <a:bodyPr wrap="square" lIns="0" tIns="0" rIns="0" bIns="0" rtlCol="0" anchor="ctr"/>
-          <a:lstStyle/>
-          <a:p>
-            <a:pPr marL="0" indent="0">
-              <a:buNone/>
-            </a:pPr>
-            <a:r>
-              <a:rPr lang="en-US" sz="1300" b="1" dirty="0">
-                <a:solidFill>
-                  <a:srgbClr val="E8C44A"/>
-                </a:solidFill>
-                <a:latin typeface="Consolas" pitchFamily="34" charset="0"/>
-                <a:ea typeface="Consolas" pitchFamily="34" charset="-122"/>
-                <a:cs typeface="Consolas" pitchFamily="34" charset="-120"/>
-              </a:rPr>
-              <a:t>① Perspektívne delenie → NDC</a:t>
-            </a:r>
-            <a:endParaRPr lang="en-US" sz="1300" dirty="0"/>
-          </a:p>
-        </p:txBody>
-      </p:sp>
-      <p:sp>
-        <p:nvSpPr>
-          <p:cNvPr id="25" name="Text 22"/>
-          <p:cNvSpPr/>
-          <p:nvPr/>
-        </p:nvSpPr>
-        <p:spPr>
-          <a:xfrm>
-            <a:off x="4608576" y="2798064"/>
-            <a:ext cx="4242816" cy="402336"/>
-          </a:xfrm>
-          <a:prstGeom prst="rect">
-            <a:avLst/>
-          </a:prstGeom>
-          <a:noFill/>
-          <a:ln/>
-        </p:spPr>
-        <p:txBody>
-          <a:bodyPr wrap="square" lIns="0" tIns="0" rIns="0" bIns="0" rtlCol="0" anchor="t"/>
-          <a:lstStyle/>
-          <a:p>
-            <a:pPr marL="0" indent="0">
-              <a:buNone/>
-            </a:pPr>
-            <a:r>
-              <a:rPr lang="en-US" sz="1200" dirty="0">
-                <a:solidFill>
-                  <a:srgbClr val="CCCCCC"/>
-                </a:solidFill>
-                <a:latin typeface="Consolas" pitchFamily="34" charset="0"/>
-                <a:ea typeface="Consolas" pitchFamily="34" charset="-122"/>
-                <a:cs typeface="Consolas" pitchFamily="34" charset="-120"/>
-              </a:rPr>
-              <a:t>projCoords = lsPos.xyz / lsPos.w</a:t>
-            </a:r>
-            <a:endParaRPr lang="en-US" sz="1200" dirty="0"/>
-          </a:p>
-          <a:p>
-            <a:pPr marL="0" indent="0">
-              <a:buNone/>
-            </a:pPr>
-            <a:r>
-              <a:rPr lang="en-US" sz="1200" dirty="0">
-                <a:solidFill>
-                  <a:srgbClr val="CCCCCC"/>
-                </a:solidFill>
-                <a:latin typeface="Consolas" pitchFamily="34" charset="0"/>
-                <a:ea typeface="Consolas" pitchFamily="34" charset="-122"/>
-                <a:cs typeface="Consolas" pitchFamily="34" charset="-120"/>
-              </a:rPr>
-              <a:t>Pre ortho: w=1, delenie nič nerobí.</a:t>
-            </a:r>
-            <a:endParaRPr lang="en-US" sz="1200" dirty="0"/>
-          </a:p>
-        </p:txBody>
-      </p:sp>
-      <p:sp>
-        <p:nvSpPr>
-          <p:cNvPr id="26" name="Shape 23"/>
-          <p:cNvSpPr/>
-          <p:nvPr/>
-        </p:nvSpPr>
-        <p:spPr>
-          <a:xfrm>
-            <a:off x="4480560" y="3364992"/>
-            <a:ext cx="4498848" cy="896112"/>
-          </a:xfrm>
-          <a:prstGeom prst="rect">
-            <a:avLst/>
-          </a:prstGeom>
-          <a:solidFill>
-            <a:srgbClr val="1E2330"/>
-          </a:solidFill>
-          <a:ln w="12700">
-            <a:solidFill>
-              <a:srgbClr val="4AE88A"/>
-            </a:solidFill>
-            <a:prstDash val="solid"/>
-          </a:ln>
-        </p:spPr>
-        <p:txBody>
-          <a:bodyPr/>
-          <a:lstStyle/>
-          <a:p>
-            <a:endParaRPr lang="ru-RU"/>
-          </a:p>
-        </p:txBody>
-      </p:sp>
-      <p:sp>
-        <p:nvSpPr>
-          <p:cNvPr id="27" name="Text 24"/>
-          <p:cNvSpPr/>
-          <p:nvPr/>
-        </p:nvSpPr>
-        <p:spPr>
-          <a:xfrm>
-            <a:off x="4608576" y="3456432"/>
-            <a:ext cx="4242816" cy="292608"/>
-          </a:xfrm>
-          <a:prstGeom prst="rect">
-            <a:avLst/>
-          </a:prstGeom>
-          <a:noFill/>
-          <a:ln/>
-        </p:spPr>
-        <p:txBody>
-          <a:bodyPr wrap="square" lIns="0" tIns="0" rIns="0" bIns="0" rtlCol="0" anchor="ctr"/>
-          <a:lstStyle/>
-          <a:p>
-            <a:pPr marL="0" indent="0">
-              <a:buNone/>
-            </a:pPr>
-            <a:r>
-              <a:rPr lang="en-US" sz="1300" b="1" dirty="0">
-                <a:solidFill>
-                  <a:srgbClr val="4AE88A"/>
-                </a:solidFill>
-                <a:latin typeface="Consolas" pitchFamily="34" charset="0"/>
-                <a:ea typeface="Consolas" pitchFamily="34" charset="-122"/>
-                <a:cs typeface="Consolas" pitchFamily="34" charset="-120"/>
-              </a:rPr>
-              <a:t>② Normalizácia NDC → UV [0,1]</a:t>
-            </a:r>
-            <a:endParaRPr lang="en-US" sz="1300" dirty="0"/>
-          </a:p>
-        </p:txBody>
-      </p:sp>
-      <p:sp>
-        <p:nvSpPr>
-          <p:cNvPr id="28" name="Text 25"/>
-          <p:cNvSpPr/>
-          <p:nvPr/>
-        </p:nvSpPr>
-        <p:spPr>
-          <a:xfrm>
-            <a:off x="4608576" y="3785616"/>
-            <a:ext cx="4242816" cy="402336"/>
-          </a:xfrm>
-          <a:prstGeom prst="rect">
-            <a:avLst/>
-          </a:prstGeom>
-          <a:noFill/>
-          <a:ln/>
-        </p:spPr>
-        <p:txBody>
-          <a:bodyPr wrap="square" lIns="0" tIns="0" rIns="0" bIns="0" rtlCol="0" anchor="t"/>
-          <a:lstStyle/>
-          <a:p>
-            <a:pPr marL="0" indent="0">
-              <a:buNone/>
-            </a:pPr>
-            <a:r>
-              <a:rPr lang="en-US" sz="1200" dirty="0">
-                <a:solidFill>
-                  <a:srgbClr val="CCCCCC"/>
-                </a:solidFill>
-                <a:latin typeface="Consolas" pitchFamily="34" charset="0"/>
-                <a:ea typeface="Consolas" pitchFamily="34" charset="-122"/>
-                <a:cs typeface="Consolas" pitchFamily="34" charset="-120"/>
-              </a:rPr>
-              <a:t>proj = proj * 0.5 + 0.5</a:t>
-            </a:r>
-            <a:endParaRPr lang="en-US" sz="1200" dirty="0"/>
-          </a:p>
-          <a:p>
-            <a:pPr marL="0" indent="0">
-              <a:buNone/>
-            </a:pPr>
-            <a:r>
-              <a:rPr lang="en-US" sz="1200" dirty="0">
-                <a:solidFill>
-                  <a:srgbClr val="CCCCCC"/>
-                </a:solidFill>
-                <a:latin typeface="Consolas" pitchFamily="34" charset="0"/>
-                <a:ea typeface="Consolas" pitchFamily="34" charset="-122"/>
-                <a:cs typeface="Consolas" pitchFamily="34" charset="-120"/>
-              </a:rPr>
-              <a:t>proj.xy = UV pre depth mapu,  proj.z = hĺbka</a:t>
-            </a:r>
-            <a:endParaRPr lang="en-US" sz="1200" dirty="0"/>
-          </a:p>
-        </p:txBody>
-      </p:sp>
-      <p:sp>
-        <p:nvSpPr>
-          <p:cNvPr id="29" name="Shape 26"/>
-          <p:cNvSpPr/>
-          <p:nvPr/>
-        </p:nvSpPr>
-        <p:spPr>
-          <a:xfrm>
-            <a:off x="0" y="4800600"/>
-            <a:ext cx="9144000" cy="338328"/>
-          </a:xfrm>
-          <a:prstGeom prst="rect">
-            <a:avLst/>
-          </a:prstGeom>
-          <a:solidFill>
-            <a:srgbClr val="1A1E26"/>
-          </a:solidFill>
-          <a:ln w="12700">
-            <a:solidFill>
-              <a:srgbClr val="1A1E26"/>
-            </a:solidFill>
-            <a:prstDash val="solid"/>
-          </a:ln>
-        </p:spPr>
-        <p:txBody>
-          <a:bodyPr/>
-          <a:lstStyle/>
-          <a:p>
-            <a:endParaRPr lang="ru-RU"/>
-          </a:p>
-        </p:txBody>
-      </p:sp>
-      <p:sp>
-        <p:nvSpPr>
-          <p:cNvPr id="30" name="Text 27"/>
-          <p:cNvSpPr/>
-          <p:nvPr/>
-        </p:nvSpPr>
-        <p:spPr>
-          <a:xfrm>
-            <a:off x="274320" y="4800600"/>
-            <a:ext cx="8595360" cy="338328"/>
-          </a:xfrm>
-          <a:prstGeom prst="rect">
-            <a:avLst/>
-          </a:prstGeom>
-          <a:noFill/>
-          <a:ln/>
-        </p:spPr>
-        <p:txBody>
-          <a:bodyPr wrap="square" lIns="0" tIns="0" rIns="0" bIns="0" rtlCol="0" anchor="ctr"/>
-          <a:lstStyle/>
-          <a:p>
-            <a:pPr marL="0" indent="0">
-              <a:buNone/>
-            </a:pPr>
-            <a:r>
-              <a:rPr lang="en-US" sz="1200" dirty="0">
-                <a:solidFill>
-                  <a:srgbClr val="CCCCCC"/>
-                </a:solidFill>
-                <a:latin typeface="Consolas" pitchFamily="34" charset="0"/>
-                <a:ea typeface="Consolas" pitchFamily="34" charset="-122"/>
-                <a:cs typeface="Consolas" pitchFamily="34" charset="-120"/>
-              </a:rPr>
-              <a:t>Výsledok: proj.xy hovorí kde vzorkovať depth mapu,  proj.z je hĺbka nášho fragmentu.</a:t>
             </a:r>
             <a:endParaRPr lang="en-US" sz="1200" dirty="0"/>
           </a:p>
